--- a/docs/presentation/Bengkel_Santai_NextGen_Celik_Digital_2026.pptx
+++ b/docs/presentation/Bengkel_Santai_NextGen_Celik_Digital_2026.pptx
@@ -517,12 +517,13 @@
           <a:lstStyle/>
           <a:p>
             <a:r>
-              <a:t>NOTA PENCERAMAH (SLAID 1):</a:t>
-            </a:r>
-          </a:p>
-          <a:p>
-            <a:r>
-              <a:t>Beri salam semangat, panggil adik-adik dengan mesra. Maklumkan bahawa hari ini bukan kuliah bosan, tetapi ekspedisi meneroka dunia masa depan bersama abang &amp; kakak UTM.</a:t>
+              <a:t>PANDUAN &amp; NADA PENCERAMAH (SLAID 1):</a:t>
+            </a:r>
+          </a:p>
+          <a:p/>
+          <a:p>
+            <a:r>
+              <a:t>Beri salam penuh bertenaga! Sapu pandangan ke seluruh 7 meja kluster. Katakan kepada adik-adik ASDAF: 'Hari ini kita bukan nak belajar kuliah universiti yang membosankan. Kita datang nak bersantai, bergelak tawa, dan meneroka rahsia teknologi masa depan bersama abang &amp; kakak UTM!'.</a:t>
             </a:r>
           </a:p>
         </p:txBody>
@@ -592,12 +593,13 @@
           <a:lstStyle/>
           <a:p>
             <a:r>
-              <a:t>NOTA PENCERAMAH (SLAID 10):</a:t>
-            </a:r>
-          </a:p>
-          <a:p>
-            <a:r>
-              <a:t>Ajak semua dewan sebut beramai-ramai: 'TIDAK PASTI, TIDAK KONGSI, TIDAK KLIK!'. Hafal talian Pusat Respons Scam Kebangsaan 997.</a:t>
+              <a:t>PANDUAN &amp; NADA PENCERAMAH (SLAID 10):</a:t>
+            </a:r>
+          </a:p>
+          <a:p/>
+          <a:p>
+            <a:r>
+              <a:t>Latihan laung dewan beramai-ramai! Penceramah jerit: 'T1!' Dewan balas: 'TIDAK PASTI!' Penceramah: 'T2!' Dewan: 'TIDAK KONGSI!' Penceramah: 'T3!' Dewan: 'TIDAK KLIK!' Jadikan suasana dewan gegak gempita.</a:t>
             </a:r>
           </a:p>
         </p:txBody>
@@ -667,12 +669,13 @@
           <a:lstStyle/>
           <a:p>
             <a:r>
-              <a:t>NOTA PENCERAMAH (SLAID 11):</a:t>
-            </a:r>
-          </a:p>
-          <a:p>
-            <a:r>
-              <a:t>Ajar teknik gabung 3 perkataan rawak menjadi ayat rahsia yang mudah diingat pemilik tetapi mustahil diteka oleh penggodam.</a:t>
+              <a:t>PANDUAN &amp; NADA PENCERAMAH (SLAID 11):</a:t>
+            </a:r>
+          </a:p>
+          <a:p/>
+          <a:p>
+            <a:r>
+              <a:t>Ajar teknik gabung 3 perkataan rawak. Minta seorang pelajar reka satu passphrase di depan dewan. Tunjukkan betapa kukuhnya kata laluan tersebut.</a:t>
             </a:r>
           </a:p>
         </p:txBody>
@@ -742,12 +745,13 @@
           <a:lstStyle/>
           <a:p>
             <a:r>
-              <a:t>NOTA PENCERAMAH (SLAID 12):</a:t>
-            </a:r>
-          </a:p>
-          <a:p>
-            <a:r>
-              <a:t>Peringatan empati: Jaga aib dan maruah diri di TikTok/Instagram. Apa yang dimuat naik hari ini boleh dilihat oleh majikan atau penemuduga universiti 5 tahun lagi.</a:t>
+              <a:t>PANDUAN &amp; NADA PENCERAMAH (SLAID 12):</a:t>
+            </a:r>
+          </a:p>
+          <a:p/>
+          <a:p>
+            <a:r>
+              <a:t>Peringatan empati dan sentuhan emosi. Terangkan bahawa status TikTok/Instagram yang dipadam masih boleh diambil tangkap layar (screenshot). Jaga maruah diri.</a:t>
             </a:r>
           </a:p>
         </p:txBody>
@@ -817,12 +821,13 @@
           <a:lstStyle/>
           <a:p>
             <a:r>
-              <a:t>NOTA PENCERAMAH (SLAID 13):</a:t>
-            </a:r>
-          </a:p>
-          <a:p>
-            <a:r>
-              <a:t>Umumkan aktiviti kemuncak: Meja korang kini adalah syarikat teknologi! Cipta 1 idea inovasi untuk bantu asrama/sekolah anda.</a:t>
+              <a:t>PANDUAN &amp; NADA PENCERAMAH (SLAID 13):</a:t>
+            </a:r>
+          </a:p>
+          <a:p/>
+          <a:p>
+            <a:r>
+              <a:t>Umumkan aktiviti kemuncak! Fasilitator meja segera edarkan kertas mahjong dan bekas marker. Tiup wisel tanda masa 35 minit bermula!</a:t>
             </a:r>
           </a:p>
         </p:txBody>
@@ -892,12 +897,13 @@
           <a:lstStyle/>
           <a:p>
             <a:r>
-              <a:t>NOTA PENCERAMAH (SLAID 14):</a:t>
-            </a:r>
-          </a:p>
-          <a:p>
-            <a:r>
-              <a:t>Fasilitator meja bersedia membantu pelajar membahagikan kertas mahjong kepada 4 kuadran ringkas dan menarik.</a:t>
+              <a:t>PANDUAN &amp; NADA PENCERAMAH (SLAID 14):</a:t>
+            </a:r>
+          </a:p>
+          <a:p/>
+          <a:p>
+            <a:r>
+              <a:t>Tunjukkan struktur 4 kuadran ini di layar skrin dewan sepanjang masa 35 minit agar semua meja ada panduan visual yang jelas.</a:t>
             </a:r>
           </a:p>
         </p:txBody>
@@ -967,12 +973,13 @@
           <a:lstStyle/>
           <a:p>
             <a:r>
-              <a:t>NOTA PENCERAMAH (SLAID 15):</a:t>
-            </a:r>
-          </a:p>
-          <a:p>
-            <a:r>
-              <a:t>Pemanas suasana kuiz: Tangan atas meja, mata pada skrin! Siapa terpantas dan tepat, terus sapu hadiah di hadapan pentas.</a:t>
+              <a:t>PANDUAN &amp; NADA PENCERAMAH (SLAID 15):</a:t>
+            </a:r>
+          </a:p>
+          <a:p/>
+          <a:p>
+            <a:r>
+              <a:t>Cipta debaran dewan! Gunakan muzik latar rancak jika ada. Emcee berdiri di hadapan dewan mengira detik undur. Pemenang naik pentas terus menerima hadiah dan tepukan gemuruh.</a:t>
             </a:r>
           </a:p>
         </p:txBody>
@@ -1042,12 +1049,13 @@
           <a:lstStyle/>
           <a:p>
             <a:r>
-              <a:t>NOTA PENCERAMAH (SLAID 16):</a:t>
-            </a:r>
-          </a:p>
-          <a:p>
-            <a:r>
-              <a:t>Kata-kata penutup inspirasi: 'Korang adalah generasi peneraju teknologi negara. Jangan pernah rasa rendah diri, buktikan kemampuan anak ASDAF!'.</a:t>
+              <a:t>PANDUAN &amp; NADA PENCERAMAH (SLAID 16):</a:t>
+            </a:r>
+          </a:p>
+          <a:p/>
+          <a:p>
+            <a:r>
+              <a:t>Kata penutup menyentuh jiwa. Ucapkan terima kasih kepada pengetua, warden, guru ASDAF dan adik-adik semua. Ajak semua dewan berdiri untuk bergambar dan melaungkan slogan UTM x ASDAF!</a:t>
             </a:r>
           </a:p>
         </p:txBody>
@@ -1117,12 +1125,13 @@
           <a:lstStyle/>
           <a:p>
             <a:r>
-              <a:t>NOTA PENCERAMAH (SLAID 2):</a:t>
-            </a:r>
-          </a:p>
-          <a:p>
-            <a:r>
-              <a:t>Perkenalkan setiap peranan secara santai. Tekankan bahawa mahasiswa universiti datang sebagai rakan mentor untuk menyokong impian mereka.</a:t>
+              <a:t>PANDUAN &amp; NADA PENCERAMAH (SLAID 2):</a:t>
+            </a:r>
+          </a:p>
+          <a:p/>
+          <a:p>
+            <a:r>
+              <a:t>Perkenalkan setiap fasilitator meja. Minta setiap mentor meja angkat tangan dan lambaikan tangan kepada adik-adik di meja masing-masing. Wujudkan suasana ceria tanpa rasa kekok.</a:t>
             </a:r>
           </a:p>
         </p:txBody>
@@ -1192,12 +1201,13 @@
           <a:lstStyle/>
           <a:p>
             <a:r>
-              <a:t>NOTA PENCERAMAH (SLAID 3):</a:t>
-            </a:r>
-          </a:p>
-          <a:p>
-            <a:r>
-              <a:t>Tanya audiens: 'Bila dengar perkataan AI, apa yang terlintas? Terminator?'. Jelaskan AI sebenarnya adalah program matematik yang belajar mengecam corak data manusia.</a:t>
+              <a:t>PANDUAN &amp; NADA PENCERAMAH (SLAID 3):</a:t>
+            </a:r>
+          </a:p>
+          <a:p/>
+          <a:p>
+            <a:r>
+              <a:t>Tanya audiens secara spontan: 'Bila dengar perkataan AI, apa yang terlintas di fikiran adik-adik?'. Tunggu 2-3 jawapan ringkas, kemudian jelaskan dengan perbandingan skrin ini.</a:t>
             </a:r>
           </a:p>
         </p:txBody>
@@ -1267,12 +1277,13 @@
           <a:lstStyle/>
           <a:p>
             <a:r>
-              <a:t>NOTA PENCERAMAH (SLAID 4):</a:t>
-            </a:r>
-          </a:p>
-          <a:p>
-            <a:r>
-              <a:t>Aktiviti interaktif pentas: Tunjuk gambar anak kucing dan anjing muffin. Minta pelajar angkat tangan teka bagaimana komputer membezakannya.</a:t>
+              <a:t>PANDUAN &amp; NADA PENCERAMAH (SLAID 4):</a:t>
+            </a:r>
+          </a:p>
+          <a:p/>
+          <a:p>
+            <a:r>
+              <a:t>Aktiviti pentas: Tunjuk gambar perbandingan muffin coklat dan muka anjing chihuahua. Minta murid angkat tangan siapa rasa komputer boleh tersilap. Dewan pasti terhibur bila tahu komputer boleh tertipu dengan muffin coklat.</a:t>
             </a:r>
           </a:p>
         </p:txBody>
@@ -1342,12 +1353,13 @@
           <a:lstStyle/>
           <a:p>
             <a:r>
-              <a:t>NOTA PENCERAMAH (SLAID 5):</a:t>
-            </a:r>
-          </a:p>
-          <a:p>
-            <a:r>
-              <a:t>Minta seorang wakil pelajar di Meja 1 sebut nama tempat kegemaran mereka (cth: 'Bukit Persekutuan'). Penceramah taip prompt: 'Tulis pantun 4 kerat tentang semangat anak ASDAF Bukit Persekutuan'. Papar hasil serta-merta.</a:t>
+              <a:t>PANDUAN &amp; NADA PENCERAMAH (SLAID 5):</a:t>
+            </a:r>
+          </a:p>
+          <a:p/>
+          <a:p>
+            <a:r>
+              <a:t>Minta seorang wakil pelajar di Meja 1 sebutkan satu perkataan kegemaran mereka. Penceramah taip secara langsung di skrin projektor. Tunjukkan keajaiban AI menjana ayat puitis dalam sekelip mata.</a:t>
             </a:r>
           </a:p>
         </p:txBody>
@@ -1417,12 +1429,13 @@
           <a:lstStyle/>
           <a:p>
             <a:r>
-              <a:t>NOTA PENCERAMAH (SLAID 6):</a:t>
-            </a:r>
-          </a:p>
-          <a:p>
-            <a:r>
-              <a:t>Minta wakil Meja 4 sebutkan gabungan imaginasi liar: 'Harimau Malaya memakai baju sukan UTM bermain bola sepak di angkasa lepas'. Tunjukkan gambar terjana dalam 5 saat! Dewan teruja.</a:t>
+              <a:t>PANDUAN &amp; NADA PENCERAMAH (SLAID 6):</a:t>
+            </a:r>
+          </a:p>
+          <a:p/>
+          <a:p>
+            <a:r>
+              <a:t>Tunjukkan penjanaan gambar secara langsung menggunakan alatan AI teks-ke-imej di skrin besar. Selitkan mesej etika: Jangan guna AI untuk mengaibkan rakan.</a:t>
             </a:r>
           </a:p>
         </p:txBody>
@@ -1492,12 +1505,13 @@
           <a:lstStyle/>
           <a:p>
             <a:r>
-              <a:t>NOTA PENCERAMAH (SLAID 7):</a:t>
-            </a:r>
-          </a:p>
-          <a:p>
-            <a:r>
-              <a:t>Tekankan prinsip integriti: AI bukan untuk menipu kerja rumah, tetapi sebagai guru tuisyen peribadi yang sabar menjawab soalan berulang kali.</a:t>
+              <a:t>PANDUAN &amp; NADA PENCERAMAH (SLAID 7):</a:t>
+            </a:r>
+          </a:p>
+          <a:p/>
+          <a:p>
+            <a:r>
+              <a:t>Tekankan aspek integriti. Pelajar asrama perlu tahu bahawa AI adalah guru tuisyen percuma yang sabar, tetapi SPM sebenar memerlukan otak dan pena mereka sendiri.</a:t>
             </a:r>
           </a:p>
         </p:txBody>
@@ -1567,12 +1581,13 @@
           <a:lstStyle/>
           <a:p>
             <a:r>
-              <a:t>NOTA PENCERAMAH (SLAID 8):</a:t>
-            </a:r>
-          </a:p>
-          <a:p>
-            <a:r>
-              <a:t>Motivasi khas: Bakat teknologi tidak mengira anak bandar atau anak asrama pedalaman. Siapa rajin belajar logik dan celik IT, dunia luas menanti biasiswa dan tawaran kerjaya bergaji tinggi.</a:t>
+              <a:t>PANDUAN &amp; NADA PENCERAMAH (SLAID 8):</a:t>
+            </a:r>
+          </a:p>
+          <a:p/>
+          <a:p>
+            <a:r>
+              <a:t>Bakar semangat anak-anak ASDAF. Ceritakan kisah inspirasi bagaimana ramai jurutera teknologi berasal dari latar belakang keluarga susah tetapi berjaya menembusi syarikat gergasi.</a:t>
             </a:r>
           </a:p>
         </p:txBody>
@@ -1642,12 +1657,13 @@
           <a:lstStyle/>
           <a:p>
             <a:r>
-              <a:t>NOTA PENCERAMAH (SLAID 9):</a:t>
-            </a:r>
-          </a:p>
-          <a:p>
-            <a:r>
-              <a:t>Tanya: 'Siapa pernah terima mesej macam ni?'. Jelaskan ini adalah pancingan data (phishing) yang berniat mencuri akaun dan duit keluarga.</a:t>
+              <a:t>PANDUAN &amp; NADA PENCERAMAH (SLAID 9):</a:t>
+            </a:r>
+          </a:p>
+          <a:p/>
+          <a:p>
+            <a:r>
+              <a:t>Tanya dewan: 'Siapa pernah dapat mesej macam ni kat WhatsApp mak ayah atau telefon sendiri?'. Beri amaran tegas tentang bahaya klik link sembarangan.</a:t>
             </a:r>
           </a:p>
         </p:txBody>
@@ -4668,7 +4684,7 @@
             <a:avLst/>
           </a:prstGeom>
           <a:solidFill>
-            <a:srgbClr val="0F172A"/>
+            <a:srgbClr val="0A0F1D"/>
           </a:solidFill>
           <a:ln>
             <a:noFill/>
@@ -4705,13 +4721,13 @@
         <p:spPr>
           <a:xfrm>
             <a:off x="0" y="0"/>
-            <a:ext cx="12191695" cy="365760"/>
+            <a:ext cx="12191695" cy="411480"/>
           </a:xfrm>
           <a:prstGeom prst="rect">
             <a:avLst/>
           </a:prstGeom>
           <a:solidFill>
-            <a:srgbClr val="7A1C30"/>
+            <a:srgbClr val="8A1C34"/>
           </a:solidFill>
           <a:ln>
             <a:noFill/>
@@ -4747,14 +4763,14 @@
         </p:nvSpPr>
         <p:spPr>
           <a:xfrm>
-            <a:off x="0" y="365760"/>
+            <a:off x="0" y="411480"/>
             <a:ext cx="12191695" cy="73152"/>
           </a:xfrm>
           <a:prstGeom prst="rect">
             <a:avLst/>
           </a:prstGeom>
           <a:solidFill>
-            <a:srgbClr val="C5A880"/>
+            <a:srgbClr val="D4AF37"/>
           </a:solidFill>
           <a:ln>
             <a:noFill/>
@@ -4790,8 +4806,8 @@
         </p:nvSpPr>
         <p:spPr>
           <a:xfrm>
-            <a:off x="914400" y="822960"/>
-            <a:ext cx="10362895" cy="2011680"/>
+            <a:off x="822960" y="777240"/>
+            <a:ext cx="10515600" cy="2011680"/>
           </a:xfrm>
           <a:prstGeom prst="rect">
             <a:avLst/>
@@ -4806,22 +4822,22 @@
           <a:p>
             <a:pPr>
               <a:spcAft>
-                <a:spcPts val="1000"/>
+                <a:spcPts val="600"/>
               </a:spcAft>
-              <a:defRPr sz="1400" b="1">
-                <a:solidFill>
-                  <a:srgbClr val="C5A880"/>
-                </a:solidFill>
-              </a:defRPr>
-            </a:pPr>
-            <a:r>
-              <a:t>PROGRAM KOMUNITI SISWAZAH UTM KL x ASDAF PERKIM</a:t>
+              <a:defRPr sz="1300" b="1">
+                <a:solidFill>
+                  <a:srgbClr val="D4AF37"/>
+                </a:solidFill>
+              </a:defRPr>
+            </a:pPr>
+            <a:r>
+              <a:t>PROGRAM KHIDMAT MASYARAKAT SISWAZAH  •  UTM KL × ASDAF PERKIM</a:t>
             </a:r>
           </a:p>
           <a:p>
             <a:pPr>
               <a:spcAft>
-                <a:spcPts val="800"/>
+                <a:spcPts val="600"/>
               </a:spcAft>
               <a:defRPr sz="3200" b="1">
                 <a:solidFill>
@@ -4837,12 +4853,12 @@
             <a:pPr>
               <a:defRPr sz="2000" b="1">
                 <a:solidFill>
-                  <a:srgbClr val="DFBA8E"/>
-                </a:solidFill>
-              </a:defRPr>
-            </a:pPr>
-            <a:r>
-              <a:t>LITERASI TEKNOLOGI &amp; KECERDASAN BUATAN (AI)</a:t>
+                  <a:srgbClr val="0EA5E9"/>
+                </a:solidFill>
+              </a:defRPr>
+            </a:pPr>
+            <a:r>
+              <a:t>“LITERASI TEKNOLOGI &amp; KESEDARAN KECERDASAN BUATAN (AI)”</a:t>
             </a:r>
           </a:p>
         </p:txBody>
@@ -4855,18 +4871,18 @@
         </p:nvSpPr>
         <p:spPr>
           <a:xfrm>
-            <a:off x="914400" y="3108960"/>
-            <a:ext cx="4937760" cy="3017520"/>
+            <a:off x="822960" y="2926080"/>
+            <a:ext cx="2514600" cy="777240"/>
           </a:xfrm>
           <a:prstGeom prst="roundRect">
             <a:avLst/>
           </a:prstGeom>
           <a:solidFill>
-            <a:srgbClr val="1B263B"/>
+            <a:srgbClr val="131E36"/>
           </a:solidFill>
           <a:ln w="19050">
             <a:solidFill>
-              <a:srgbClr val="7A1C30"/>
+              <a:srgbClr val="8A1C34"/>
             </a:solidFill>
           </a:ln>
         </p:spPr>
@@ -4885,81 +4901,30 @@
           </a:fontRef>
         </p:style>
         <p:txBody>
-          <a:bodyPr rtlCol="0" anchor="ctr" wrap="square" lIns="274320" rIns="274320" tIns="228600"/>
+          <a:bodyPr rtlCol="0" anchor="ctr" wrap="square"/>
           <a:lstStyle/>
           <a:p>
             <a:pPr algn="ctr">
-              <a:spcAft>
-                <a:spcPts val="1000"/>
-              </a:spcAft>
-              <a:defRPr sz="1500" b="1">
-                <a:solidFill>
-                  <a:srgbClr val="C5A880"/>
-                </a:solidFill>
-              </a:defRPr>
-            </a:pPr>
-            <a:r>
-              <a:t>MAKLUMAT SESI SEMINAR</a:t>
-            </a:r>
-          </a:p>
-          <a:p>
-            <a:pPr>
-              <a:spcAft>
-                <a:spcPts val="600"/>
-              </a:spcAft>
-              <a:defRPr sz="1200">
+              <a:defRPr sz="1300" b="1">
+                <a:solidFill>
+                  <a:srgbClr val="8A1C34"/>
+                </a:solidFill>
+              </a:defRPr>
+            </a:pPr>
+            <a:r>
+              <a:t>46 PELAJAR</a:t>
+            </a:r>
+          </a:p>
+          <a:p>
+            <a:pPr algn="ctr">
+              <a:defRPr sz="950">
                 <a:solidFill>
                   <a:srgbClr val="F1F5F9"/>
                 </a:solidFill>
               </a:defRPr>
             </a:pPr>
             <a:r>
-              <a:t>• Anjuran: Universiti Teknologi Malaysia (UTM KL) &amp; ASDAF PERKIM</a:t>
-            </a:r>
-          </a:p>
-          <a:p>
-            <a:pPr>
-              <a:spcAft>
-                <a:spcPts val="600"/>
-              </a:spcAft>
-              <a:defRPr sz="1200">
-                <a:solidFill>
-                  <a:srgbClr val="F1F5F9"/>
-                </a:solidFill>
-              </a:defRPr>
-            </a:pPr>
-            <a:r>
-              <a:t>• Tarikh: Sabtu, 12 September 2026 (8:30 AM – 12:00 PM)</a:t>
-            </a:r>
-          </a:p>
-          <a:p>
-            <a:pPr>
-              <a:spcAft>
-                <a:spcPts val="600"/>
-              </a:spcAft>
-              <a:defRPr sz="1200">
-                <a:solidFill>
-                  <a:srgbClr val="F1F5F9"/>
-                </a:solidFill>
-              </a:defRPr>
-            </a:pPr>
-            <a:r>
-              <a:t>• Penceramah Utama: Muhamad Arif bin Johar (DevOps Engineer | UTM)</a:t>
-            </a:r>
-          </a:p>
-          <a:p>
-            <a:pPr>
-              <a:spcAft>
-                <a:spcPts val="600"/>
-              </a:spcAft>
-              <a:defRPr sz="1200">
-                <a:solidFill>
-                  <a:srgbClr val="F1F5F9"/>
-                </a:solidFill>
-              </a:defRPr>
-            </a:pPr>
-            <a:r>
-              <a:t>• Sasaran: 46 Pelajar ASDAF (T1–T5 &amp; PPKI) bersama 13 Kru UTM</a:t>
+              <a:t>Tingkatan 1–5 &amp; PPKI</a:t>
             </a:r>
           </a:p>
         </p:txBody>
@@ -4972,18 +4937,18 @@
         </p:nvSpPr>
         <p:spPr>
           <a:xfrm>
-            <a:off x="6309360" y="3108960"/>
-            <a:ext cx="4937760" cy="3017520"/>
+            <a:off x="3520440" y="2926080"/>
+            <a:ext cx="2514600" cy="777240"/>
           </a:xfrm>
           <a:prstGeom prst="roundRect">
             <a:avLst/>
           </a:prstGeom>
           <a:solidFill>
-            <a:srgbClr val="1B263B"/>
+            <a:srgbClr val="131E36"/>
           </a:solidFill>
           <a:ln w="19050">
             <a:solidFill>
-              <a:srgbClr val="C5A880"/>
+              <a:srgbClr val="0EA5E9"/>
             </a:solidFill>
           </a:ln>
         </p:spPr>
@@ -5002,81 +4967,381 @@
           </a:fontRef>
         </p:style>
         <p:txBody>
-          <a:bodyPr rtlCol="0" anchor="ctr" wrap="square" lIns="274320" rIns="274320" tIns="228600"/>
+          <a:bodyPr rtlCol="0" anchor="ctr" wrap="square"/>
+          <a:lstStyle/>
+          <a:p>
+            <a:pPr algn="ctr">
+              <a:defRPr sz="1300" b="1">
+                <a:solidFill>
+                  <a:srgbClr val="0EA5E9"/>
+                </a:solidFill>
+              </a:defRPr>
+            </a:pPr>
+            <a:r>
+              <a:t>7 MEJA KLUSTER</a:t>
+            </a:r>
+          </a:p>
+          <a:p>
+            <a:pPr algn="ctr">
+              <a:defRPr sz="950">
+                <a:solidFill>
+                  <a:srgbClr val="F1F5F9"/>
+                </a:solidFill>
+              </a:defRPr>
+            </a:pPr>
+            <a:r>
+              <a:t>Fasilitator Berdedikasi</a:t>
+            </a:r>
+          </a:p>
+        </p:txBody>
+      </p:sp>
+      <p:sp>
+        <p:nvSpPr>
+          <p:cNvPr id="8" name="Rounded Rectangle 7"/>
+          <p:cNvSpPr/>
+          <p:nvPr/>
+        </p:nvSpPr>
+        <p:spPr>
+          <a:xfrm>
+            <a:off x="6217920" y="2926080"/>
+            <a:ext cx="2514600" cy="777240"/>
+          </a:xfrm>
+          <a:prstGeom prst="roundRect">
+            <a:avLst/>
+          </a:prstGeom>
+          <a:solidFill>
+            <a:srgbClr val="131E36"/>
+          </a:solidFill>
+          <a:ln w="19050">
+            <a:solidFill>
+              <a:srgbClr val="D4AF37"/>
+            </a:solidFill>
+          </a:ln>
+        </p:spPr>
+        <p:style>
+          <a:lnRef idx="1">
+            <a:schemeClr val="accent1"/>
+          </a:lnRef>
+          <a:fillRef idx="3">
+            <a:schemeClr val="accent1"/>
+          </a:fillRef>
+          <a:effectRef idx="2">
+            <a:schemeClr val="accent1"/>
+          </a:effectRef>
+          <a:fontRef idx="minor">
+            <a:schemeClr val="lt1"/>
+          </a:fontRef>
+        </p:style>
+        <p:txBody>
+          <a:bodyPr rtlCol="0" anchor="ctr" wrap="square"/>
+          <a:lstStyle/>
+          <a:p>
+            <a:pPr algn="ctr">
+              <a:defRPr sz="1300" b="1">
+                <a:solidFill>
+                  <a:srgbClr val="D4AF37"/>
+                </a:solidFill>
+              </a:defRPr>
+            </a:pPr>
+            <a:r>
+              <a:t>13 KRU UTM</a:t>
+            </a:r>
+          </a:p>
+          <a:p>
+            <a:pPr algn="ctr">
+              <a:defRPr sz="950">
+                <a:solidFill>
+                  <a:srgbClr val="F1F5F9"/>
+                </a:solidFill>
+              </a:defRPr>
+            </a:pPr>
+            <a:r>
+              <a:t>Mahasiswa Komputeran</a:t>
+            </a:r>
+          </a:p>
+        </p:txBody>
+      </p:sp>
+      <p:sp>
+        <p:nvSpPr>
+          <p:cNvPr id="9" name="Rounded Rectangle 8"/>
+          <p:cNvSpPr/>
+          <p:nvPr/>
+        </p:nvSpPr>
+        <p:spPr>
+          <a:xfrm>
+            <a:off x="8915400" y="2926080"/>
+            <a:ext cx="2514600" cy="777240"/>
+          </a:xfrm>
+          <a:prstGeom prst="roundRect">
+            <a:avLst/>
+          </a:prstGeom>
+          <a:solidFill>
+            <a:srgbClr val="131E36"/>
+          </a:solidFill>
+          <a:ln w="19050">
+            <a:solidFill>
+              <a:srgbClr val="10B981"/>
+            </a:solidFill>
+          </a:ln>
+        </p:spPr>
+        <p:style>
+          <a:lnRef idx="1">
+            <a:schemeClr val="accent1"/>
+          </a:lnRef>
+          <a:fillRef idx="3">
+            <a:schemeClr val="accent1"/>
+          </a:fillRef>
+          <a:effectRef idx="2">
+            <a:schemeClr val="accent1"/>
+          </a:effectRef>
+          <a:fontRef idx="minor">
+            <a:schemeClr val="lt1"/>
+          </a:fontRef>
+        </p:style>
+        <p:txBody>
+          <a:bodyPr rtlCol="0" anchor="ctr" wrap="square"/>
+          <a:lstStyle/>
+          <a:p>
+            <a:pPr algn="ctr">
+              <a:defRPr sz="1300" b="1">
+                <a:solidFill>
+                  <a:srgbClr val="10B981"/>
+                </a:solidFill>
+              </a:defRPr>
+            </a:pPr>
+            <a:r>
+              <a:t>SIFAR GAJET</a:t>
+            </a:r>
+          </a:p>
+          <a:p>
+            <a:pPr algn="ctr">
+              <a:defRPr sz="950">
+                <a:solidFill>
+                  <a:srgbClr val="F1F5F9"/>
+                </a:solidFill>
+              </a:defRPr>
+            </a:pPr>
+            <a:r>
+              <a:t>Interaktif Tanpa Telefon</a:t>
+            </a:r>
+          </a:p>
+        </p:txBody>
+      </p:sp>
+      <p:sp>
+        <p:nvSpPr>
+          <p:cNvPr id="10" name="Rounded Rectangle 9"/>
+          <p:cNvSpPr/>
+          <p:nvPr/>
+        </p:nvSpPr>
+        <p:spPr>
+          <a:xfrm>
+            <a:off x="822960" y="3931920"/>
+            <a:ext cx="5120640" cy="2286000"/>
+          </a:xfrm>
+          <a:prstGeom prst="roundRect">
+            <a:avLst/>
+          </a:prstGeom>
+          <a:solidFill>
+            <a:srgbClr val="131E36"/>
+          </a:solidFill>
+          <a:ln w="25400">
+            <a:solidFill>
+              <a:srgbClr val="8A1C34"/>
+            </a:solidFill>
+          </a:ln>
+        </p:spPr>
+        <p:style>
+          <a:lnRef idx="1">
+            <a:schemeClr val="accent1"/>
+          </a:lnRef>
+          <a:fillRef idx="3">
+            <a:schemeClr val="accent1"/>
+          </a:fillRef>
+          <a:effectRef idx="2">
+            <a:schemeClr val="accent1"/>
+          </a:effectRef>
+          <a:fontRef idx="minor">
+            <a:schemeClr val="lt1"/>
+          </a:fontRef>
+        </p:style>
+        <p:txBody>
+          <a:bodyPr rtlCol="0" anchor="ctr" wrap="square" lIns="320040" tIns="228600"/>
           <a:lstStyle/>
           <a:p>
             <a:pPr algn="ctr">
               <a:spcAft>
-                <a:spcPts val="1000"/>
+                <a:spcPts val="800"/>
               </a:spcAft>
-              <a:defRPr sz="1500" b="1">
-                <a:solidFill>
-                  <a:srgbClr val="C5A880"/>
-                </a:solidFill>
-              </a:defRPr>
-            </a:pPr>
-            <a:r>
-              <a:t>OBJEKTIF UTAMA BENGKEL</a:t>
+              <a:defRPr sz="1400" b="1">
+                <a:solidFill>
+                  <a:srgbClr val="D4AF37"/>
+                </a:solidFill>
+              </a:defRPr>
+            </a:pPr>
+            <a:r>
+              <a:t>MAKLUMAT PENCERAMAH &amp; SESI</a:t>
             </a:r>
           </a:p>
           <a:p>
             <a:pPr>
               <a:spcAft>
-                <a:spcPts val="600"/>
+                <a:spcPts val="400"/>
               </a:spcAft>
-              <a:defRPr sz="1200">
+              <a:defRPr sz="1150">
                 <a:solidFill>
                   <a:srgbClr val="F1F5F9"/>
                 </a:solidFill>
               </a:defRPr>
             </a:pPr>
             <a:r>
-              <a:t>✔ Membuka minda pelajar mengenai potensi sebenar teknologi dan AI.</a:t>
+              <a:t>• Penceramah: Muhamad Arif bin Johar (DevOps Engineer)</a:t>
             </a:r>
           </a:p>
           <a:p>
             <a:pPr>
               <a:spcAft>
-                <a:spcPts val="600"/>
+                <a:spcPts val="400"/>
               </a:spcAft>
-              <a:defRPr sz="1200">
+              <a:defRPr sz="1150">
                 <a:solidFill>
                   <a:srgbClr val="F1F5F9"/>
                 </a:solidFill>
               </a:defRPr>
             </a:pPr>
             <a:r>
-              <a:t>✔ Mendedahkan kemahiran keselamatan siber &amp; formula 3T lawan scam.</a:t>
+              <a:t>• Penganjur: Universiti Teknologi Malaysia (UTM KL)</a:t>
             </a:r>
           </a:p>
           <a:p>
             <a:pPr>
               <a:spcAft>
-                <a:spcPts val="600"/>
+                <a:spcPts val="400"/>
               </a:spcAft>
-              <a:defRPr sz="1200">
+              <a:defRPr sz="1150">
                 <a:solidFill>
                   <a:srgbClr val="F1F5F9"/>
                 </a:solidFill>
               </a:defRPr>
             </a:pPr>
             <a:r>
-              <a:t>✔ Membina keyakinan diri melalui amali kertas mahjong &amp; kuiz santai.</a:t>
+              <a:t>• Lokasi: Asrama Darul Falah (ASDAF) PERKIM, Bukit Persekutuan</a:t>
             </a:r>
           </a:p>
           <a:p>
             <a:pPr>
               <a:spcAft>
-                <a:spcPts val="600"/>
+                <a:spcPts val="400"/>
               </a:spcAft>
-              <a:defRPr sz="1200">
+              <a:defRPr sz="1150">
                 <a:solidFill>
                   <a:srgbClr val="F1F5F9"/>
                 </a:solidFill>
               </a:defRPr>
             </a:pPr>
             <a:r>
-              <a:t>✔ Menyemai aspirasi kerjaya digital masa depan untuk anak ASDAF.</a:t>
+              <a:t>• Tarikh: Sabtu, 12 September 2026  (8:30 AM – 12:00 PM)</a:t>
+            </a:r>
+          </a:p>
+        </p:txBody>
+      </p:sp>
+      <p:sp>
+        <p:nvSpPr>
+          <p:cNvPr id="11" name="Rounded Rectangle 10"/>
+          <p:cNvSpPr/>
+          <p:nvPr/>
+        </p:nvSpPr>
+        <p:spPr>
+          <a:xfrm>
+            <a:off x="6217920" y="3931920"/>
+            <a:ext cx="5120640" cy="2286000"/>
+          </a:xfrm>
+          <a:prstGeom prst="roundRect">
+            <a:avLst/>
+          </a:prstGeom>
+          <a:solidFill>
+            <a:srgbClr val="131E36"/>
+          </a:solidFill>
+          <a:ln w="25400">
+            <a:solidFill>
+              <a:srgbClr val="0EA5E9"/>
+            </a:solidFill>
+          </a:ln>
+        </p:spPr>
+        <p:style>
+          <a:lnRef idx="1">
+            <a:schemeClr val="accent1"/>
+          </a:lnRef>
+          <a:fillRef idx="3">
+            <a:schemeClr val="accent1"/>
+          </a:fillRef>
+          <a:effectRef idx="2">
+            <a:schemeClr val="accent1"/>
+          </a:effectRef>
+          <a:fontRef idx="minor">
+            <a:schemeClr val="lt1"/>
+          </a:fontRef>
+        </p:style>
+        <p:txBody>
+          <a:bodyPr rtlCol="0" anchor="ctr" wrap="square" lIns="320040" tIns="228600"/>
+          <a:lstStyle/>
+          <a:p>
+            <a:pPr algn="ctr">
+              <a:spcAft>
+                <a:spcPts val="800"/>
+              </a:spcAft>
+              <a:defRPr sz="1400" b="1">
+                <a:solidFill>
+                  <a:srgbClr val="0EA5E9"/>
+                </a:solidFill>
+              </a:defRPr>
+            </a:pPr>
+            <a:r>
+              <a:t>3 MISI UTAMA HARI INI</a:t>
+            </a:r>
+          </a:p>
+          <a:p>
+            <a:pPr>
+              <a:spcAft>
+                <a:spcPts val="400"/>
+              </a:spcAft>
+              <a:defRPr sz="1150">
+                <a:solidFill>
+                  <a:srgbClr val="F1F5F9"/>
+                </a:solidFill>
+              </a:defRPr>
+            </a:pPr>
+            <a:r>
+              <a:t>✔ 1. Bongkar Kuasa AI: Kenal alat pintar &amp; bagaimana ia berfikir.</a:t>
+            </a:r>
+          </a:p>
+          <a:p>
+            <a:pPr>
+              <a:spcAft>
+                <a:spcPts val="400"/>
+              </a:spcAft>
+              <a:defRPr sz="1150">
+                <a:solidFill>
+                  <a:srgbClr val="F1F5F9"/>
+                </a:solidFill>
+              </a:defRPr>
+            </a:pPr>
+            <a:r>
+              <a:t>✔ 2. Kebal Serangan Siber: Kuasai Formula 3T lawan scammer.</a:t>
+            </a:r>
+          </a:p>
+          <a:p>
+            <a:pPr>
+              <a:spcAft>
+                <a:spcPts val="400"/>
+              </a:spcAft>
+              <a:defRPr sz="1150">
+                <a:solidFill>
+                  <a:srgbClr val="F1F5F9"/>
+                </a:solidFill>
+              </a:defRPr>
+            </a:pPr>
+            <a:r>
+              <a:t>✔ 3. Startup Sprint Meja: Cipta idea inovasi di kertas mahjong!</a:t>
             </a:r>
           </a:p>
         </p:txBody>
@@ -5114,7 +5379,7 @@
             <a:avLst/>
           </a:prstGeom>
           <a:solidFill>
-            <a:srgbClr val="0F172A"/>
+            <a:srgbClr val="0A0F1D"/>
           </a:solidFill>
           <a:ln>
             <a:noFill/>
@@ -5151,13 +5416,13 @@
         <p:spPr>
           <a:xfrm>
             <a:off x="0" y="0"/>
-            <a:ext cx="12191695" cy="1188720"/>
+            <a:ext cx="12191695" cy="1097280"/>
           </a:xfrm>
           <a:prstGeom prst="rect">
             <a:avLst/>
           </a:prstGeom>
           <a:solidFill>
-            <a:srgbClr val="132238"/>
+            <a:srgbClr val="131E36"/>
           </a:solidFill>
           <a:ln>
             <a:noFill/>
@@ -5200,7 +5465,7 @@
             <a:avLst/>
           </a:prstGeom>
           <a:solidFill>
-            <a:srgbClr val="7A1C30"/>
+            <a:srgbClr val="8A1C34"/>
           </a:solidFill>
           <a:ln>
             <a:noFill/>
@@ -5236,14 +5501,14 @@
         </p:nvSpPr>
         <p:spPr>
           <a:xfrm>
-            <a:off x="0" y="1188720"/>
-            <a:ext cx="12191695" cy="45720"/>
+            <a:off x="0" y="1097280"/>
+            <a:ext cx="12191695" cy="36576"/>
           </a:xfrm>
           <a:prstGeom prst="rect">
             <a:avLst/>
           </a:prstGeom>
           <a:solidFill>
-            <a:srgbClr val="C5A880"/>
+            <a:srgbClr val="D4AF37"/>
           </a:solidFill>
           <a:ln>
             <a:noFill/>
@@ -5280,7 +5545,7 @@
         <p:spPr>
           <a:xfrm>
             <a:off x="731520" y="109728"/>
-            <a:ext cx="10698480" cy="1005840"/>
+            <a:ext cx="10728655" cy="914400"/>
           </a:xfrm>
           <a:prstGeom prst="rect">
             <a:avLst/>
@@ -5299,24 +5564,24 @@
               </a:spcAft>
               <a:defRPr sz="1100" b="1">
                 <a:solidFill>
-                  <a:srgbClr val="C5A880"/>
-                </a:solidFill>
-              </a:defRPr>
-            </a:pPr>
-            <a:r>
-              <a:t>SLAID 10  |  MODUL 2: FORMULA PERTAHANAN DIRI</a:t>
-            </a:r>
-          </a:p>
-          <a:p>
-            <a:pPr>
-              <a:defRPr sz="2100" b="1">
+                  <a:srgbClr val="D4AF37"/>
+                </a:solidFill>
+              </a:defRPr>
+            </a:pPr>
+            <a:r>
+              <a:t>SLAID 10 / 16  •  MODUL 2: FORMULA PERTAHANAN DIRI</a:t>
+            </a:r>
+          </a:p>
+          <a:p>
+            <a:pPr>
+              <a:defRPr sz="2200" b="1">
                 <a:solidFill>
                   <a:srgbClr val="FFFFFF"/>
                 </a:solidFill>
               </a:defRPr>
             </a:pPr>
             <a:r>
-              <a:t>Formula Emas 3T: Senjata Utama Melawan Scammer</a:t>
+              <a:t>Formula Emas 3T: Senjata Utama Menewaskan Scammer</a:t>
             </a:r>
           </a:p>
           <a:p>
@@ -5328,7 +5593,7 @@
               </a:defRPr>
             </a:pPr>
             <a:r>
-              <a:t>Formula Emas 3T: Senjata Kebal Melawan Scammer</a:t>
+              <a:t>Hafal 3 peraturan ini untuk melindungi diri, keluarga dan rakan-rakan seumur hidup</a:t>
             </a:r>
           </a:p>
         </p:txBody>
@@ -5341,18 +5606,18 @@
         </p:nvSpPr>
         <p:spPr>
           <a:xfrm>
-            <a:off x="731520" y="1463040"/>
-            <a:ext cx="5212080" cy="4663440"/>
+            <a:off x="822960" y="1463040"/>
+            <a:ext cx="3383280" cy="3840480"/>
           </a:xfrm>
           <a:prstGeom prst="roundRect">
             <a:avLst/>
           </a:prstGeom>
           <a:solidFill>
-            <a:srgbClr val="1B263B"/>
+            <a:srgbClr val="131E36"/>
           </a:solidFill>
-          <a:ln w="19050">
+          <a:ln w="31750">
             <a:solidFill>
-              <a:srgbClr val="7A1C30"/>
+              <a:srgbClr val="8A1C34"/>
             </a:solidFill>
           </a:ln>
         </p:spPr>
@@ -5371,21 +5636,18 @@
           </a:fontRef>
         </p:style>
         <p:txBody>
-          <a:bodyPr rtlCol="0" anchor="ctr" wrap="square" lIns="320040" rIns="320040" tIns="274320"/>
+          <a:bodyPr rtlCol="0" anchor="ctr" wrap="square" lIns="228600" tIns="182880"/>
           <a:lstStyle/>
           <a:p>
             <a:pPr algn="ctr">
-              <a:spcAft>
-                <a:spcPts val="1200"/>
-              </a:spcAft>
-              <a:defRPr sz="1500" b="1">
-                <a:solidFill>
-                  <a:srgbClr val="C5A880"/>
-                </a:solidFill>
-              </a:defRPr>
-            </a:pPr>
-            <a:r>
-              <a:t>POIN &amp; KONSEP UTAMA</a:t>
+              <a:defRPr sz="1600" b="1">
+                <a:solidFill>
+                  <a:srgbClr val="8A1C34"/>
+                </a:solidFill>
+              </a:defRPr>
+            </a:pPr>
+            <a:r>
+              <a:t>T1: TIDAK PASTI</a:t>
             </a:r>
           </a:p>
           <a:p>
@@ -5393,59 +5655,59 @@
               <a:spcAft>
                 <a:spcPts val="800"/>
               </a:spcAft>
-              <a:defRPr sz="1300">
+              <a:defRPr sz="1200" b="1">
+                <a:solidFill>
+                  <a:srgbClr val="FFFFFF"/>
+                </a:solidFill>
+              </a:defRPr>
+            </a:pPr>
+            <a:r>
+              <a:t>Siasat Dulu!</a:t>
+            </a:r>
+          </a:p>
+          <a:p>
+            <a:pPr>
+              <a:spcAft>
+                <a:spcPts val="600"/>
+              </a:spcAft>
+              <a:defRPr sz="1100">
                 <a:solidFill>
                   <a:srgbClr val="F1F5F9"/>
                 </a:solidFill>
               </a:defRPr>
             </a:pPr>
             <a:r>
-              <a:t>• T1: TIDAK PASTI — Jangan cepat percaya mesej atau pemanggil misteri.</a:t>
+              <a:t>• Jangan mudah percaya pemanggil misteri atau mesej hadiah.</a:t>
             </a:r>
           </a:p>
           <a:p>
             <a:pPr>
               <a:spcAft>
-                <a:spcPts val="800"/>
+                <a:spcPts val="600"/>
               </a:spcAft>
-              <a:defRPr sz="1300">
+              <a:defRPr sz="1100">
                 <a:solidFill>
                   <a:srgbClr val="F1F5F9"/>
                 </a:solidFill>
               </a:defRPr>
             </a:pPr>
             <a:r>
-              <a:t>• T2: TIDAK KONGSI — Jangan sesekali beri kata laluan, nombor IC, atau OTP.</a:t>
+              <a:t>• Rujuk warden, guru, atau ibu bapa sebelum buat sebarang tindakan.</a:t>
             </a:r>
           </a:p>
           <a:p>
             <a:pPr>
               <a:spcAft>
-                <a:spcPts val="800"/>
+                <a:spcPts val="600"/>
               </a:spcAft>
-              <a:defRPr sz="1300">
+              <a:defRPr sz="1100">
                 <a:solidFill>
                   <a:srgbClr val="F1F5F9"/>
                 </a:solidFill>
               </a:defRPr>
             </a:pPr>
             <a:r>
-              <a:t>• T3: TIDAK KLIK — Jangan tekan pautan biru yang mencurigakan di WhatsApp.</a:t>
-            </a:r>
-          </a:p>
-          <a:p>
-            <a:pPr>
-              <a:spcAft>
-                <a:spcPts val="800"/>
-              </a:spcAft>
-              <a:defRPr sz="1300">
-                <a:solidFill>
-                  <a:srgbClr val="F1F5F9"/>
-                </a:solidFill>
-              </a:defRPr>
-            </a:pPr>
-            <a:r>
-              <a:t>• Hafal Talian Kecemasan Scam Kebangsaan: 997 (NSRC)!</a:t>
+              <a:t>• Sikap sangsi yang bijak adalah perisai terbaik anda.</a:t>
             </a:r>
           </a:p>
         </p:txBody>
@@ -5458,18 +5720,18 @@
         </p:nvSpPr>
         <p:spPr>
           <a:xfrm>
-            <a:off x="6217920" y="1463040"/>
-            <a:ext cx="5212080" cy="4663440"/>
+            <a:off x="4389120" y="1463040"/>
+            <a:ext cx="3383280" cy="3840480"/>
           </a:xfrm>
           <a:prstGeom prst="roundRect">
             <a:avLst/>
           </a:prstGeom>
           <a:solidFill>
-            <a:srgbClr val="C5A880"/>
+            <a:srgbClr val="131E36"/>
           </a:solidFill>
-          <a:ln w="19050">
+          <a:ln w="31750">
             <a:solidFill>
-              <a:srgbClr val="C5A880"/>
+              <a:srgbClr val="D4AF37"/>
             </a:solidFill>
           </a:ln>
         </p:spPr>
@@ -5488,21 +5750,18 @@
           </a:fontRef>
         </p:style>
         <p:txBody>
-          <a:bodyPr rtlCol="0" anchor="ctr" wrap="square" lIns="320040" rIns="320040" tIns="274320"/>
+          <a:bodyPr rtlCol="0" anchor="ctr" wrap="square" lIns="228600" tIns="182880"/>
           <a:lstStyle/>
           <a:p>
             <a:pPr algn="ctr">
-              <a:spcAft>
-                <a:spcPts val="1200"/>
-              </a:spcAft>
-              <a:defRPr sz="1500" b="1">
-                <a:solidFill>
-                  <a:srgbClr val="DFBA8E"/>
-                </a:solidFill>
-              </a:defRPr>
-            </a:pPr>
-            <a:r>
-              <a:t>TINDAKAN PANTAS JIKA TERKENA SCAM</a:t>
+              <a:defRPr sz="1600" b="1">
+                <a:solidFill>
+                  <a:srgbClr val="D4AF37"/>
+                </a:solidFill>
+              </a:defRPr>
+            </a:pPr>
+            <a:r>
+              <a:t>T2: TIDAK KONGSI</a:t>
             </a:r>
           </a:p>
           <a:p>
@@ -5510,14 +5769,113 @@
               <a:spcAft>
                 <a:spcPts val="800"/>
               </a:spcAft>
-              <a:defRPr sz="1250">
+              <a:defRPr sz="1200" b="1">
+                <a:solidFill>
+                  <a:srgbClr val="FFFFFF"/>
+                </a:solidFill>
+              </a:defRPr>
+            </a:pPr>
+            <a:r>
+              <a:t>Kunci Rahsia!</a:t>
+            </a:r>
+          </a:p>
+          <a:p>
+            <a:pPr>
+              <a:spcAft>
+                <a:spcPts val="600"/>
+              </a:spcAft>
+              <a:defRPr sz="1100">
                 <a:solidFill>
                   <a:srgbClr val="F1F5F9"/>
                 </a:solidFill>
               </a:defRPr>
             </a:pPr>
             <a:r>
-              <a:t>✔ 1. Jangan panik — bertenang dan maklumkan segera kepada warden/guru.</a:t>
+              <a:t>• Jangan sesekali beri kata laluan, nombor IC, atau kod OTP.</a:t>
+            </a:r>
+          </a:p>
+          <a:p>
+            <a:pPr>
+              <a:spcAft>
+                <a:spcPts val="600"/>
+              </a:spcAft>
+              <a:defRPr sz="1100">
+                <a:solidFill>
+                  <a:srgbClr val="F1F5F9"/>
+                </a:solidFill>
+              </a:defRPr>
+            </a:pPr>
+            <a:r>
+              <a:t>• Kata laluan adalah seperti berus gigi peribadi — jangan kongsi!</a:t>
+            </a:r>
+          </a:p>
+          <a:p>
+            <a:pPr>
+              <a:spcAft>
+                <a:spcPts val="600"/>
+              </a:spcAft>
+              <a:defRPr sz="1100">
+                <a:solidFill>
+                  <a:srgbClr val="F1F5F9"/>
+                </a:solidFill>
+              </a:defRPr>
+            </a:pPr>
+            <a:r>
+              <a:t>• Simpan maklumat keluarga dengan cermat.</a:t>
+            </a:r>
+          </a:p>
+        </p:txBody>
+      </p:sp>
+      <p:sp>
+        <p:nvSpPr>
+          <p:cNvPr id="9" name="Rounded Rectangle 8"/>
+          <p:cNvSpPr/>
+          <p:nvPr/>
+        </p:nvSpPr>
+        <p:spPr>
+          <a:xfrm>
+            <a:off x="7955279" y="1463040"/>
+            <a:ext cx="3383280" cy="3840480"/>
+          </a:xfrm>
+          <a:prstGeom prst="roundRect">
+            <a:avLst/>
+          </a:prstGeom>
+          <a:solidFill>
+            <a:srgbClr val="131E36"/>
+          </a:solidFill>
+          <a:ln w="31750">
+            <a:solidFill>
+              <a:srgbClr val="0EA5E9"/>
+            </a:solidFill>
+          </a:ln>
+        </p:spPr>
+        <p:style>
+          <a:lnRef idx="1">
+            <a:schemeClr val="accent1"/>
+          </a:lnRef>
+          <a:fillRef idx="3">
+            <a:schemeClr val="accent1"/>
+          </a:fillRef>
+          <a:effectRef idx="2">
+            <a:schemeClr val="accent1"/>
+          </a:effectRef>
+          <a:fontRef idx="minor">
+            <a:schemeClr val="lt1"/>
+          </a:fontRef>
+        </p:style>
+        <p:txBody>
+          <a:bodyPr rtlCol="0" anchor="ctr" wrap="square" lIns="228600" tIns="182880"/>
+          <a:lstStyle/>
+          <a:p>
+            <a:pPr algn="ctr">
+              <a:defRPr sz="1600" b="1">
+                <a:solidFill>
+                  <a:srgbClr val="0EA5E9"/>
+                </a:solidFill>
+              </a:defRPr>
+            </a:pPr>
+            <a:r>
+              <a:t>T3: TIDAK KLIK</a:t>
             </a:r>
           </a:p>
           <a:p>
@@ -5525,58 +5883,125 @@
               <a:spcAft>
                 <a:spcPts val="800"/>
               </a:spcAft>
-              <a:defRPr sz="1250">
+              <a:defRPr sz="1200" b="1">
+                <a:solidFill>
+                  <a:srgbClr val="FFFFFF"/>
+                </a:solidFill>
+              </a:defRPr>
+            </a:pPr>
+            <a:r>
+              <a:t>Jangan Tekan!</a:t>
+            </a:r>
+          </a:p>
+          <a:p>
+            <a:pPr>
+              <a:spcAft>
+                <a:spcPts val="600"/>
+              </a:spcAft>
+              <a:defRPr sz="1100">
                 <a:solidFill>
                   <a:srgbClr val="F1F5F9"/>
                 </a:solidFill>
               </a:defRPr>
             </a:pPr>
             <a:r>
-              <a:t>✔ 2. Hubungi talian 997 NSRC (Pusat Respons Scam Kebangsaan) dalam 24 jam.</a:t>
+              <a:t>• Jangan tekan sebarang pautan biru yang mencurigakan di WhatsApp/SMS.</a:t>
             </a:r>
           </a:p>
           <a:p>
             <a:pPr>
               <a:spcAft>
-                <a:spcPts val="800"/>
+                <a:spcPts val="600"/>
               </a:spcAft>
-              <a:defRPr sz="1250">
+              <a:defRPr sz="1100">
                 <a:solidFill>
                   <a:srgbClr val="F1F5F9"/>
                 </a:solidFill>
               </a:defRPr>
             </a:pPr>
             <a:r>
-              <a:t>✔ 3. Tukar semua kata laluan akaun media sosial dan e-mel serta-merta.</a:t>
+              <a:t>• Bila ragu-ragu, terus padam dan sekat (block) nombor tersebut.</a:t>
             </a:r>
           </a:p>
           <a:p>
             <a:pPr>
               <a:spcAft>
-                <a:spcPts val="800"/>
+                <a:spcPts val="600"/>
               </a:spcAft>
-              <a:defRPr sz="1250">
+              <a:defRPr sz="1100">
                 <a:solidFill>
                   <a:srgbClr val="F1F5F9"/>
                 </a:solidFill>
               </a:defRPr>
             </a:pPr>
             <a:r>
-              <a:t>✔ 4. Buat laporan polis bersama penjaga untuk tindakan pembekuan akaun.</a:t>
-            </a:r>
-          </a:p>
-        </p:txBody>
-      </p:sp>
-      <p:sp>
-        <p:nvSpPr>
-          <p:cNvPr id="9" name="TextBox 8"/>
+              <a:t>• Satu klik salah boleh membuka pintu kepada penggodam.</a:t>
+            </a:r>
+          </a:p>
+        </p:txBody>
+      </p:sp>
+      <p:sp>
+        <p:nvSpPr>
+          <p:cNvPr id="10" name="Rounded Rectangle 9"/>
+          <p:cNvSpPr/>
+          <p:nvPr/>
+        </p:nvSpPr>
+        <p:spPr>
+          <a:xfrm>
+            <a:off x="822960" y="5486400"/>
+            <a:ext cx="10515600" cy="640080"/>
+          </a:xfrm>
+          <a:prstGeom prst="roundRect">
+            <a:avLst/>
+          </a:prstGeom>
+          <a:solidFill>
+            <a:srgbClr val="F59E0B"/>
+          </a:solidFill>
+          <a:ln>
+            <a:noFill/>
+          </a:ln>
+        </p:spPr>
+        <p:style>
+          <a:lnRef idx="1">
+            <a:schemeClr val="accent1"/>
+          </a:lnRef>
+          <a:fillRef idx="3">
+            <a:schemeClr val="accent1"/>
+          </a:fillRef>
+          <a:effectRef idx="2">
+            <a:schemeClr val="accent1"/>
+          </a:effectRef>
+          <a:fontRef idx="minor">
+            <a:schemeClr val="lt1"/>
+          </a:fontRef>
+        </p:style>
+        <p:txBody>
+          <a:bodyPr rtlCol="0" anchor="ctr" wrap="square"/>
+          <a:lstStyle/>
+          <a:p>
+            <a:pPr algn="ctr">
+              <a:defRPr sz="1200" b="1">
+                <a:solidFill>
+                  <a:srgbClr val="0A0F1D"/>
+                </a:solidFill>
+              </a:defRPr>
+            </a:pPr>
+            <a:r>
+              <a:t>📞 TALIAN KECEMASAN SCAM KEBANGSAAN: 997 (NSRC) — Hubungi dalam 24 jam jika terkena scam!</a:t>
+            </a:r>
+          </a:p>
+        </p:txBody>
+      </p:sp>
+      <p:sp>
+        <p:nvSpPr>
+          <p:cNvPr id="11" name="TextBox 10"/>
           <p:cNvSpPr txBox="1"/>
           <p:nvPr/>
         </p:nvSpPr>
         <p:spPr>
           <a:xfrm>
-            <a:off x="731520" y="6263640"/>
-            <a:ext cx="10698480" cy="411480"/>
+            <a:off x="731520" y="6309360"/>
+            <a:ext cx="10728655" cy="365760"/>
           </a:xfrm>
           <a:prstGeom prst="rect">
             <a:avLst/>
@@ -5597,7 +6022,7 @@
               </a:defRPr>
             </a:pPr>
             <a:r>
-              <a:t>NextGen Celik Digital 2026  •  UTM KL x ASDAF PERKIM  •  Sabtu, 12 September 2026                                                                    Slaid 10 / 16</a:t>
+              <a:t>Bengkel Santai NextGen Celik Digital 2026  |  UTM KL × ASDAF PERKIM                                             Slaid 10 / 16</a:t>
             </a:r>
           </a:p>
         </p:txBody>
@@ -5635,7 +6060,7 @@
             <a:avLst/>
           </a:prstGeom>
           <a:solidFill>
-            <a:srgbClr val="0F172A"/>
+            <a:srgbClr val="0A0F1D"/>
           </a:solidFill>
           <a:ln>
             <a:noFill/>
@@ -5672,13 +6097,13 @@
         <p:spPr>
           <a:xfrm>
             <a:off x="0" y="0"/>
-            <a:ext cx="12191695" cy="1188720"/>
+            <a:ext cx="12191695" cy="1097280"/>
           </a:xfrm>
           <a:prstGeom prst="rect">
             <a:avLst/>
           </a:prstGeom>
           <a:solidFill>
-            <a:srgbClr val="132238"/>
+            <a:srgbClr val="131E36"/>
           </a:solidFill>
           <a:ln>
             <a:noFill/>
@@ -5721,7 +6146,7 @@
             <a:avLst/>
           </a:prstGeom>
           <a:solidFill>
-            <a:srgbClr val="7A1C30"/>
+            <a:srgbClr val="8A1C34"/>
           </a:solidFill>
           <a:ln>
             <a:noFill/>
@@ -5757,14 +6182,14 @@
         </p:nvSpPr>
         <p:spPr>
           <a:xfrm>
-            <a:off x="0" y="1188720"/>
-            <a:ext cx="12191695" cy="45720"/>
+            <a:off x="0" y="1097280"/>
+            <a:ext cx="12191695" cy="36576"/>
           </a:xfrm>
           <a:prstGeom prst="rect">
             <a:avLst/>
           </a:prstGeom>
           <a:solidFill>
-            <a:srgbClr val="C5A880"/>
+            <a:srgbClr val="D4AF37"/>
           </a:solidFill>
           <a:ln>
             <a:noFill/>
@@ -5801,7 +6226,7 @@
         <p:spPr>
           <a:xfrm>
             <a:off x="731520" y="109728"/>
-            <a:ext cx="10698480" cy="1005840"/>
+            <a:ext cx="10728655" cy="914400"/>
           </a:xfrm>
           <a:prstGeom prst="rect">
             <a:avLst/>
@@ -5820,17 +6245,17 @@
               </a:spcAft>
               <a:defRPr sz="1100" b="1">
                 <a:solidFill>
-                  <a:srgbClr val="C5A880"/>
-                </a:solidFill>
-              </a:defRPr>
-            </a:pPr>
-            <a:r>
-              <a:t>SLAID 11  |  MODUL 2: KESELAMATAN AKAUN</a:t>
-            </a:r>
-          </a:p>
-          <a:p>
-            <a:pPr>
-              <a:defRPr sz="2100" b="1">
+                  <a:srgbClr val="D4AF37"/>
+                </a:solidFill>
+              </a:defRPr>
+            </a:pPr>
+            <a:r>
+              <a:t>SLAID 11 / 16  •  MODUL 2: KESELAMATAN AKAUN</a:t>
+            </a:r>
+          </a:p>
+          <a:p>
+            <a:pPr>
+              <a:defRPr sz="2200" b="1">
                 <a:solidFill>
                   <a:srgbClr val="FFFFFF"/>
                 </a:solidFill>
@@ -5849,7 +6274,7 @@
               </a:defRPr>
             </a:pPr>
             <a:r>
-              <a:t>Rahsia Kata Laluan Kebal: Password vs Passphrase</a:t>
+              <a:t>Berapa lama masa yang diperlukan oleh komputer penggodam untuk memecah masuk?</a:t>
             </a:r>
           </a:p>
         </p:txBody>
@@ -5862,18 +6287,18 @@
         </p:nvSpPr>
         <p:spPr>
           <a:xfrm>
-            <a:off x="731520" y="1463040"/>
-            <a:ext cx="5212080" cy="4663440"/>
+            <a:off x="822960" y="1463040"/>
+            <a:ext cx="5120640" cy="3840480"/>
           </a:xfrm>
           <a:prstGeom prst="roundRect">
             <a:avLst/>
           </a:prstGeom>
           <a:solidFill>
-            <a:srgbClr val="1B263B"/>
+            <a:srgbClr val="131E36"/>
           </a:solidFill>
-          <a:ln w="19050">
+          <a:ln w="31750">
             <a:solidFill>
-              <a:srgbClr val="7A1C30"/>
+              <a:srgbClr val="EF4444"/>
             </a:solidFill>
           </a:ln>
         </p:spPr>
@@ -5892,81 +6317,93 @@
           </a:fontRef>
         </p:style>
         <p:txBody>
-          <a:bodyPr rtlCol="0" anchor="ctr" wrap="square" lIns="320040" rIns="320040" tIns="274320"/>
+          <a:bodyPr rtlCol="0" anchor="ctr" wrap="square" lIns="320040" tIns="228600"/>
           <a:lstStyle/>
           <a:p>
             <a:pPr algn="ctr">
-              <a:spcAft>
-                <a:spcPts val="1200"/>
-              </a:spcAft>
-              <a:defRPr sz="1500" b="1">
-                <a:solidFill>
-                  <a:srgbClr val="C5A880"/>
-                </a:solidFill>
-              </a:defRPr>
-            </a:pPr>
-            <a:r>
-              <a:t>POIN &amp; KONSEP UTAMA</a:t>
-            </a:r>
-          </a:p>
-          <a:p>
-            <a:pPr>
               <a:spcAft>
                 <a:spcPts val="800"/>
               </a:spcAft>
-              <a:defRPr sz="1300">
+              <a:defRPr sz="1500" b="1">
+                <a:solidFill>
+                  <a:srgbClr val="EF4444"/>
+                </a:solidFill>
+              </a:defRPr>
+            </a:pPr>
+            <a:r>
+              <a:t>❌ KATA LALUAN LEMAH (MUDAH HACK)</a:t>
+            </a:r>
+          </a:p>
+          <a:p>
+            <a:pPr>
+              <a:spcAft>
+                <a:spcPts val="600"/>
+              </a:spcAft>
+              <a:defRPr sz="1200">
                 <a:solidFill>
                   <a:srgbClr val="F1F5F9"/>
                 </a:solidFill>
               </a:defRPr>
             </a:pPr>
             <a:r>
-              <a:t>• Kata Laluan Lemah: 'kucing123', 'asdaf2026', '12345678', tarikh lahir.</a:t>
+              <a:t>• '12345678' ➔ Hack dalam 0.0001 Saat!</a:t>
             </a:r>
           </a:p>
           <a:p>
             <a:pPr>
               <a:spcAft>
-                <a:spcPts val="800"/>
+                <a:spcPts val="600"/>
               </a:spcAft>
-              <a:defRPr sz="1300">
+              <a:defRPr sz="1200">
                 <a:solidFill>
                   <a:srgbClr val="F1F5F9"/>
                 </a:solidFill>
               </a:defRPr>
             </a:pPr>
             <a:r>
-              <a:t>• Penggodam boleh memecahkan kata laluan lemah dalam masa kurang 3 saat!</a:t>
+              <a:t>• 'asdaf2026' ➔ Hack dalam 0.02 Saat!</a:t>
             </a:r>
           </a:p>
           <a:p>
             <a:pPr>
               <a:spcAft>
-                <a:spcPts val="800"/>
+                <a:spcPts val="600"/>
               </a:spcAft>
-              <a:defRPr sz="1300">
+              <a:defRPr sz="1200">
                 <a:solidFill>
                   <a:srgbClr val="F1F5F9"/>
                 </a:solidFill>
               </a:defRPr>
             </a:pPr>
             <a:r>
-              <a:t>• Konsep Passphrase: Gabungkan 3-4 perkataan rawak menjadi satu frasa.</a:t>
+              <a:t>• 'kucingcomel' ➔ Hack dalam 2 Saat!</a:t>
             </a:r>
           </a:p>
           <a:p>
             <a:pPr>
               <a:spcAft>
-                <a:spcPts val="800"/>
+                <a:spcPts val="600"/>
               </a:spcAft>
-              <a:defRPr sz="1300">
+              <a:defRPr sz="1200">
                 <a:solidFill>
                   <a:srgbClr val="F1F5F9"/>
                 </a:solidFill>
               </a:defRPr>
             </a:pPr>
             <a:r>
-              <a:t>• Contoh: 'HarimauLompatPagar99!' — Ambil masa 10,000 tahun untuk dipecah!</a:t>
+              <a:t>• 'Tarikh Lahir' ➔ Hack dalam Kurang 1 Saat!</a:t>
+            </a:r>
+          </a:p>
+          <a:p>
+            <a:pPr>
+              <a:defRPr sz="1100" i="1">
+                <a:solidFill>
+                  <a:srgbClr val="94A3B8"/>
+                </a:solidFill>
+              </a:defRPr>
+            </a:pPr>
+            <a:r>
+              <a:t>Penggodam guna 'Dictionary Attack' yang menguji jutaan perkataan lazim dalam sekelip mata!</a:t>
             </a:r>
           </a:p>
         </p:txBody>
@@ -5980,17 +6417,17 @@
         <p:spPr>
           <a:xfrm>
             <a:off x="6217920" y="1463040"/>
-            <a:ext cx="5212080" cy="4663440"/>
+            <a:ext cx="5120640" cy="3840480"/>
           </a:xfrm>
           <a:prstGeom prst="roundRect">
             <a:avLst/>
           </a:prstGeom>
           <a:solidFill>
-            <a:srgbClr val="C5A880"/>
+            <a:srgbClr val="131E36"/>
           </a:solidFill>
-          <a:ln w="19050">
+          <a:ln w="31750">
             <a:solidFill>
-              <a:srgbClr val="C5A880"/>
+              <a:srgbClr val="10B981"/>
             </a:solidFill>
           </a:ln>
         </p:spPr>
@@ -6009,95 +6446,162 @@
           </a:fontRef>
         </p:style>
         <p:txBody>
-          <a:bodyPr rtlCol="0" anchor="ctr" wrap="square" lIns="320040" rIns="320040" tIns="274320"/>
+          <a:bodyPr rtlCol="0" anchor="ctr" wrap="square" lIns="320040" tIns="228600"/>
           <a:lstStyle/>
           <a:p>
             <a:pPr algn="ctr">
-              <a:spcAft>
-                <a:spcPts val="1200"/>
-              </a:spcAft>
-              <a:defRPr sz="1500" b="1">
-                <a:solidFill>
-                  <a:srgbClr val="DFBA8E"/>
-                </a:solidFill>
-              </a:defRPr>
-            </a:pPr>
-            <a:r>
-              <a:t>4 PANTANG LARANG KATA LALUAN</a:t>
-            </a:r>
-          </a:p>
-          <a:p>
-            <a:pPr>
               <a:spcAft>
                 <a:spcPts val="800"/>
               </a:spcAft>
-              <a:defRPr sz="1250">
+              <a:defRPr sz="1500" b="1">
+                <a:solidFill>
+                  <a:srgbClr val="10B981"/>
+                </a:solidFill>
+              </a:defRPr>
+            </a:pPr>
+            <a:r>
+              <a:t>✔ TEKNIK PASSPHRASE KEBAL</a:t>
+            </a:r>
+          </a:p>
+          <a:p>
+            <a:pPr>
+              <a:spcAft>
+                <a:spcPts val="600"/>
+              </a:spcAft>
+              <a:defRPr sz="1200" b="1">
+                <a:solidFill>
+                  <a:srgbClr val="EBCD78"/>
+                </a:solidFill>
+              </a:defRPr>
+            </a:pPr>
+            <a:r>
+              <a:t>• 'KopiPanasTumpah99!' ➔ Perlu 10,000 TAHUN!</a:t>
+            </a:r>
+          </a:p>
+          <a:p>
+            <a:pPr>
+              <a:spcAft>
+                <a:spcPts val="600"/>
+              </a:spcAft>
+              <a:defRPr sz="1200" b="1">
+                <a:solidFill>
+                  <a:srgbClr val="EBCD78"/>
+                </a:solidFill>
+              </a:defRPr>
+            </a:pPr>
+            <a:r>
+              <a:t>• 'HarimauLompatPagar!' ➔ Perlu 400 JUTA TAHUN!</a:t>
+            </a:r>
+          </a:p>
+          <a:p>
+            <a:pPr>
+              <a:spcAft>
+                <a:spcPts val="400"/>
+              </a:spcAft>
+              <a:defRPr sz="1150">
                 <a:solidFill>
                   <a:srgbClr val="F1F5F9"/>
                 </a:solidFill>
               </a:defRPr>
             </a:pPr>
             <a:r>
-              <a:t>✔ 1. Jangan guna kata laluan yang sama untuk semua akaun.</a:t>
+              <a:t>1. Gabung 3–4 perkataan rawak menjadi satu ayat rahsia.</a:t>
             </a:r>
           </a:p>
           <a:p>
             <a:pPr>
               <a:spcAft>
-                <a:spcPts val="800"/>
+                <a:spcPts val="400"/>
               </a:spcAft>
-              <a:defRPr sz="1250">
+              <a:defRPr sz="1150">
                 <a:solidFill>
                   <a:srgbClr val="F1F5F9"/>
                 </a:solidFill>
               </a:defRPr>
             </a:pPr>
             <a:r>
-              <a:t>✔ 2. Jangan simpan kata laluan di dalam kertas terbuka atau chat WhatsApp.</a:t>
+              <a:t>2. Selitkan nombor dan simbol unik (!, @, #).</a:t>
             </a:r>
           </a:p>
           <a:p>
             <a:pPr>
               <a:spcAft>
-                <a:spcPts val="800"/>
+                <a:spcPts val="400"/>
               </a:spcAft>
-              <a:defRPr sz="1250">
+              <a:defRPr sz="1150">
                 <a:solidFill>
                   <a:srgbClr val="F1F5F9"/>
                 </a:solidFill>
               </a:defRPr>
             </a:pPr>
             <a:r>
-              <a:t>✔ 3. Aktifkan Pengesahan 2-Faktor (2FA) di Instagram, TikTok, dan Google.</a:t>
-            </a:r>
-          </a:p>
-          <a:p>
-            <a:pPr>
-              <a:spcAft>
-                <a:spcPts val="800"/>
-              </a:spcAft>
-              <a:defRPr sz="1250">
-                <a:solidFill>
-                  <a:srgbClr val="F1F5F9"/>
-                </a:solidFill>
-              </a:defRPr>
-            </a:pPr>
-            <a:r>
-              <a:t>✔ 4. Log keluar (Log Out) akaun jika menggunakan komputer sekolah/makmal.</a:t>
-            </a:r>
-          </a:p>
-        </p:txBody>
-      </p:sp>
-      <p:sp>
-        <p:nvSpPr>
-          <p:cNvPr id="9" name="TextBox 8"/>
+              <a:t>3. Aktifkan 2FA (Pengesahan 2-Faktor) di akaun media sosial.</a:t>
+            </a:r>
+          </a:p>
+        </p:txBody>
+      </p:sp>
+      <p:sp>
+        <p:nvSpPr>
+          <p:cNvPr id="9" name="Rounded Rectangle 8"/>
+          <p:cNvSpPr/>
+          <p:nvPr/>
+        </p:nvSpPr>
+        <p:spPr>
+          <a:xfrm>
+            <a:off x="822960" y="5486400"/>
+            <a:ext cx="10515600" cy="640080"/>
+          </a:xfrm>
+          <a:prstGeom prst="roundRect">
+            <a:avLst/>
+          </a:prstGeom>
+          <a:solidFill>
+            <a:srgbClr val="8A1C34"/>
+          </a:solidFill>
+          <a:ln>
+            <a:noFill/>
+          </a:ln>
+        </p:spPr>
+        <p:style>
+          <a:lnRef idx="1">
+            <a:schemeClr val="accent1"/>
+          </a:lnRef>
+          <a:fillRef idx="3">
+            <a:schemeClr val="accent1"/>
+          </a:fillRef>
+          <a:effectRef idx="2">
+            <a:schemeClr val="accent1"/>
+          </a:effectRef>
+          <a:fontRef idx="minor">
+            <a:schemeClr val="lt1"/>
+          </a:fontRef>
+        </p:style>
+        <p:txBody>
+          <a:bodyPr rtlCol="0" anchor="ctr" wrap="square"/>
+          <a:lstStyle/>
+          <a:p>
+            <a:pPr algn="ctr">
+              <a:defRPr sz="1200" b="1">
+                <a:solidFill>
+                  <a:srgbClr val="FFFFFF"/>
+                </a:solidFill>
+              </a:defRPr>
+            </a:pPr>
+            <a:r>
+              <a:t>🔐 PETUA: Buat ayat pelik yang senang anda ingat tapi mustahil diteka oleh orang lain!</a:t>
+            </a:r>
+          </a:p>
+        </p:txBody>
+      </p:sp>
+      <p:sp>
+        <p:nvSpPr>
+          <p:cNvPr id="10" name="TextBox 9"/>
           <p:cNvSpPr txBox="1"/>
           <p:nvPr/>
         </p:nvSpPr>
         <p:spPr>
           <a:xfrm>
-            <a:off x="731520" y="6263640"/>
-            <a:ext cx="10698480" cy="411480"/>
+            <a:off x="731520" y="6309360"/>
+            <a:ext cx="10728655" cy="365760"/>
           </a:xfrm>
           <a:prstGeom prst="rect">
             <a:avLst/>
@@ -6118,7 +6622,7 @@
               </a:defRPr>
             </a:pPr>
             <a:r>
-              <a:t>NextGen Celik Digital 2026  •  UTM KL x ASDAF PERKIM  •  Sabtu, 12 September 2026                                                                    Slaid 11 / 16</a:t>
+              <a:t>Bengkel Santai NextGen Celik Digital 2026  |  UTM KL × ASDAF PERKIM                                             Slaid 11 / 16</a:t>
             </a:r>
           </a:p>
         </p:txBody>
@@ -6156,7 +6660,7 @@
             <a:avLst/>
           </a:prstGeom>
           <a:solidFill>
-            <a:srgbClr val="0F172A"/>
+            <a:srgbClr val="0A0F1D"/>
           </a:solidFill>
           <a:ln>
             <a:noFill/>
@@ -6193,13 +6697,13 @@
         <p:spPr>
           <a:xfrm>
             <a:off x="0" y="0"/>
-            <a:ext cx="12191695" cy="1188720"/>
+            <a:ext cx="12191695" cy="1097280"/>
           </a:xfrm>
           <a:prstGeom prst="rect">
             <a:avLst/>
           </a:prstGeom>
           <a:solidFill>
-            <a:srgbClr val="132238"/>
+            <a:srgbClr val="131E36"/>
           </a:solidFill>
           <a:ln>
             <a:noFill/>
@@ -6242,7 +6746,7 @@
             <a:avLst/>
           </a:prstGeom>
           <a:solidFill>
-            <a:srgbClr val="7A1C30"/>
+            <a:srgbClr val="8A1C34"/>
           </a:solidFill>
           <a:ln>
             <a:noFill/>
@@ -6278,14 +6782,14 @@
         </p:nvSpPr>
         <p:spPr>
           <a:xfrm>
-            <a:off x="0" y="1188720"/>
-            <a:ext cx="12191695" cy="45720"/>
+            <a:off x="0" y="1097280"/>
+            <a:ext cx="12191695" cy="36576"/>
           </a:xfrm>
           <a:prstGeom prst="rect">
             <a:avLst/>
           </a:prstGeom>
           <a:solidFill>
-            <a:srgbClr val="C5A880"/>
+            <a:srgbClr val="D4AF37"/>
           </a:solidFill>
           <a:ln>
             <a:noFill/>
@@ -6322,7 +6826,7 @@
         <p:spPr>
           <a:xfrm>
             <a:off x="731520" y="109728"/>
-            <a:ext cx="10698480" cy="1005840"/>
+            <a:ext cx="10728655" cy="914400"/>
           </a:xfrm>
           <a:prstGeom prst="rect">
             <a:avLst/>
@@ -6341,24 +6845,24 @@
               </a:spcAft>
               <a:defRPr sz="1100" b="1">
                 <a:solidFill>
-                  <a:srgbClr val="C5A880"/>
-                </a:solidFill>
-              </a:defRPr>
-            </a:pPr>
-            <a:r>
-              <a:t>SLAID 12  |  MODUL 2: ETIKA &amp; REPUTASI DIGITAL</a:t>
-            </a:r>
-          </a:p>
-          <a:p>
-            <a:pPr>
-              <a:defRPr sz="2100" b="1">
+                  <a:srgbClr val="D4AF37"/>
+                </a:solidFill>
+              </a:defRPr>
+            </a:pPr>
+            <a:r>
+              <a:t>SLAID 12 / 16  •  MODUL 2: ETIKA DIGITAL</a:t>
+            </a:r>
+          </a:p>
+          <a:p>
+            <a:pPr>
+              <a:defRPr sz="2200" b="1">
                 <a:solidFill>
                   <a:srgbClr val="FFFFFF"/>
                 </a:solidFill>
               </a:defRPr>
             </a:pPr>
             <a:r>
-              <a:t>Jejak Digital &amp; Maruah Diri: Internet Tidak Pernah Lupa</a:t>
+              <a:t>Jejak Digital: Internet Tidak Pernah Lupa!</a:t>
             </a:r>
           </a:p>
           <a:p>
@@ -6370,7 +6874,7 @@
               </a:defRPr>
             </a:pPr>
             <a:r>
-              <a:t>Jejak Digital (Digital Footprint): Internet Tidak Pernah Lupa!</a:t>
+              <a:t>Sebelum menekan butang 'POST' atau 'SEND' di media sosial, amalkan formula T-H-I-N-K</a:t>
             </a:r>
           </a:p>
         </p:txBody>
@@ -6383,18 +6887,18 @@
         </p:nvSpPr>
         <p:spPr>
           <a:xfrm>
-            <a:off x="731520" y="1463040"/>
-            <a:ext cx="5212080" cy="4663440"/>
+            <a:off x="822960" y="1463040"/>
+            <a:ext cx="1993392" cy="3840480"/>
           </a:xfrm>
           <a:prstGeom prst="roundRect">
             <a:avLst/>
           </a:prstGeom>
           <a:solidFill>
-            <a:srgbClr val="1B263B"/>
+            <a:srgbClr val="131E36"/>
           </a:solidFill>
-          <a:ln w="19050">
+          <a:ln w="25400">
             <a:solidFill>
-              <a:srgbClr val="7A1C30"/>
+              <a:srgbClr val="0EA5E9"/>
             </a:solidFill>
           </a:ln>
         </p:spPr>
@@ -6413,81 +6917,60 @@
           </a:fontRef>
         </p:style>
         <p:txBody>
-          <a:bodyPr rtlCol="0" anchor="ctr" wrap="square" lIns="320040" rIns="320040" tIns="274320"/>
+          <a:bodyPr rtlCol="0" anchor="ctr" wrap="square" lIns="164592" tIns="182880"/>
           <a:lstStyle/>
           <a:p>
             <a:pPr algn="ctr">
-              <a:spcAft>
-                <a:spcPts val="1200"/>
-              </a:spcAft>
-              <a:defRPr sz="1500" b="1">
-                <a:solidFill>
-                  <a:srgbClr val="C5A880"/>
-                </a:solidFill>
-              </a:defRPr>
-            </a:pPr>
-            <a:r>
-              <a:t>POIN &amp; KONSEP UTAMA</a:t>
-            </a:r>
-          </a:p>
-          <a:p>
-            <a:pPr>
+              <a:defRPr sz="3600" b="1">
+                <a:solidFill>
+                  <a:srgbClr val="0EA5E9"/>
+                </a:solidFill>
+              </a:defRPr>
+            </a:pPr>
+            <a:r>
+              <a:t>T</a:t>
+            </a:r>
+          </a:p>
+          <a:p>
+            <a:pPr algn="ctr">
               <a:spcAft>
                 <a:spcPts val="800"/>
               </a:spcAft>
-              <a:defRPr sz="1300">
+              <a:defRPr sz="1300" b="1">
+                <a:solidFill>
+                  <a:srgbClr val="FFFFFF"/>
+                </a:solidFill>
+              </a:defRPr>
+            </a:pPr>
+            <a:r>
+              <a:t>TRUE</a:t>
+            </a:r>
+          </a:p>
+          <a:p>
+            <a:pPr>
+              <a:spcAft>
+                <a:spcPts val="600"/>
+              </a:spcAft>
+              <a:defRPr sz="1050" b="1">
+                <a:solidFill>
+                  <a:srgbClr val="0EA5E9"/>
+                </a:solidFill>
+              </a:defRPr>
+            </a:pPr>
+            <a:r>
+              <a:t>Adakah ini benar?</a:t>
+            </a:r>
+          </a:p>
+          <a:p>
+            <a:pPr>
+              <a:defRPr sz="1000">
                 <a:solidFill>
                   <a:srgbClr val="F1F5F9"/>
                 </a:solidFill>
               </a:defRPr>
             </a:pPr>
             <a:r>
-              <a:t>• Setiap gambar, komen, carian, dan muat naik meninggalkan jejak kekal.</a:t>
-            </a:r>
-          </a:p>
-          <a:p>
-            <a:pPr>
-              <a:spcAft>
-                <a:spcPts val="800"/>
-              </a:spcAft>
-              <a:defRPr sz="1300">
-                <a:solidFill>
-                  <a:srgbClr val="F1F5F9"/>
-                </a:solidFill>
-              </a:defRPr>
-            </a:pPr>
-            <a:r>
-              <a:t>• Walaupun dipadam (delete), orang lain mungkin sudah mengambil screenshot.</a:t>
-            </a:r>
-          </a:p>
-          <a:p>
-            <a:pPr>
-              <a:spcAft>
-                <a:spcPts val="800"/>
-              </a:spcAft>
-              <a:defRPr sz="1300">
-                <a:solidFill>
-                  <a:srgbClr val="F1F5F9"/>
-                </a:solidFill>
-              </a:defRPr>
-            </a:pPr>
-            <a:r>
-              <a:t>• Jejak digital membentuk reputasi anda di mata masyarakat dan majikan.</a:t>
-            </a:r>
-          </a:p>
-          <a:p>
-            <a:pPr>
-              <a:spcAft>
-                <a:spcPts val="800"/>
-              </a:spcAft>
-              <a:defRPr sz="1300">
-                <a:solidFill>
-                  <a:srgbClr val="F1F5F9"/>
-                </a:solidFill>
-              </a:defRPr>
-            </a:pPr>
-            <a:r>
-              <a:t>• Komen toksik &amp; buli siber boleh memusnahkan masa depan orang lain dan diri sendiri.</a:t>
+              <a:t>Jangan sebar berita palsu atau khabar angin yang belum disahkan.</a:t>
             </a:r>
           </a:p>
         </p:txBody>
@@ -6500,18 +6983,18 @@
         </p:nvSpPr>
         <p:spPr>
           <a:xfrm>
-            <a:off x="6217920" y="1463040"/>
-            <a:ext cx="5212080" cy="4663440"/>
+            <a:off x="2953512" y="1463040"/>
+            <a:ext cx="1993392" cy="3840480"/>
           </a:xfrm>
           <a:prstGeom prst="roundRect">
             <a:avLst/>
           </a:prstGeom>
           <a:solidFill>
-            <a:srgbClr val="C5A880"/>
+            <a:srgbClr val="131E36"/>
           </a:solidFill>
-          <a:ln w="19050">
+          <a:ln w="25400">
             <a:solidFill>
-              <a:srgbClr val="C5A880"/>
+              <a:srgbClr val="10B981"/>
             </a:solidFill>
           </a:ln>
         </p:spPr>
@@ -6530,110 +7013,414 @@
           </a:fontRef>
         </p:style>
         <p:txBody>
-          <a:bodyPr rtlCol="0" anchor="ctr" wrap="square" lIns="320040" rIns="320040" tIns="274320"/>
+          <a:bodyPr rtlCol="0" anchor="ctr" wrap="square" lIns="164592" tIns="182880"/>
           <a:lstStyle/>
           <a:p>
             <a:pPr algn="ctr">
-              <a:spcAft>
-                <a:spcPts val="1200"/>
-              </a:spcAft>
-              <a:defRPr sz="1500" b="1">
-                <a:solidFill>
-                  <a:srgbClr val="DFBA8E"/>
-                </a:solidFill>
-              </a:defRPr>
-            </a:pPr>
-            <a:r>
-              <a:t>PRINSIP EMAS SEBELUM MENEKAN 'POST' (T-H-I-N-K)</a:t>
-            </a:r>
-          </a:p>
-          <a:p>
-            <a:pPr>
+              <a:defRPr sz="3600" b="1">
+                <a:solidFill>
+                  <a:srgbClr val="10B981"/>
+                </a:solidFill>
+              </a:defRPr>
+            </a:pPr>
+            <a:r>
+              <a:t>H</a:t>
+            </a:r>
+          </a:p>
+          <a:p>
+            <a:pPr algn="ctr">
               <a:spcAft>
                 <a:spcPts val="800"/>
               </a:spcAft>
-              <a:defRPr sz="1250">
+              <a:defRPr sz="1300" b="1">
+                <a:solidFill>
+                  <a:srgbClr val="FFFFFF"/>
+                </a:solidFill>
+              </a:defRPr>
+            </a:pPr>
+            <a:r>
+              <a:t>HELPFUL</a:t>
+            </a:r>
+          </a:p>
+          <a:p>
+            <a:pPr>
+              <a:spcAft>
+                <a:spcPts val="600"/>
+              </a:spcAft>
+              <a:defRPr sz="1050" b="1">
+                <a:solidFill>
+                  <a:srgbClr val="10B981"/>
+                </a:solidFill>
+              </a:defRPr>
+            </a:pPr>
+            <a:r>
+              <a:t>Adakah ia membantu?</a:t>
+            </a:r>
+          </a:p>
+          <a:p>
+            <a:pPr>
+              <a:defRPr sz="1000">
                 <a:solidFill>
                   <a:srgbClr val="F1F5F9"/>
                 </a:solidFill>
               </a:defRPr>
             </a:pPr>
             <a:r>
-              <a:t>✔ T - Benarkah maklumat ini? (True)</a:t>
-            </a:r>
-          </a:p>
-          <a:p>
-            <a:pPr>
+              <a:t>Adakah perkongsian ini memberi manfaat kepada orang yang membacanya?</a:t>
+            </a:r>
+          </a:p>
+        </p:txBody>
+      </p:sp>
+      <p:sp>
+        <p:nvSpPr>
+          <p:cNvPr id="9" name="Rounded Rectangle 8"/>
+          <p:cNvSpPr/>
+          <p:nvPr/>
+        </p:nvSpPr>
+        <p:spPr>
+          <a:xfrm>
+            <a:off x="5084064" y="1463040"/>
+            <a:ext cx="1993392" cy="3840480"/>
+          </a:xfrm>
+          <a:prstGeom prst="roundRect">
+            <a:avLst/>
+          </a:prstGeom>
+          <a:solidFill>
+            <a:srgbClr val="131E36"/>
+          </a:solidFill>
+          <a:ln w="25400">
+            <a:solidFill>
+              <a:srgbClr val="D4AF37"/>
+            </a:solidFill>
+          </a:ln>
+        </p:spPr>
+        <p:style>
+          <a:lnRef idx="1">
+            <a:schemeClr val="accent1"/>
+          </a:lnRef>
+          <a:fillRef idx="3">
+            <a:schemeClr val="accent1"/>
+          </a:fillRef>
+          <a:effectRef idx="2">
+            <a:schemeClr val="accent1"/>
+          </a:effectRef>
+          <a:fontRef idx="minor">
+            <a:schemeClr val="lt1"/>
+          </a:fontRef>
+        </p:style>
+        <p:txBody>
+          <a:bodyPr rtlCol="0" anchor="ctr" wrap="square" lIns="164592" tIns="182880"/>
+          <a:lstStyle/>
+          <a:p>
+            <a:pPr algn="ctr">
+              <a:defRPr sz="3600" b="1">
+                <a:solidFill>
+                  <a:srgbClr val="D4AF37"/>
+                </a:solidFill>
+              </a:defRPr>
+            </a:pPr>
+            <a:r>
+              <a:t>I</a:t>
+            </a:r>
+          </a:p>
+          <a:p>
+            <a:pPr algn="ctr">
               <a:spcAft>
                 <a:spcPts val="800"/>
               </a:spcAft>
-              <a:defRPr sz="1250">
+              <a:defRPr sz="1300" b="1">
+                <a:solidFill>
+                  <a:srgbClr val="FFFFFF"/>
+                </a:solidFill>
+              </a:defRPr>
+            </a:pPr>
+            <a:r>
+              <a:t>INSPIRING</a:t>
+            </a:r>
+          </a:p>
+          <a:p>
+            <a:pPr>
+              <a:spcAft>
+                <a:spcPts val="600"/>
+              </a:spcAft>
+              <a:defRPr sz="1050" b="1">
+                <a:solidFill>
+                  <a:srgbClr val="D4AF37"/>
+                </a:solidFill>
+              </a:defRPr>
+            </a:pPr>
+            <a:r>
+              <a:t>Adakah ia memberi inspirasi?</a:t>
+            </a:r>
+          </a:p>
+          <a:p>
+            <a:pPr>
+              <a:defRPr sz="1000">
                 <a:solidFill>
                   <a:srgbClr val="F1F5F9"/>
                 </a:solidFill>
               </a:defRPr>
             </a:pPr>
             <a:r>
-              <a:t>✔ H - Adakah ia membantu orang lain? (Helpful)</a:t>
-            </a:r>
-          </a:p>
-          <a:p>
-            <a:pPr>
+              <a:t>Gunakan media sosial untuk membakar semangat kejayaan, bukan merendahkan orang.</a:t>
+            </a:r>
+          </a:p>
+        </p:txBody>
+      </p:sp>
+      <p:sp>
+        <p:nvSpPr>
+          <p:cNvPr id="10" name="Rounded Rectangle 9"/>
+          <p:cNvSpPr/>
+          <p:nvPr/>
+        </p:nvSpPr>
+        <p:spPr>
+          <a:xfrm>
+            <a:off x="7214616" y="1463040"/>
+            <a:ext cx="1993392" cy="3840480"/>
+          </a:xfrm>
+          <a:prstGeom prst="roundRect">
+            <a:avLst/>
+          </a:prstGeom>
+          <a:solidFill>
+            <a:srgbClr val="131E36"/>
+          </a:solidFill>
+          <a:ln w="25400">
+            <a:solidFill>
+              <a:srgbClr val="F59E0B"/>
+            </a:solidFill>
+          </a:ln>
+        </p:spPr>
+        <p:style>
+          <a:lnRef idx="1">
+            <a:schemeClr val="accent1"/>
+          </a:lnRef>
+          <a:fillRef idx="3">
+            <a:schemeClr val="accent1"/>
+          </a:fillRef>
+          <a:effectRef idx="2">
+            <a:schemeClr val="accent1"/>
+          </a:effectRef>
+          <a:fontRef idx="minor">
+            <a:schemeClr val="lt1"/>
+          </a:fontRef>
+        </p:style>
+        <p:txBody>
+          <a:bodyPr rtlCol="0" anchor="ctr" wrap="square" lIns="164592" tIns="182880"/>
+          <a:lstStyle/>
+          <a:p>
+            <a:pPr algn="ctr">
+              <a:defRPr sz="3600" b="1">
+                <a:solidFill>
+                  <a:srgbClr val="F59E0B"/>
+                </a:solidFill>
+              </a:defRPr>
+            </a:pPr>
+            <a:r>
+              <a:t>N</a:t>
+            </a:r>
+          </a:p>
+          <a:p>
+            <a:pPr algn="ctr">
               <a:spcAft>
                 <a:spcPts val="800"/>
               </a:spcAft>
-              <a:defRPr sz="1250">
+              <a:defRPr sz="1300" b="1">
+                <a:solidFill>
+                  <a:srgbClr val="FFFFFF"/>
+                </a:solidFill>
+              </a:defRPr>
+            </a:pPr>
+            <a:r>
+              <a:t>NECESSARY</a:t>
+            </a:r>
+          </a:p>
+          <a:p>
+            <a:pPr>
+              <a:spcAft>
+                <a:spcPts val="600"/>
+              </a:spcAft>
+              <a:defRPr sz="1050" b="1">
+                <a:solidFill>
+                  <a:srgbClr val="F59E0B"/>
+                </a:solidFill>
+              </a:defRPr>
+            </a:pPr>
+            <a:r>
+              <a:t>Adakah ia benar-benar perlu?</a:t>
+            </a:r>
+          </a:p>
+          <a:p>
+            <a:pPr>
+              <a:defRPr sz="1000">
                 <a:solidFill>
                   <a:srgbClr val="F1F5F9"/>
                 </a:solidFill>
               </a:defRPr>
             </a:pPr>
             <a:r>
-              <a:t>✔ I - Adakah ia memberi inspirasi? (Inspiring)</a:t>
-            </a:r>
-          </a:p>
-          <a:p>
-            <a:pPr>
+              <a:t>Adakah aib atau masalah peribadi anda perlu diketahui oleh seluruh dunia?</a:t>
+            </a:r>
+          </a:p>
+        </p:txBody>
+      </p:sp>
+      <p:sp>
+        <p:nvSpPr>
+          <p:cNvPr id="11" name="Rounded Rectangle 10"/>
+          <p:cNvSpPr/>
+          <p:nvPr/>
+        </p:nvSpPr>
+        <p:spPr>
+          <a:xfrm>
+            <a:off x="9345168" y="1463040"/>
+            <a:ext cx="1993392" cy="3840480"/>
+          </a:xfrm>
+          <a:prstGeom prst="roundRect">
+            <a:avLst/>
+          </a:prstGeom>
+          <a:solidFill>
+            <a:srgbClr val="131E36"/>
+          </a:solidFill>
+          <a:ln w="25400">
+            <a:solidFill>
+              <a:srgbClr val="A855F7"/>
+            </a:solidFill>
+          </a:ln>
+        </p:spPr>
+        <p:style>
+          <a:lnRef idx="1">
+            <a:schemeClr val="accent1"/>
+          </a:lnRef>
+          <a:fillRef idx="3">
+            <a:schemeClr val="accent1"/>
+          </a:fillRef>
+          <a:effectRef idx="2">
+            <a:schemeClr val="accent1"/>
+          </a:effectRef>
+          <a:fontRef idx="minor">
+            <a:schemeClr val="lt1"/>
+          </a:fontRef>
+        </p:style>
+        <p:txBody>
+          <a:bodyPr rtlCol="0" anchor="ctr" wrap="square" lIns="164592" tIns="182880"/>
+          <a:lstStyle/>
+          <a:p>
+            <a:pPr algn="ctr">
+              <a:defRPr sz="3600" b="1">
+                <a:solidFill>
+                  <a:srgbClr val="A855F7"/>
+                </a:solidFill>
+              </a:defRPr>
+            </a:pPr>
+            <a:r>
+              <a:t>K</a:t>
+            </a:r>
+          </a:p>
+          <a:p>
+            <a:pPr algn="ctr">
               <a:spcAft>
                 <a:spcPts val="800"/>
               </a:spcAft>
-              <a:defRPr sz="1250">
+              <a:defRPr sz="1300" b="1">
+                <a:solidFill>
+                  <a:srgbClr val="FFFFFF"/>
+                </a:solidFill>
+              </a:defRPr>
+            </a:pPr>
+            <a:r>
+              <a:t>KIND</a:t>
+            </a:r>
+          </a:p>
+          <a:p>
+            <a:pPr>
+              <a:spcAft>
+                <a:spcPts val="600"/>
+              </a:spcAft>
+              <a:defRPr sz="1050" b="1">
+                <a:solidFill>
+                  <a:srgbClr val="A855F7"/>
+                </a:solidFill>
+              </a:defRPr>
+            </a:pPr>
+            <a:r>
+              <a:t>Adakah ayat ini berbudi bahasa?</a:t>
+            </a:r>
+          </a:p>
+          <a:p>
+            <a:pPr>
+              <a:defRPr sz="1000">
                 <a:solidFill>
                   <a:srgbClr val="F1F5F9"/>
                 </a:solidFill>
               </a:defRPr>
             </a:pPr>
             <a:r>
-              <a:t>✔ N - Adakah ia benar-benar perlu dikongsi? (Necessary)</a:t>
-            </a:r>
-          </a:p>
-          <a:p>
-            <a:pPr>
-              <a:spcAft>
-                <a:spcPts val="800"/>
-              </a:spcAft>
-              <a:defRPr sz="1250">
-                <a:solidFill>
-                  <a:srgbClr val="F1F5F9"/>
-                </a:solidFill>
-              </a:defRPr>
-            </a:pPr>
-            <a:r>
-              <a:t>✔ K - Adakah ayat ini baik dan berbudi bahasa? (Kind)</a:t>
-            </a:r>
-          </a:p>
-        </p:txBody>
-      </p:sp>
-      <p:sp>
-        <p:nvSpPr>
-          <p:cNvPr id="9" name="TextBox 8"/>
+              <a:t>Hapuskan buli siber. Perkataan yang baik adalah sedekah.</a:t>
+            </a:r>
+          </a:p>
+        </p:txBody>
+      </p:sp>
+      <p:sp>
+        <p:nvSpPr>
+          <p:cNvPr id="12" name="Rounded Rectangle 11"/>
+          <p:cNvSpPr/>
+          <p:nvPr/>
+        </p:nvSpPr>
+        <p:spPr>
+          <a:xfrm>
+            <a:off x="822960" y="5486400"/>
+            <a:ext cx="10515600" cy="640080"/>
+          </a:xfrm>
+          <a:prstGeom prst="roundRect">
+            <a:avLst/>
+          </a:prstGeom>
+          <a:solidFill>
+            <a:srgbClr val="8A1C34"/>
+          </a:solidFill>
+          <a:ln>
+            <a:noFill/>
+          </a:ln>
+        </p:spPr>
+        <p:style>
+          <a:lnRef idx="1">
+            <a:schemeClr val="accent1"/>
+          </a:lnRef>
+          <a:fillRef idx="3">
+            <a:schemeClr val="accent1"/>
+          </a:fillRef>
+          <a:effectRef idx="2">
+            <a:schemeClr val="accent1"/>
+          </a:effectRef>
+          <a:fontRef idx="minor">
+            <a:schemeClr val="lt1"/>
+          </a:fontRef>
+        </p:style>
+        <p:txBody>
+          <a:bodyPr rtlCol="0" anchor="ctr" wrap="square"/>
+          <a:lstStyle/>
+          <a:p>
+            <a:pPr algn="ctr">
+              <a:defRPr sz="1200" b="1">
+                <a:solidFill>
+                  <a:srgbClr val="FFFFFF"/>
+                </a:solidFill>
+              </a:defRPr>
+            </a:pPr>
+            <a:r>
+              <a:t>👣 PERINGATAN: Majikan &amp; penemuduga universiti akan cari nama korang di internet 5 tahun lagi!</a:t>
+            </a:r>
+          </a:p>
+        </p:txBody>
+      </p:sp>
+      <p:sp>
+        <p:nvSpPr>
+          <p:cNvPr id="13" name="TextBox 12"/>
           <p:cNvSpPr txBox="1"/>
           <p:nvPr/>
         </p:nvSpPr>
         <p:spPr>
           <a:xfrm>
-            <a:off x="731520" y="6263640"/>
-            <a:ext cx="10698480" cy="411480"/>
+            <a:off x="731520" y="6309360"/>
+            <a:ext cx="10728655" cy="365760"/>
           </a:xfrm>
           <a:prstGeom prst="rect">
             <a:avLst/>
@@ -6654,7 +7441,7 @@
               </a:defRPr>
             </a:pPr>
             <a:r>
-              <a:t>NextGen Celik Digital 2026  •  UTM KL x ASDAF PERKIM  •  Sabtu, 12 September 2026                                                                    Slaid 12 / 16</a:t>
+              <a:t>Bengkel Santai NextGen Celik Digital 2026  |  UTM KL × ASDAF PERKIM                                             Slaid 12 / 16</a:t>
             </a:r>
           </a:p>
         </p:txBody>
@@ -6692,7 +7479,7 @@
             <a:avLst/>
           </a:prstGeom>
           <a:solidFill>
-            <a:srgbClr val="0F172A"/>
+            <a:srgbClr val="0A0F1D"/>
           </a:solidFill>
           <a:ln>
             <a:noFill/>
@@ -6729,13 +7516,13 @@
         <p:spPr>
           <a:xfrm>
             <a:off x="0" y="0"/>
-            <a:ext cx="12191695" cy="1188720"/>
+            <a:ext cx="12191695" cy="1097280"/>
           </a:xfrm>
           <a:prstGeom prst="rect">
             <a:avLst/>
           </a:prstGeom>
           <a:solidFill>
-            <a:srgbClr val="132238"/>
+            <a:srgbClr val="131E36"/>
           </a:solidFill>
           <a:ln>
             <a:noFill/>
@@ -6778,7 +7565,7 @@
             <a:avLst/>
           </a:prstGeom>
           <a:solidFill>
-            <a:srgbClr val="7A1C30"/>
+            <a:srgbClr val="8A1C34"/>
           </a:solidFill>
           <a:ln>
             <a:noFill/>
@@ -6814,14 +7601,14 @@
         </p:nvSpPr>
         <p:spPr>
           <a:xfrm>
-            <a:off x="0" y="1188720"/>
-            <a:ext cx="12191695" cy="45720"/>
+            <a:off x="0" y="1097280"/>
+            <a:ext cx="12191695" cy="36576"/>
           </a:xfrm>
           <a:prstGeom prst="rect">
             <a:avLst/>
           </a:prstGeom>
           <a:solidFill>
-            <a:srgbClr val="C5A880"/>
+            <a:srgbClr val="D4AF37"/>
           </a:solidFill>
           <a:ln>
             <a:noFill/>
@@ -6858,7 +7645,7 @@
         <p:spPr>
           <a:xfrm>
             <a:off x="731520" y="109728"/>
-            <a:ext cx="10698480" cy="1005840"/>
+            <a:ext cx="10728655" cy="914400"/>
           </a:xfrm>
           <a:prstGeom prst="rect">
             <a:avLst/>
@@ -6877,24 +7664,24 @@
               </a:spcAft>
               <a:defRPr sz="1100" b="1">
                 <a:solidFill>
-                  <a:srgbClr val="C5A880"/>
-                </a:solidFill>
-              </a:defRPr>
-            </a:pPr>
-            <a:r>
-              <a:t>SLAID 13  |  MODUL 2: AMALI MEJA KLUSTER</a:t>
-            </a:r>
-          </a:p>
-          <a:p>
-            <a:pPr>
-              <a:defRPr sz="2100" b="1">
+                  <a:srgbClr val="D4AF37"/>
+                </a:solidFill>
+              </a:defRPr>
+            </a:pPr>
+            <a:r>
+              <a:t>SLAID 13 / 16  •  MODUL 2: LATIHAN KUMPULAN</a:t>
+            </a:r>
+          </a:p>
+          <a:p>
+            <a:pPr>
+              <a:defRPr sz="2200" b="1">
                 <a:solidFill>
                   <a:srgbClr val="FFFFFF"/>
                 </a:solidFill>
               </a:defRPr>
             </a:pPr>
             <a:r>
-              <a:t>Masa untuk Menjadi Pencipta: Bengkel Startup Sprint Kertas Mahjong</a:t>
+              <a:t>Masa Menjadi Pencipta: Bengkel Startup Sprint Kertas Mahjong</a:t>
             </a:r>
           </a:p>
           <a:p>
@@ -6906,7 +7693,7 @@
               </a:defRPr>
             </a:pPr>
             <a:r>
-              <a:t>Bengkel Startup Sprint: Menjadi Pencipta Inovasi Teknologi</a:t>
+              <a:t>7 Meja Kluster kini bertukar menjadi 7 Syarikat Pemula Teknologi Muda ASDAF!</a:t>
             </a:r>
           </a:p>
         </p:txBody>
@@ -6919,18 +7706,18 @@
         </p:nvSpPr>
         <p:spPr>
           <a:xfrm>
-            <a:off x="731520" y="1463040"/>
-            <a:ext cx="5212080" cy="4663440"/>
+            <a:off x="822960" y="1463040"/>
+            <a:ext cx="5120640" cy="3840480"/>
           </a:xfrm>
           <a:prstGeom prst="roundRect">
             <a:avLst/>
           </a:prstGeom>
           <a:solidFill>
-            <a:srgbClr val="1B263B"/>
+            <a:srgbClr val="131E36"/>
           </a:solidFill>
-          <a:ln w="19050">
+          <a:ln w="31750">
             <a:solidFill>
-              <a:srgbClr val="7A1C30"/>
+              <a:srgbClr val="D4AF37"/>
             </a:solidFill>
           </a:ln>
         </p:spPr>
@@ -6949,21 +7736,21 @@
           </a:fontRef>
         </p:style>
         <p:txBody>
-          <a:bodyPr rtlCol="0" anchor="ctr" wrap="square" lIns="320040" rIns="320040" tIns="274320"/>
+          <a:bodyPr rtlCol="0" anchor="ctr" wrap="square" lIns="320040" tIns="228600"/>
           <a:lstStyle/>
           <a:p>
             <a:pPr algn="ctr">
               <a:spcAft>
-                <a:spcPts val="1200"/>
+                <a:spcPts val="1000"/>
               </a:spcAft>
               <a:defRPr sz="1500" b="1">
                 <a:solidFill>
-                  <a:srgbClr val="C5A880"/>
-                </a:solidFill>
-              </a:defRPr>
-            </a:pPr>
-            <a:r>
-              <a:t>POIN &amp; KONSEP UTAMA</a:t>
+                  <a:srgbClr val="D4AF37"/>
+                </a:solidFill>
+              </a:defRPr>
+            </a:pPr>
+            <a:r>
+              <a:t>🎯 MISI SETIAP MEJA (SYARIKAT ANDA)</a:t>
             </a:r>
           </a:p>
           <a:p>
@@ -6971,14 +7758,14 @@
               <a:spcAft>
                 <a:spcPts val="800"/>
               </a:spcAft>
-              <a:defRPr sz="1300">
+              <a:defRPr sz="1200">
                 <a:solidFill>
                   <a:srgbClr val="F1F5F9"/>
                 </a:solidFill>
               </a:defRPr>
             </a:pPr>
             <a:r>
-              <a:t>• 7 Meja Kluster bertukar menjadi 7 'Syarikat Pemula Teknologi' (Startups)!</a:t>
+              <a:t>✔ Pilih 1 masalah sebenar di asrama ASDAF atau sekolah.</a:t>
             </a:r>
           </a:p>
           <a:p>
@@ -6986,14 +7773,14 @@
               <a:spcAft>
                 <a:spcPts val="800"/>
               </a:spcAft>
-              <a:defRPr sz="1300">
+              <a:defRPr sz="1200">
                 <a:solidFill>
                   <a:srgbClr val="F1F5F9"/>
                 </a:solidFill>
               </a:defRPr>
             </a:pPr>
             <a:r>
-              <a:t>• Bahan Disediakan: Kertas mahjong, marker pelbagai warna, sticky notes.</a:t>
+              <a:t>✔ Cipta 1 idea inovasi AI untuk selesaikan masalah tersebut.</a:t>
             </a:r>
           </a:p>
           <a:p>
@@ -7001,14 +7788,14 @@
               <a:spcAft>
                 <a:spcPts val="800"/>
               </a:spcAft>
-              <a:defRPr sz="1300">
+              <a:defRPr sz="1200">
                 <a:solidFill>
                   <a:srgbClr val="F1F5F9"/>
                 </a:solidFill>
               </a:defRPr>
             </a:pPr>
             <a:r>
-              <a:t>• Misi Meja: Cipta 1 idea penyelesaian berasaskan teknologi/AI untuk ASDAF.</a:t>
+              <a:t>✔ Lakar dan lukis poster di atas kertas mahjong bersama.</a:t>
             </a:r>
           </a:p>
           <a:p>
@@ -7016,14 +7803,14 @@
               <a:spcAft>
                 <a:spcPts val="800"/>
               </a:spcAft>
-              <a:defRPr sz="1300">
+              <a:defRPr sz="1200">
                 <a:solidFill>
                   <a:srgbClr val="F1F5F9"/>
                 </a:solidFill>
               </a:defRPr>
             </a:pPr>
             <a:r>
-              <a:t>• Kolaborasi: Pelajar T1–T5 dan rakan PPKI berganding bahu menghasilkan idea.</a:t>
+              <a:t>✔ Pilih 2 jurucakap meja untuk membentang di hadapan dewan!</a:t>
             </a:r>
           </a:p>
         </p:txBody>
@@ -7037,17 +7824,17 @@
         <p:spPr>
           <a:xfrm>
             <a:off x="6217920" y="1463040"/>
-            <a:ext cx="5212080" cy="4663440"/>
+            <a:ext cx="5120640" cy="3840480"/>
           </a:xfrm>
           <a:prstGeom prst="roundRect">
             <a:avLst/>
           </a:prstGeom>
           <a:solidFill>
-            <a:srgbClr val="C5A880"/>
+            <a:srgbClr val="131E36"/>
           </a:solidFill>
-          <a:ln w="19050">
+          <a:ln w="25400">
             <a:solidFill>
-              <a:srgbClr val="C5A880"/>
+              <a:srgbClr val="0EA5E9"/>
             </a:solidFill>
           </a:ln>
         </p:spPr>
@@ -7066,21 +7853,21 @@
           </a:fontRef>
         </p:style>
         <p:txBody>
-          <a:bodyPr rtlCol="0" anchor="ctr" wrap="square" lIns="320040" rIns="320040" tIns="274320"/>
+          <a:bodyPr rtlCol="0" anchor="ctr" wrap="square" lIns="320040" tIns="228600"/>
           <a:lstStyle/>
           <a:p>
             <a:pPr algn="ctr">
               <a:spcAft>
-                <a:spcPts val="1200"/>
+                <a:spcPts val="1000"/>
               </a:spcAft>
               <a:defRPr sz="1500" b="1">
                 <a:solidFill>
-                  <a:srgbClr val="DFBA8E"/>
-                </a:solidFill>
-              </a:defRPr>
-            </a:pPr>
-            <a:r>
-              <a:t>CONTOH TEMA IDEA INOVASI MEJA</a:t>
+                  <a:srgbClr val="0EA5E9"/>
+                </a:solidFill>
+              </a:defRPr>
+            </a:pPr>
+            <a:r>
+              <a:t>📦 PERALATAN &amp; MASA AKTIVITI</a:t>
             </a:r>
           </a:p>
           <a:p>
@@ -7088,14 +7875,14 @@
               <a:spcAft>
                 <a:spcPts val="800"/>
               </a:spcAft>
-              <a:defRPr sz="1250">
+              <a:defRPr sz="1200">
                 <a:solidFill>
                   <a:srgbClr val="F1F5F9"/>
                 </a:solidFill>
               </a:defRPr>
             </a:pPr>
             <a:r>
-              <a:t>✔ Meja 1 &amp; 2: 'Sistem Pengesan Makanan Membazir Pintar di Dewan Makan'.</a:t>
+              <a:t>• Bahan: Kertas mahjong, marker pelbagai warna, sticky notes.</a:t>
             </a:r>
           </a:p>
           <a:p>
@@ -7103,14 +7890,14 @@
               <a:spcAft>
                 <a:spcPts val="800"/>
               </a:spcAft>
-              <a:defRPr sz="1250">
+              <a:defRPr sz="1200">
                 <a:solidFill>
                   <a:srgbClr val="F1F5F9"/>
                 </a:solidFill>
               </a:defRPr>
             </a:pPr>
             <a:r>
-              <a:t>✔ Meja 3 &amp; 4: 'AI Jadual Ulang Kaji &amp; Peringatan Waktu Solat Asrama'.</a:t>
+              <a:t>• Masa Perbincangan Meja: 35 Minit padat.</a:t>
             </a:r>
           </a:p>
           <a:p>
@@ -7118,14 +7905,14 @@
               <a:spcAft>
                 <a:spcPts val="800"/>
               </a:spcAft>
-              <a:defRPr sz="1250">
+              <a:defRPr sz="1200">
                 <a:solidFill>
                   <a:srgbClr val="F1F5F9"/>
                 </a:solidFill>
               </a:defRPr>
             </a:pPr>
             <a:r>
-              <a:t>✔ Meja 5 &amp; 6: 'Aplikasi Pustakawan Digital Pintar ASDAF'.</a:t>
+              <a:t>• Masa Pitching Pentas: 2 Minit setiap meja!</a:t>
             </a:r>
           </a:p>
           <a:p>
@@ -7133,28 +7920,80 @@
               <a:spcAft>
                 <a:spcPts val="800"/>
               </a:spcAft>
-              <a:defRPr sz="1250">
+              <a:defRPr sz="1200">
                 <a:solidFill>
                   <a:srgbClr val="F1F5F9"/>
                 </a:solidFill>
               </a:defRPr>
             </a:pPr>
             <a:r>
-              <a:t>✔ Meja 7: 'Sistem Keselamatan Pagar Asrama Menggunakan Pengecaman AI'.</a:t>
-            </a:r>
-          </a:p>
-        </p:txBody>
-      </p:sp>
-      <p:sp>
-        <p:nvSpPr>
-          <p:cNvPr id="9" name="TextBox 8"/>
+              <a:t>• Bimbingan Penuh: Mentor meja sedia membantu lakaran dan idea.</a:t>
+            </a:r>
+          </a:p>
+        </p:txBody>
+      </p:sp>
+      <p:sp>
+        <p:nvSpPr>
+          <p:cNvPr id="9" name="Rounded Rectangle 8"/>
+          <p:cNvSpPr/>
+          <p:nvPr/>
+        </p:nvSpPr>
+        <p:spPr>
+          <a:xfrm>
+            <a:off x="822960" y="5486400"/>
+            <a:ext cx="10515600" cy="640080"/>
+          </a:xfrm>
+          <a:prstGeom prst="roundRect">
+            <a:avLst/>
+          </a:prstGeom>
+          <a:solidFill>
+            <a:srgbClr val="10B981"/>
+          </a:solidFill>
+          <a:ln>
+            <a:noFill/>
+          </a:ln>
+        </p:spPr>
+        <p:style>
+          <a:lnRef idx="1">
+            <a:schemeClr val="accent1"/>
+          </a:lnRef>
+          <a:fillRef idx="3">
+            <a:schemeClr val="accent1"/>
+          </a:fillRef>
+          <a:effectRef idx="2">
+            <a:schemeClr val="accent1"/>
+          </a:effectRef>
+          <a:fontRef idx="minor">
+            <a:schemeClr val="lt1"/>
+          </a:fontRef>
+        </p:style>
+        <p:txBody>
+          <a:bodyPr rtlCol="0" anchor="ctr" wrap="square"/>
+          <a:lstStyle/>
+          <a:p>
+            <a:pPr algn="ctr">
+              <a:defRPr sz="1200" b="1">
+                <a:solidFill>
+                  <a:srgbClr val="0A0F1D"/>
+                </a:solidFill>
+              </a:defRPr>
+            </a:pPr>
+            <a:r>
+              <a:t>🏆 HADIAH KUMPULAN: Meja dengan idea paling kreatif dan pembentangan paling bertenaga akan bawa pulang HAMPER JUARA!</a:t>
+            </a:r>
+          </a:p>
+        </p:txBody>
+      </p:sp>
+      <p:sp>
+        <p:nvSpPr>
+          <p:cNvPr id="10" name="TextBox 9"/>
           <p:cNvSpPr txBox="1"/>
           <p:nvPr/>
         </p:nvSpPr>
         <p:spPr>
           <a:xfrm>
-            <a:off x="731520" y="6263640"/>
-            <a:ext cx="10698480" cy="411480"/>
+            <a:off x="731520" y="6309360"/>
+            <a:ext cx="10728655" cy="365760"/>
           </a:xfrm>
           <a:prstGeom prst="rect">
             <a:avLst/>
@@ -7175,7 +8014,7 @@
               </a:defRPr>
             </a:pPr>
             <a:r>
-              <a:t>NextGen Celik Digital 2026  •  UTM KL x ASDAF PERKIM  •  Sabtu, 12 September 2026                                                                    Slaid 13 / 16</a:t>
+              <a:t>Bengkel Santai NextGen Celik Digital 2026  |  UTM KL × ASDAF PERKIM                                             Slaid 13 / 16</a:t>
             </a:r>
           </a:p>
         </p:txBody>
@@ -7213,7 +8052,7 @@
             <a:avLst/>
           </a:prstGeom>
           <a:solidFill>
-            <a:srgbClr val="0F172A"/>
+            <a:srgbClr val="0A0F1D"/>
           </a:solidFill>
           <a:ln>
             <a:noFill/>
@@ -7250,13 +8089,13 @@
         <p:spPr>
           <a:xfrm>
             <a:off x="0" y="0"/>
-            <a:ext cx="12191695" cy="1188720"/>
+            <a:ext cx="12191695" cy="1097280"/>
           </a:xfrm>
           <a:prstGeom prst="rect">
             <a:avLst/>
           </a:prstGeom>
           <a:solidFill>
-            <a:srgbClr val="132238"/>
+            <a:srgbClr val="131E36"/>
           </a:solidFill>
           <a:ln>
             <a:noFill/>
@@ -7299,7 +8138,7 @@
             <a:avLst/>
           </a:prstGeom>
           <a:solidFill>
-            <a:srgbClr val="7A1C30"/>
+            <a:srgbClr val="8A1C34"/>
           </a:solidFill>
           <a:ln>
             <a:noFill/>
@@ -7335,14 +8174,14 @@
         </p:nvSpPr>
         <p:spPr>
           <a:xfrm>
-            <a:off x="0" y="1188720"/>
-            <a:ext cx="12191695" cy="45720"/>
+            <a:off x="0" y="1097280"/>
+            <a:ext cx="12191695" cy="36576"/>
           </a:xfrm>
           <a:prstGeom prst="rect">
             <a:avLst/>
           </a:prstGeom>
           <a:solidFill>
-            <a:srgbClr val="C5A880"/>
+            <a:srgbClr val="D4AF37"/>
           </a:solidFill>
           <a:ln>
             <a:noFill/>
@@ -7379,7 +8218,7 @@
         <p:spPr>
           <a:xfrm>
             <a:off x="731520" y="109728"/>
-            <a:ext cx="10698480" cy="1005840"/>
+            <a:ext cx="10728655" cy="914400"/>
           </a:xfrm>
           <a:prstGeom prst="rect">
             <a:avLst/>
@@ -7398,24 +8237,24 @@
               </a:spcAft>
               <a:defRPr sz="1100" b="1">
                 <a:solidFill>
-                  <a:srgbClr val="C5A880"/>
-                </a:solidFill>
-              </a:defRPr>
-            </a:pPr>
-            <a:r>
-              <a:t>SLAID 14  |  MODUL 2: PANDUAN PEMBENTANGAN</a:t>
-            </a:r>
-          </a:p>
-          <a:p>
-            <a:pPr>
-              <a:defRPr sz="2100" b="1">
+                  <a:srgbClr val="D4AF37"/>
+                </a:solidFill>
+              </a:defRPr>
+            </a:pPr>
+            <a:r>
+              <a:t>SLAID 14 / 16  •  MODUL 2: PANDUAN AMALI</a:t>
+            </a:r>
+          </a:p>
+          <a:p>
+            <a:pPr>
+              <a:defRPr sz="2200" b="1">
                 <a:solidFill>
                   <a:srgbClr val="FFFFFF"/>
                 </a:solidFill>
               </a:defRPr>
             </a:pPr>
             <a:r>
-              <a:t>Format Pembentangan Poster: 4 Kotak Emas</a:t>
+              <a:t>Format Kertas Mahjong: 4 Kotak Emas Poster Inovasi</a:t>
             </a:r>
           </a:p>
           <a:p>
@@ -7427,7 +8266,7 @@
               </a:defRPr>
             </a:pPr>
             <a:r>
-              <a:t>Format Kertas Mahjong: 4 Kotak Emas Inovasi</a:t>
+              <a:t>Bahagikan kertas mahjong kepada 4 kuadran ringkas, jelas dan berwarna-warni</a:t>
             </a:r>
           </a:p>
         </p:txBody>
@@ -7440,18 +8279,18 @@
         </p:nvSpPr>
         <p:spPr>
           <a:xfrm>
-            <a:off x="731520" y="1463040"/>
-            <a:ext cx="5212080" cy="4663440"/>
+            <a:off x="822960" y="1463040"/>
+            <a:ext cx="5120640" cy="1828800"/>
           </a:xfrm>
           <a:prstGeom prst="roundRect">
             <a:avLst/>
           </a:prstGeom>
           <a:solidFill>
-            <a:srgbClr val="1B263B"/>
+            <a:srgbClr val="131E36"/>
           </a:solidFill>
-          <a:ln w="19050">
+          <a:ln w="31750">
             <a:solidFill>
-              <a:srgbClr val="7A1C30"/>
+              <a:srgbClr val="A855F7"/>
             </a:solidFill>
           </a:ln>
         </p:spPr>
@@ -7470,81 +8309,57 @@
           </a:fontRef>
         </p:style>
         <p:txBody>
-          <a:bodyPr rtlCol="0" anchor="ctr" wrap="square" lIns="320040" rIns="320040" tIns="274320"/>
+          <a:bodyPr rtlCol="0" anchor="ctr" wrap="square" lIns="274320" tIns="164592"/>
           <a:lstStyle/>
           <a:p>
             <a:pPr algn="ctr">
+              <a:defRPr sz="1300" b="1">
+                <a:solidFill>
+                  <a:srgbClr val="A855F7"/>
+                </a:solidFill>
+              </a:defRPr>
+            </a:pPr>
+            <a:r>
+              <a:t>KOTAK 1: IDENTITI &amp; LOGO</a:t>
+            </a:r>
+          </a:p>
+          <a:p>
+            <a:pPr>
               <a:spcAft>
-                <a:spcPts val="1200"/>
+                <a:spcPts val="300"/>
               </a:spcAft>
-              <a:defRPr sz="1500" b="1">
-                <a:solidFill>
-                  <a:srgbClr val="C5A880"/>
-                </a:solidFill>
-              </a:defRPr>
-            </a:pPr>
-            <a:r>
-              <a:t>POIN &amp; KONSEP UTAMA</a:t>
-            </a:r>
-          </a:p>
-          <a:p>
-            <a:pPr>
-              <a:spcAft>
-                <a:spcPts val="800"/>
-              </a:spcAft>
-              <a:defRPr sz="1300">
+              <a:defRPr sz="1100" b="1">
+                <a:solidFill>
+                  <a:srgbClr val="FFFFFF"/>
+                </a:solidFill>
+              </a:defRPr>
+            </a:pPr>
+            <a:r>
+              <a:t>Nama Syarikat &amp; Logo Inovasi</a:t>
+            </a:r>
+          </a:p>
+          <a:p>
+            <a:pPr>
+              <a:defRPr sz="1000">
                 <a:solidFill>
                   <a:srgbClr val="F1F5F9"/>
                 </a:solidFill>
               </a:defRPr>
             </a:pPr>
             <a:r>
-              <a:t>• Bahagikan kertas mahjong kepada 4 ruangan yang jelas dan berwarna-warni.</a:t>
-            </a:r>
-          </a:p>
-          <a:p>
-            <a:pPr>
-              <a:spcAft>
-                <a:spcPts val="800"/>
-              </a:spcAft>
-              <a:defRPr sz="1300">
+              <a:t>• Nama aplikasi / robot AI ciptaan meja anda.</a:t>
+            </a:r>
+          </a:p>
+          <a:p>
+            <a:pPr>
+              <a:defRPr sz="1000">
                 <a:solidFill>
                   <a:srgbClr val="F1F5F9"/>
                 </a:solidFill>
               </a:defRPr>
             </a:pPr>
             <a:r>
-              <a:t>• Lukis logo syarikat dan guna kata kunci ringkas (bullet points).</a:t>
-            </a:r>
-          </a:p>
-          <a:p>
-            <a:pPr>
-              <a:spcAft>
-                <a:spcPts val="800"/>
-              </a:spcAft>
-              <a:defRPr sz="1300">
-                <a:solidFill>
-                  <a:srgbClr val="F1F5F9"/>
-                </a:solidFill>
-              </a:defRPr>
-            </a:pPr>
-            <a:r>
-              <a:t>• Setiap meja memilih 2 orang jurucakap untuk membentang di hadapan dewan.</a:t>
-            </a:r>
-          </a:p>
-          <a:p>
-            <a:pPr>
-              <a:spcAft>
-                <a:spcPts val="800"/>
-              </a:spcAft>
-              <a:defRPr sz="1300">
-                <a:solidFill>
-                  <a:srgbClr val="F1F5F9"/>
-                </a:solidFill>
-              </a:defRPr>
-            </a:pPr>
-            <a:r>
-              <a:t>• Masa Pitching: 2 Minit setiap meja — padat, meyakinkan dan bertenaga!</a:t>
+              <a:t>• Lukis logo ringkas &amp; moto syarikat yang menarik.</a:t>
             </a:r>
           </a:p>
         </p:txBody>
@@ -7558,17 +8373,17 @@
         <p:spPr>
           <a:xfrm>
             <a:off x="6217920" y="1463040"/>
-            <a:ext cx="5212080" cy="4663440"/>
+            <a:ext cx="5120640" cy="1828800"/>
           </a:xfrm>
           <a:prstGeom prst="roundRect">
             <a:avLst/>
           </a:prstGeom>
           <a:solidFill>
-            <a:srgbClr val="C5A880"/>
+            <a:srgbClr val="131E36"/>
           </a:solidFill>
-          <a:ln w="19050">
+          <a:ln w="31750">
             <a:solidFill>
-              <a:srgbClr val="C5A880"/>
+              <a:srgbClr val="EF4444"/>
             </a:solidFill>
           </a:ln>
         </p:spPr>
@@ -7587,95 +8402,309 @@
           </a:fontRef>
         </p:style>
         <p:txBody>
-          <a:bodyPr rtlCol="0" anchor="ctr" wrap="square" lIns="320040" rIns="320040" tIns="274320"/>
+          <a:bodyPr rtlCol="0" anchor="ctr" wrap="square" lIns="274320" tIns="164592"/>
           <a:lstStyle/>
           <a:p>
             <a:pPr algn="ctr">
+              <a:defRPr sz="1300" b="1">
+                <a:solidFill>
+                  <a:srgbClr val="EF4444"/>
+                </a:solidFill>
+              </a:defRPr>
+            </a:pPr>
+            <a:r>
+              <a:t>KOTAK 2: MASALAH SEBENAR</a:t>
+            </a:r>
+          </a:p>
+          <a:p>
+            <a:pPr>
               <a:spcAft>
-                <a:spcPts val="1200"/>
+                <a:spcPts val="300"/>
               </a:spcAft>
-              <a:defRPr sz="1500" b="1">
-                <a:solidFill>
-                  <a:srgbClr val="DFBA8E"/>
-                </a:solidFill>
-              </a:defRPr>
-            </a:pPr>
-            <a:r>
-              <a:t>STRUKTUR 4 KOTAK EMAS PADA POSTER</a:t>
+              <a:defRPr sz="1100" b="1">
+                <a:solidFill>
+                  <a:srgbClr val="FFFFFF"/>
+                </a:solidFill>
+              </a:defRPr>
+            </a:pPr>
+            <a:r>
+              <a:t>Apa Isu Yang Hendak Diselesaikan?</a:t>
+            </a:r>
+          </a:p>
+          <a:p>
+            <a:pPr>
+              <a:defRPr sz="1000">
+                <a:solidFill>
+                  <a:srgbClr val="F1F5F9"/>
+                </a:solidFill>
+              </a:defRPr>
+            </a:pPr>
+            <a:r>
+              <a:t>• Contoh: Pembaziran makanan di dewan makan.</a:t>
+            </a:r>
+          </a:p>
+          <a:p>
+            <a:pPr>
+              <a:defRPr sz="1000">
+                <a:solidFill>
+                  <a:srgbClr val="F1F5F9"/>
+                </a:solidFill>
+              </a:defRPr>
+            </a:pPr>
+            <a:r>
+              <a:t>• Contoh: Terlupa waktu solat / susah bangun pagi.</a:t>
+            </a:r>
+          </a:p>
+        </p:txBody>
+      </p:sp>
+      <p:sp>
+        <p:nvSpPr>
+          <p:cNvPr id="9" name="Rounded Rectangle 8"/>
+          <p:cNvSpPr/>
+          <p:nvPr/>
+        </p:nvSpPr>
+        <p:spPr>
+          <a:xfrm>
+            <a:off x="822960" y="3474720"/>
+            <a:ext cx="5120640" cy="1828800"/>
+          </a:xfrm>
+          <a:prstGeom prst="roundRect">
+            <a:avLst/>
+          </a:prstGeom>
+          <a:solidFill>
+            <a:srgbClr val="131E36"/>
+          </a:solidFill>
+          <a:ln w="31750">
+            <a:solidFill>
+              <a:srgbClr val="0EA5E9"/>
+            </a:solidFill>
+          </a:ln>
+        </p:spPr>
+        <p:style>
+          <a:lnRef idx="1">
+            <a:schemeClr val="accent1"/>
+          </a:lnRef>
+          <a:fillRef idx="3">
+            <a:schemeClr val="accent1"/>
+          </a:fillRef>
+          <a:effectRef idx="2">
+            <a:schemeClr val="accent1"/>
+          </a:effectRef>
+          <a:fontRef idx="minor">
+            <a:schemeClr val="lt1"/>
+          </a:fontRef>
+        </p:style>
+        <p:txBody>
+          <a:bodyPr rtlCol="0" anchor="ctr" wrap="square" lIns="274320" tIns="164592"/>
+          <a:lstStyle/>
+          <a:p>
+            <a:pPr algn="ctr">
+              <a:defRPr sz="1300" b="1">
+                <a:solidFill>
+                  <a:srgbClr val="0EA5E9"/>
+                </a:solidFill>
+              </a:defRPr>
+            </a:pPr>
+            <a:r>
+              <a:t>KOTAK 3: CARA TEKNOLOGI BERFUNGSI</a:t>
             </a:r>
           </a:p>
           <a:p>
             <a:pPr>
               <a:spcAft>
-                <a:spcPts val="800"/>
+                <a:spcPts val="300"/>
               </a:spcAft>
-              <a:defRPr sz="1250">
+              <a:defRPr sz="1100" b="1">
+                <a:solidFill>
+                  <a:srgbClr val="FFFFFF"/>
+                </a:solidFill>
+              </a:defRPr>
+            </a:pPr>
+            <a:r>
+              <a:t>Bagaimana AI Membantu?</a:t>
+            </a:r>
+          </a:p>
+          <a:p>
+            <a:pPr>
+              <a:defRPr sz="1000">
                 <a:solidFill>
                   <a:srgbClr val="F1F5F9"/>
                 </a:solidFill>
               </a:defRPr>
             </a:pPr>
             <a:r>
-              <a:t>✔ Kotak 1: Nama Inovasi &amp; Ciptaan Logo Kumpulan.</a:t>
+              <a:t>• Lukis carta aliran atau rajah mudah alatan AI.</a:t>
+            </a:r>
+          </a:p>
+          <a:p>
+            <a:pPr>
+              <a:defRPr sz="1000">
+                <a:solidFill>
+                  <a:srgbClr val="F1F5F9"/>
+                </a:solidFill>
+              </a:defRPr>
+            </a:pPr>
+            <a:r>
+              <a:t>• Contoh: Kamera sensor AI kesan sisa makanan.</a:t>
+            </a:r>
+          </a:p>
+        </p:txBody>
+      </p:sp>
+      <p:sp>
+        <p:nvSpPr>
+          <p:cNvPr id="10" name="Rounded Rectangle 9"/>
+          <p:cNvSpPr/>
+          <p:nvPr/>
+        </p:nvSpPr>
+        <p:spPr>
+          <a:xfrm>
+            <a:off x="6217920" y="3474720"/>
+            <a:ext cx="5120640" cy="1828800"/>
+          </a:xfrm>
+          <a:prstGeom prst="roundRect">
+            <a:avLst/>
+          </a:prstGeom>
+          <a:solidFill>
+            <a:srgbClr val="131E36"/>
+          </a:solidFill>
+          <a:ln w="31750">
+            <a:solidFill>
+              <a:srgbClr val="10B981"/>
+            </a:solidFill>
+          </a:ln>
+        </p:spPr>
+        <p:style>
+          <a:lnRef idx="1">
+            <a:schemeClr val="accent1"/>
+          </a:lnRef>
+          <a:fillRef idx="3">
+            <a:schemeClr val="accent1"/>
+          </a:fillRef>
+          <a:effectRef idx="2">
+            <a:schemeClr val="accent1"/>
+          </a:effectRef>
+          <a:fontRef idx="minor">
+            <a:schemeClr val="lt1"/>
+          </a:fontRef>
+        </p:style>
+        <p:txBody>
+          <a:bodyPr rtlCol="0" anchor="ctr" wrap="square" lIns="274320" tIns="164592"/>
+          <a:lstStyle/>
+          <a:p>
+            <a:pPr algn="ctr">
+              <a:defRPr sz="1300" b="1">
+                <a:solidFill>
+                  <a:srgbClr val="10B981"/>
+                </a:solidFill>
+              </a:defRPr>
+            </a:pPr>
+            <a:r>
+              <a:t>KOTAK 4: KEBAIKAN &amp; IMPAK</a:t>
             </a:r>
           </a:p>
           <a:p>
             <a:pPr>
               <a:spcAft>
-                <a:spcPts val="800"/>
+                <a:spcPts val="300"/>
               </a:spcAft>
-              <a:defRPr sz="1250">
+              <a:defRPr sz="1100" b="1">
+                <a:solidFill>
+                  <a:srgbClr val="FFFFFF"/>
+                </a:solidFill>
+              </a:defRPr>
+            </a:pPr>
+            <a:r>
+              <a:t>Manfaat Kepada Warga ASDAF</a:t>
+            </a:r>
+          </a:p>
+          <a:p>
+            <a:pPr>
+              <a:defRPr sz="1000">
                 <a:solidFill>
                   <a:srgbClr val="F1F5F9"/>
                 </a:solidFill>
               </a:defRPr>
             </a:pPr>
             <a:r>
-              <a:t>✔ Kotak 2: Masalah Sebenar Yang Dihadapi di Asrama / Sekolah.</a:t>
-            </a:r>
-          </a:p>
-          <a:p>
-            <a:pPr>
-              <a:spcAft>
-                <a:spcPts val="800"/>
-              </a:spcAft>
-              <a:defRPr sz="1250">
+              <a:t>• Asrama jadi lebih bersih dan jimat kos.</a:t>
+            </a:r>
+          </a:p>
+          <a:p>
+            <a:pPr>
+              <a:defRPr sz="1000">
                 <a:solidFill>
                   <a:srgbClr val="F1F5F9"/>
                 </a:solidFill>
               </a:defRPr>
             </a:pPr>
             <a:r>
-              <a:t>✔ Kotak 3: Cara Inovasi AI Berfungsi (Rajah aliran ringkas).</a:t>
-            </a:r>
-          </a:p>
-          <a:p>
-            <a:pPr>
-              <a:spcAft>
-                <a:spcPts val="800"/>
-              </a:spcAft>
-              <a:defRPr sz="1250">
-                <a:solidFill>
-                  <a:srgbClr val="F1F5F9"/>
-                </a:solidFill>
-              </a:defRPr>
-            </a:pPr>
-            <a:r>
-              <a:t>✔ Kotak 4: Kebaikan &amp; Impak Positif Kepada Rakan-Rakan ASDAF.</a:t>
-            </a:r>
-          </a:p>
-        </p:txBody>
-      </p:sp>
-      <p:sp>
-        <p:nvSpPr>
-          <p:cNvPr id="9" name="TextBox 8"/>
+              <a:t>• Pelajar lebih berdisiplin dan gembira.</a:t>
+            </a:r>
+          </a:p>
+        </p:txBody>
+      </p:sp>
+      <p:sp>
+        <p:nvSpPr>
+          <p:cNvPr id="11" name="Rounded Rectangle 10"/>
+          <p:cNvSpPr/>
+          <p:nvPr/>
+        </p:nvSpPr>
+        <p:spPr>
+          <a:xfrm>
+            <a:off x="822960" y="5486400"/>
+            <a:ext cx="10515600" cy="640080"/>
+          </a:xfrm>
+          <a:prstGeom prst="roundRect">
+            <a:avLst/>
+          </a:prstGeom>
+          <a:solidFill>
+            <a:srgbClr val="D4AF37"/>
+          </a:solidFill>
+          <a:ln>
+            <a:noFill/>
+          </a:ln>
+        </p:spPr>
+        <p:style>
+          <a:lnRef idx="1">
+            <a:schemeClr val="accent1"/>
+          </a:lnRef>
+          <a:fillRef idx="3">
+            <a:schemeClr val="accent1"/>
+          </a:fillRef>
+          <a:effectRef idx="2">
+            <a:schemeClr val="accent1"/>
+          </a:effectRef>
+          <a:fontRef idx="minor">
+            <a:schemeClr val="lt1"/>
+          </a:fontRef>
+        </p:style>
+        <p:txBody>
+          <a:bodyPr rtlCol="0" anchor="ctr" wrap="square"/>
+          <a:lstStyle/>
+          <a:p>
+            <a:pPr algn="ctr">
+              <a:defRPr sz="1200" b="1">
+                <a:solidFill>
+                  <a:srgbClr val="0A0F1D"/>
+                </a:solidFill>
+              </a:defRPr>
+            </a:pPr>
+            <a:r>
+              <a:t>⏱️ SYARAT PITCHING: 2 Minit Pembentangan Pentas • Semua ahli kumpulan naik sokong 2 orang pembentang utama!</a:t>
+            </a:r>
+          </a:p>
+        </p:txBody>
+      </p:sp>
+      <p:sp>
+        <p:nvSpPr>
+          <p:cNvPr id="12" name="TextBox 11"/>
           <p:cNvSpPr txBox="1"/>
           <p:nvPr/>
         </p:nvSpPr>
         <p:spPr>
           <a:xfrm>
-            <a:off x="731520" y="6263640"/>
-            <a:ext cx="10698480" cy="411480"/>
+            <a:off x="731520" y="6309360"/>
+            <a:ext cx="10728655" cy="365760"/>
           </a:xfrm>
           <a:prstGeom prst="rect">
             <a:avLst/>
@@ -7696,7 +8725,7 @@
               </a:defRPr>
             </a:pPr>
             <a:r>
-              <a:t>NextGen Celik Digital 2026  •  UTM KL x ASDAF PERKIM  •  Sabtu, 12 September 2026                                                                    Slaid 14 / 16</a:t>
+              <a:t>Bengkel Santai NextGen Celik Digital 2026  |  UTM KL × ASDAF PERKIM                                             Slaid 14 / 16</a:t>
             </a:r>
           </a:p>
         </p:txBody>
@@ -7734,7 +8763,7 @@
             <a:avLst/>
           </a:prstGeom>
           <a:solidFill>
-            <a:srgbClr val="0F172A"/>
+            <a:srgbClr val="0A0F1D"/>
           </a:solidFill>
           <a:ln>
             <a:noFill/>
@@ -7771,13 +8800,13 @@
         <p:spPr>
           <a:xfrm>
             <a:off x="0" y="0"/>
-            <a:ext cx="12191695" cy="1188720"/>
+            <a:ext cx="12191695" cy="1097280"/>
           </a:xfrm>
           <a:prstGeom prst="rect">
             <a:avLst/>
           </a:prstGeom>
           <a:solidFill>
-            <a:srgbClr val="132238"/>
+            <a:srgbClr val="131E36"/>
           </a:solidFill>
           <a:ln>
             <a:noFill/>
@@ -7820,7 +8849,7 @@
             <a:avLst/>
           </a:prstGeom>
           <a:solidFill>
-            <a:srgbClr val="7A1C30"/>
+            <a:srgbClr val="8A1C34"/>
           </a:solidFill>
           <a:ln>
             <a:noFill/>
@@ -7856,14 +8885,14 @@
         </p:nvSpPr>
         <p:spPr>
           <a:xfrm>
-            <a:off x="0" y="1188720"/>
-            <a:ext cx="12191695" cy="45720"/>
+            <a:off x="0" y="1097280"/>
+            <a:ext cx="12191695" cy="36576"/>
           </a:xfrm>
           <a:prstGeom prst="rect">
             <a:avLst/>
           </a:prstGeom>
           <a:solidFill>
-            <a:srgbClr val="C5A880"/>
+            <a:srgbClr val="D4AF37"/>
           </a:solidFill>
           <a:ln>
             <a:noFill/>
@@ -7900,7 +8929,7 @@
         <p:spPr>
           <a:xfrm>
             <a:off x="731520" y="109728"/>
-            <a:ext cx="10698480" cy="1005840"/>
+            <a:ext cx="10728655" cy="914400"/>
           </a:xfrm>
           <a:prstGeom prst="rect">
             <a:avLst/>
@@ -7919,24 +8948,24 @@
               </a:spcAft>
               <a:defRPr sz="1100" b="1">
                 <a:solidFill>
-                  <a:srgbClr val="C5A880"/>
-                </a:solidFill>
-              </a:defRPr>
-            </a:pPr>
-            <a:r>
-              <a:t>SLAID 15  |  CABARAN INTERAKTIF DEWAN</a:t>
-            </a:r>
-          </a:p>
-          <a:p>
-            <a:pPr>
-              <a:defRPr sz="2100" b="1">
+                  <a:srgbClr val="D4AF37"/>
+                </a:solidFill>
+              </a:defRPr>
+            </a:pPr>
+            <a:r>
+              <a:t>SLAID 15 / 16  •  CABARAN KUIZ DEWAN</a:t>
+            </a:r>
+          </a:p>
+          <a:p>
+            <a:pPr>
+              <a:defRPr sz="2200" b="1">
                 <a:solidFill>
                   <a:srgbClr val="FFFFFF"/>
                 </a:solidFill>
               </a:defRPr>
             </a:pPr>
             <a:r>
-              <a:t>Bersiap Sedia: Fast-Answer Tech Showdown Kuiz Pantas!</a:t>
+              <a:t>Fast-Answer Tech Showdown: Pertarungan Kuiz Pantas!</a:t>
             </a:r>
           </a:p>
           <a:p>
@@ -7948,7 +8977,7 @@
               </a:defRPr>
             </a:pPr>
             <a:r>
-              <a:t>Fast-Answer Tech Showdown: Kuiz Pantas Tanpa Gajet!</a:t>
+              <a:t>Mekanik Sifar Gajet: Mata pada skrin, tangan atas meja! '3... 2... 1... ANGKAT TANGAN!'</a:t>
             </a:r>
           </a:p>
         </p:txBody>
@@ -7961,18 +8990,18 @@
         </p:nvSpPr>
         <p:spPr>
           <a:xfrm>
-            <a:off x="731520" y="1463040"/>
-            <a:ext cx="5212080" cy="4663440"/>
+            <a:off x="822960" y="1463040"/>
+            <a:ext cx="6858000" cy="3840480"/>
           </a:xfrm>
           <a:prstGeom prst="roundRect">
             <a:avLst/>
           </a:prstGeom>
           <a:solidFill>
-            <a:srgbClr val="1B263B"/>
+            <a:srgbClr val="131E36"/>
           </a:solidFill>
-          <a:ln w="19050">
+          <a:ln w="31750">
             <a:solidFill>
-              <a:srgbClr val="7A1C30"/>
+              <a:srgbClr val="0EA5E9"/>
             </a:solidFill>
           </a:ln>
         </p:spPr>
@@ -7991,81 +9020,96 @@
           </a:fontRef>
         </p:style>
         <p:txBody>
-          <a:bodyPr rtlCol="0" anchor="ctr" wrap="square" lIns="320040" rIns="320040" tIns="274320"/>
+          <a:bodyPr rtlCol="0" anchor="ctr" wrap="square" lIns="320040" tIns="182880"/>
           <a:lstStyle/>
           <a:p>
             <a:pPr algn="ctr">
-              <a:spcAft>
-                <a:spcPts val="1200"/>
-              </a:spcAft>
-              <a:defRPr sz="1500" b="1">
-                <a:solidFill>
-                  <a:srgbClr val="C5A880"/>
-                </a:solidFill>
-              </a:defRPr>
-            </a:pPr>
-            <a:r>
-              <a:t>POIN &amp; KONSEP UTAMA</a:t>
-            </a:r>
-          </a:p>
-          <a:p>
-            <a:pPr>
               <a:spcAft>
                 <a:spcPts val="800"/>
               </a:spcAft>
-              <a:defRPr sz="1300">
+              <a:defRPr sz="1500" b="1">
+                <a:solidFill>
+                  <a:srgbClr val="D4AF37"/>
+                </a:solidFill>
+              </a:defRPr>
+            </a:pPr>
+            <a:r>
+              <a:t>⚡ 5 SOALAN REBUTAN HADIAH SEGERA:</a:t>
+            </a:r>
+          </a:p>
+          <a:p>
+            <a:pPr>
+              <a:spcAft>
+                <a:spcPts val="600"/>
+              </a:spcAft>
+              <a:defRPr sz="1150">
                 <a:solidFill>
                   <a:srgbClr val="F1F5F9"/>
                 </a:solidFill>
               </a:defRPr>
             </a:pPr>
             <a:r>
-              <a:t>• Mekanik Sifar Gajet (Zero-Device): Tiada telefon pintar diperlukan!</a:t>
+              <a:t>SOALAN 1: Apakah maksud singkatan AI dalam bahasa Melayu dan Inggeris?</a:t>
             </a:r>
           </a:p>
           <a:p>
             <a:pPr>
               <a:spcAft>
-                <a:spcPts val="800"/>
+                <a:spcPts val="600"/>
               </a:spcAft>
-              <a:defRPr sz="1300">
+              <a:defRPr sz="1150">
                 <a:solidFill>
                   <a:srgbClr val="F1F5F9"/>
                 </a:solidFill>
               </a:defRPr>
             </a:pPr>
             <a:r>
-              <a:t>• Soalan dipaparkan di layar skrin dewan secara bergilir-gilir.</a:t>
+              <a:t>SOALAN 2: Mesej menang RM10,000 dari nombor misteri dinamakan apa?</a:t>
             </a:r>
           </a:p>
           <a:p>
             <a:pPr>
               <a:spcAft>
-                <a:spcPts val="800"/>
+                <a:spcPts val="600"/>
               </a:spcAft>
-              <a:defRPr sz="1300">
+              <a:defRPr sz="1150">
                 <a:solidFill>
                   <a:srgbClr val="F1F5F9"/>
                 </a:solidFill>
               </a:defRPr>
             </a:pPr>
             <a:r>
-              <a:t>• Mekanik Pantas: '3... 2... 1... ANGKAT TANGAN!'.</a:t>
+              <a:t>SOALAN 3: Apakah Formula 3T untuk menewaskan scammer?</a:t>
             </a:r>
           </a:p>
           <a:p>
             <a:pPr>
               <a:spcAft>
-                <a:spcPts val="800"/>
+                <a:spcPts val="600"/>
               </a:spcAft>
-              <a:defRPr sz="1300">
+              <a:defRPr sz="1150">
                 <a:solidFill>
                   <a:srgbClr val="F1F5F9"/>
                 </a:solidFill>
               </a:defRPr>
             </a:pPr>
             <a:r>
-              <a:t>• Kategori Hadiah: Hamper Kumpulan, Hadiah Misteri Individu &amp; Snek Ceria.</a:t>
+              <a:t>SOALAN 4: Manakah lebih kebal: Password 'asdaf2026' atau Passphrase?</a:t>
+            </a:r>
+          </a:p>
+          <a:p>
+            <a:pPr>
+              <a:spcAft>
+                <a:spcPts val="600"/>
+              </a:spcAft>
+              <a:defRPr sz="1150">
+                <a:solidFill>
+                  <a:srgbClr val="F1F5F9"/>
+                </a:solidFill>
+              </a:defRPr>
+            </a:pPr>
+            <a:r>
+              <a:t>SOALAN 5: Apakah nombor talian kecemasan scam NSRC kebangsaan?</a:t>
             </a:r>
           </a:p>
         </p:txBody>
@@ -8078,18 +9122,18 @@
         </p:nvSpPr>
         <p:spPr>
           <a:xfrm>
-            <a:off x="6217920" y="1463040"/>
-            <a:ext cx="5212080" cy="4663440"/>
+            <a:off x="7955279" y="1463040"/>
+            <a:ext cx="3383280" cy="3840480"/>
           </a:xfrm>
           <a:prstGeom prst="roundRect">
             <a:avLst/>
           </a:prstGeom>
           <a:solidFill>
-            <a:srgbClr val="C5A880"/>
+            <a:srgbClr val="1E192D"/>
           </a:solidFill>
-          <a:ln w="19050">
+          <a:ln w="31750">
             <a:solidFill>
-              <a:srgbClr val="C5A880"/>
+              <a:srgbClr val="A855F7"/>
             </a:solidFill>
           </a:ln>
         </p:spPr>
@@ -8108,110 +9152,207 @@
           </a:fontRef>
         </p:style>
         <p:txBody>
-          <a:bodyPr rtlCol="0" anchor="ctr" wrap="square" lIns="320040" rIns="320040" tIns="274320"/>
+          <a:bodyPr rtlCol="0" anchor="ctr" wrap="square" lIns="228600" tIns="182880"/>
           <a:lstStyle/>
           <a:p>
             <a:pPr algn="ctr">
-              <a:spcAft>
-                <a:spcPts val="1200"/>
-              </a:spcAft>
-              <a:defRPr sz="1500" b="1">
-                <a:solidFill>
-                  <a:srgbClr val="DFBA8E"/>
-                </a:solidFill>
-              </a:defRPr>
-            </a:pPr>
-            <a:r>
-              <a:t>5 SOALAN KUIZ HANGAT</a:t>
-            </a:r>
-          </a:p>
-          <a:p>
-            <a:pPr>
               <a:spcAft>
                 <a:spcPts val="800"/>
               </a:spcAft>
-              <a:defRPr sz="1250">
+              <a:defRPr sz="1400" b="1">
+                <a:solidFill>
+                  <a:srgbClr val="A855F7"/>
+                </a:solidFill>
+              </a:defRPr>
+            </a:pPr>
+            <a:r>
+              <a:t>🎁 HADIAH MENANTI!</a:t>
+            </a:r>
+          </a:p>
+          <a:p>
+            <a:pPr>
+              <a:spcAft>
+                <a:spcPts val="400"/>
+              </a:spcAft>
+              <a:defRPr sz="1050">
                 <a:solidFill>
                   <a:srgbClr val="F1F5F9"/>
                 </a:solidFill>
               </a:defRPr>
             </a:pPr>
             <a:r>
-              <a:t>✔ S1: AI bermaksud... (Jawapan: Artificial Intelligence / Kecerdasan Buatan)</a:t>
+              <a:t>5 Pemenang Kuiz Pantas!</a:t>
             </a:r>
           </a:p>
           <a:p>
             <a:pPr>
               <a:spcAft>
-                <a:spcPts val="800"/>
+                <a:spcPts val="400"/>
               </a:spcAft>
-              <a:defRPr sz="1250">
+              <a:defRPr sz="1050">
                 <a:solidFill>
                   <a:srgbClr val="F1F5F9"/>
                 </a:solidFill>
               </a:defRPr>
             </a:pPr>
             <a:r>
-              <a:t>✔ S2: Mesej 'Menang RM10,000 dari Shopee' dinamakan... (Jawapan: Scam / Phishing)</a:t>
+              <a:t>Hadiah Berguna Asrama:</a:t>
             </a:r>
           </a:p>
           <a:p>
             <a:pPr>
               <a:spcAft>
-                <a:spcPts val="800"/>
+                <a:spcPts val="400"/>
               </a:spcAft>
-              <a:defRPr sz="1250">
+              <a:defRPr sz="1050">
                 <a:solidFill>
                   <a:srgbClr val="F1F5F9"/>
                 </a:solidFill>
               </a:defRPr>
             </a:pPr>
             <a:r>
-              <a:t>✔ S3: Formula 3T keselamatan siber... (Jawapan: Tidak Pasti, Tidak Kongsi, Tidak Klik)</a:t>
+              <a:t>  • Pendrive 64GB</a:t>
             </a:r>
           </a:p>
           <a:p>
             <a:pPr>
               <a:spcAft>
-                <a:spcPts val="800"/>
+                <a:spcPts val="400"/>
               </a:spcAft>
-              <a:defRPr sz="1250">
+              <a:defRPr sz="1050">
                 <a:solidFill>
                   <a:srgbClr val="F1F5F9"/>
                 </a:solidFill>
               </a:defRPr>
             </a:pPr>
             <a:r>
-              <a:t>✔ S4: Kata laluan paling selamat... (Jawapan: Passphrase gabungan perkataan)</a:t>
+              <a:t>  • Kipas Meja USB Boleh Cas</a:t>
             </a:r>
           </a:p>
           <a:p>
             <a:pPr>
               <a:spcAft>
-                <a:spcPts val="800"/>
+                <a:spcPts val="400"/>
               </a:spcAft>
-              <a:defRPr sz="1250">
+              <a:defRPr sz="1050">
                 <a:solidFill>
                   <a:srgbClr val="F1F5F9"/>
                 </a:solidFill>
               </a:defRPr>
             </a:pPr>
             <a:r>
-              <a:t>✔ S5: Talian kecemasan scam NSRC... (Jawapan: 997)</a:t>
-            </a:r>
-          </a:p>
-        </p:txBody>
-      </p:sp>
-      <p:sp>
-        <p:nvSpPr>
-          <p:cNvPr id="9" name="TextBox 8"/>
+              <a:t>  • Lampu Belajar LED USB</a:t>
+            </a:r>
+          </a:p>
+          <a:p>
+            <a:pPr>
+              <a:spcAft>
+                <a:spcPts val="400"/>
+              </a:spcAft>
+              <a:defRPr sz="1050">
+                <a:solidFill>
+                  <a:srgbClr val="F1F5F9"/>
+                </a:solidFill>
+              </a:defRPr>
+            </a:pPr>
+            <a:r>
+              <a:t>  • Botol Termos Digital</a:t>
+            </a:r>
+          </a:p>
+          <a:p>
+            <a:pPr>
+              <a:spcAft>
+                <a:spcPts val="400"/>
+              </a:spcAft>
+              <a:defRPr sz="1050">
+                <a:solidFill>
+                  <a:srgbClr val="F1F5F9"/>
+                </a:solidFill>
+              </a:defRPr>
+            </a:pPr>
+            <a:r>
+              <a:t>  • Set Pen Morandi &amp; Nota</a:t>
+            </a:r>
+          </a:p>
+          <a:p>
+            <a:pPr>
+              <a:spcAft>
+                <a:spcPts val="400"/>
+              </a:spcAft>
+              <a:defRPr sz="1050">
+                <a:solidFill>
+                  <a:srgbClr val="F1F5F9"/>
+                </a:solidFill>
+              </a:defRPr>
+            </a:pPr>
+            <a:r>
+              <a:t>Siapa pantas &amp; tepat terus bawa pulang hadiah ke meja!</a:t>
+            </a:r>
+          </a:p>
+        </p:txBody>
+      </p:sp>
+      <p:sp>
+        <p:nvSpPr>
+          <p:cNvPr id="9" name="Rounded Rectangle 8"/>
+          <p:cNvSpPr/>
+          <p:nvPr/>
+        </p:nvSpPr>
+        <p:spPr>
+          <a:xfrm>
+            <a:off x="822960" y="5486400"/>
+            <a:ext cx="10515600" cy="640080"/>
+          </a:xfrm>
+          <a:prstGeom prst="roundRect">
+            <a:avLst/>
+          </a:prstGeom>
+          <a:solidFill>
+            <a:srgbClr val="8A1C34"/>
+          </a:solidFill>
+          <a:ln>
+            <a:noFill/>
+          </a:ln>
+        </p:spPr>
+        <p:style>
+          <a:lnRef idx="1">
+            <a:schemeClr val="accent1"/>
+          </a:lnRef>
+          <a:fillRef idx="3">
+            <a:schemeClr val="accent1"/>
+          </a:fillRef>
+          <a:effectRef idx="2">
+            <a:schemeClr val="accent1"/>
+          </a:effectRef>
+          <a:fontRef idx="minor">
+            <a:schemeClr val="lt1"/>
+          </a:fontRef>
+        </p:style>
+        <p:txBody>
+          <a:bodyPr rtlCol="0" anchor="ctr" wrap="square"/>
+          <a:lstStyle/>
+          <a:p>
+            <a:pPr algn="ctr">
+              <a:defRPr sz="1200" b="1">
+                <a:solidFill>
+                  <a:srgbClr val="FFFFFF"/>
+                </a:solidFill>
+              </a:defRPr>
+            </a:pPr>
+            <a:r>
+              <a:t>🚨 PERATURAN SHOWDOWN: Emcee kira 3, 2, 1 ANGKAT TANGAN! Mentor meja tolong tengok siapa paling pantas di meja anda!</a:t>
+            </a:r>
+          </a:p>
+        </p:txBody>
+      </p:sp>
+      <p:sp>
+        <p:nvSpPr>
+          <p:cNvPr id="10" name="TextBox 9"/>
           <p:cNvSpPr txBox="1"/>
           <p:nvPr/>
         </p:nvSpPr>
         <p:spPr>
           <a:xfrm>
-            <a:off x="731520" y="6263640"/>
-            <a:ext cx="10698480" cy="411480"/>
+            <a:off x="731520" y="6309360"/>
+            <a:ext cx="10728655" cy="365760"/>
           </a:xfrm>
           <a:prstGeom prst="rect">
             <a:avLst/>
@@ -8232,7 +9373,7 @@
               </a:defRPr>
             </a:pPr>
             <a:r>
-              <a:t>NextGen Celik Digital 2026  •  UTM KL x ASDAF PERKIM  •  Sabtu, 12 September 2026                                                                    Slaid 15 / 16</a:t>
+              <a:t>Bengkel Santai NextGen Celik Digital 2026  |  UTM KL × ASDAF PERKIM                                             Slaid 15 / 16</a:t>
             </a:r>
           </a:p>
         </p:txBody>
@@ -8270,7 +9411,7 @@
             <a:avLst/>
           </a:prstGeom>
           <a:solidFill>
-            <a:srgbClr val="0F172A"/>
+            <a:srgbClr val="0A0F1D"/>
           </a:solidFill>
           <a:ln>
             <a:noFill/>
@@ -8307,13 +9448,13 @@
         <p:spPr>
           <a:xfrm>
             <a:off x="0" y="0"/>
-            <a:ext cx="12191695" cy="1188720"/>
+            <a:ext cx="12191695" cy="1097280"/>
           </a:xfrm>
           <a:prstGeom prst="rect">
             <a:avLst/>
           </a:prstGeom>
           <a:solidFill>
-            <a:srgbClr val="132238"/>
+            <a:srgbClr val="131E36"/>
           </a:solidFill>
           <a:ln>
             <a:noFill/>
@@ -8356,7 +9497,7 @@
             <a:avLst/>
           </a:prstGeom>
           <a:solidFill>
-            <a:srgbClr val="7A1C30"/>
+            <a:srgbClr val="8A1C34"/>
           </a:solidFill>
           <a:ln>
             <a:noFill/>
@@ -8392,14 +9533,14 @@
         </p:nvSpPr>
         <p:spPr>
           <a:xfrm>
-            <a:off x="0" y="1188720"/>
-            <a:ext cx="12191695" cy="45720"/>
+            <a:off x="0" y="1097280"/>
+            <a:ext cx="12191695" cy="36576"/>
           </a:xfrm>
           <a:prstGeom prst="rect">
             <a:avLst/>
           </a:prstGeom>
           <a:solidFill>
-            <a:srgbClr val="C5A880"/>
+            <a:srgbClr val="D4AF37"/>
           </a:solidFill>
           <a:ln>
             <a:noFill/>
@@ -8436,7 +9577,7 @@
         <p:spPr>
           <a:xfrm>
             <a:off x="731520" y="109728"/>
-            <a:ext cx="10698480" cy="1005840"/>
+            <a:ext cx="10728655" cy="914400"/>
           </a:xfrm>
           <a:prstGeom prst="rect">
             <a:avLst/>
@@ -8455,24 +9596,24 @@
               </a:spcAft>
               <a:defRPr sz="1100" b="1">
                 <a:solidFill>
-                  <a:srgbClr val="C5A880"/>
-                </a:solidFill>
-              </a:defRPr>
-            </a:pPr>
-            <a:r>
-              <a:t>SLAID 16  |  SESI PENUTUP &amp; PENGHARGAAN</a:t>
-            </a:r>
-          </a:p>
-          <a:p>
-            <a:pPr>
-              <a:defRPr sz="2100" b="1">
+                  <a:srgbClr val="D4AF37"/>
+                </a:solidFill>
+              </a:defRPr>
+            </a:pPr>
+            <a:r>
+              <a:t>SLAID 16 / 16  •  MAJLIS PENUTUP &amp; JAMUAN</a:t>
+            </a:r>
+          </a:p>
+          <a:p>
+            <a:pPr>
+              <a:defRPr sz="2200" b="1">
                 <a:solidFill>
                   <a:srgbClr val="FFFFFF"/>
                 </a:solidFill>
               </a:defRPr>
             </a:pPr>
             <a:r>
-              <a:t>Masa Depan Bermula Hari Ini! Terima Kasih ASDAF</a:t>
+              <a:t>Masa Depan Bermula Hari Ini: Terima Kasih ASDAF PERKIM!</a:t>
             </a:r>
           </a:p>
           <a:p>
@@ -8484,7 +9625,7 @@
               </a:defRPr>
             </a:pPr>
             <a:r>
-              <a:t>Masa Depan Bermula Hari Ini: Terima Kasih Warga ASDAF PERKIM</a:t>
+              <a:t>Semoga ilmu yang dikongsi menjadi pemangkin kejayaan dan pembakar semangat anak-anak ASDAF</a:t>
             </a:r>
           </a:p>
         </p:txBody>
@@ -8497,18 +9638,18 @@
         </p:nvSpPr>
         <p:spPr>
           <a:xfrm>
-            <a:off x="731520" y="1463040"/>
-            <a:ext cx="5212080" cy="4663440"/>
+            <a:off x="822960" y="1463040"/>
+            <a:ext cx="5120640" cy="3840480"/>
           </a:xfrm>
           <a:prstGeom prst="roundRect">
             <a:avLst/>
           </a:prstGeom>
           <a:solidFill>
-            <a:srgbClr val="1B263B"/>
+            <a:srgbClr val="131E36"/>
           </a:solidFill>
-          <a:ln w="19050">
+          <a:ln w="25400">
             <a:solidFill>
-              <a:srgbClr val="7A1C30"/>
+              <a:srgbClr val="0EA5E9"/>
             </a:solidFill>
           </a:ln>
         </p:spPr>
@@ -8527,81 +9668,66 @@
           </a:fontRef>
         </p:style>
         <p:txBody>
-          <a:bodyPr rtlCol="0" anchor="ctr" wrap="square" lIns="320040" rIns="320040" tIns="274320"/>
+          <a:bodyPr rtlCol="0" anchor="ctr" wrap="square" lIns="320040" tIns="228600"/>
           <a:lstStyle/>
           <a:p>
             <a:pPr algn="ctr">
               <a:spcAft>
-                <a:spcPts val="1200"/>
+                <a:spcPts val="1000"/>
               </a:spcAft>
-              <a:defRPr sz="1500" b="1">
-                <a:solidFill>
-                  <a:srgbClr val="C5A880"/>
-                </a:solidFill>
-              </a:defRPr>
-            </a:pPr>
-            <a:r>
-              <a:t>POIN &amp; KONSEP UTAMA</a:t>
+              <a:defRPr sz="1400" b="1">
+                <a:solidFill>
+                  <a:srgbClr val="0EA5E9"/>
+                </a:solidFill>
+              </a:defRPr>
+            </a:pPr>
+            <a:r>
+              <a:t>📋 3 TINDAKAN AKHIR SEBELUM BERSURAI:</a:t>
             </a:r>
           </a:p>
           <a:p>
             <a:pPr>
               <a:spcAft>
-                <a:spcPts val="800"/>
+                <a:spcPts val="1000"/>
               </a:spcAft>
-              <a:defRPr sz="1300">
+              <a:defRPr sz="1200">
                 <a:solidFill>
                   <a:srgbClr val="F1F5F9"/>
                 </a:solidFill>
               </a:defRPr>
             </a:pPr>
             <a:r>
-              <a:t>• Pengisian Borang Soal Selidik Pasca-Program (Bahagian 2 &amp; Komen).</a:t>
+              <a:t>1. Lengkapkan Borang Post-Survey (Bahagian 2 di bawah kertas survey anda) dan tulis komen ikhlas.</a:t>
             </a:r>
           </a:p>
           <a:p>
             <a:pPr>
               <a:spcAft>
-                <a:spcPts val="800"/>
+                <a:spcPts val="1000"/>
               </a:spcAft>
-              <a:defRPr sz="1300">
+              <a:defRPr sz="1200">
                 <a:solidFill>
                   <a:srgbClr val="F1F5F9"/>
                 </a:solidFill>
               </a:defRPr>
             </a:pPr>
             <a:r>
-              <a:t>• Penyampaian Hadiah Juara Startup Sprint &amp; Pemenang Kuiz Dewan.</a:t>
+              <a:t>2. Penyampaian Hadiah Juara Meja &amp; Cenderamata Rasmi UTM kepada Pengurusan ASDAF PERKIM.</a:t>
             </a:r>
           </a:p>
           <a:p>
             <a:pPr>
               <a:spcAft>
-                <a:spcPts val="800"/>
+                <a:spcPts val="1000"/>
               </a:spcAft>
-              <a:defRPr sz="1300">
+              <a:defRPr sz="1200">
                 <a:solidFill>
                   <a:srgbClr val="F1F5F9"/>
                 </a:solidFill>
               </a:defRPr>
             </a:pPr>
             <a:r>
-              <a:t>• Penyerahan Cenderamata Rasmi UTM kepada Pengurusan ASDAF.</a:t>
-            </a:r>
-          </a:p>
-          <a:p>
-            <a:pPr>
-              <a:spcAft>
-                <a:spcPts val="800"/>
-              </a:spcAft>
-              <a:defRPr sz="1300">
-                <a:solidFill>
-                  <a:srgbClr val="F1F5F9"/>
-                </a:solidFill>
-              </a:defRPr>
-            </a:pPr>
-            <a:r>
-              <a:t>• Sesi Jamuan Makan Tengah Hari &amp; Bergambar Kenangan Bersama.</a:t>
+              <a:t>3. Sesi Bergambar Kenangan Bersama &amp; Jamuan Makan Tengah Hari Nasi Berlauk di Dewan Makan.</a:t>
             </a:r>
           </a:p>
         </p:txBody>
@@ -8615,17 +9741,17 @@
         <p:spPr>
           <a:xfrm>
             <a:off x="6217920" y="1463040"/>
-            <a:ext cx="5212080" cy="4663440"/>
+            <a:ext cx="5120640" cy="3840480"/>
           </a:xfrm>
           <a:prstGeom prst="roundRect">
             <a:avLst/>
           </a:prstGeom>
           <a:solidFill>
-            <a:srgbClr val="C5A880"/>
+            <a:srgbClr val="191423"/>
           </a:solidFill>
-          <a:ln w="19050">
+          <a:ln w="31750">
             <a:solidFill>
-              <a:srgbClr val="C5A880"/>
+              <a:srgbClr val="D4AF37"/>
             </a:solidFill>
           </a:ln>
         </p:spPr>
@@ -8644,95 +9770,129 @@
           </a:fontRef>
         </p:style>
         <p:txBody>
-          <a:bodyPr rtlCol="0" anchor="ctr" wrap="square" lIns="320040" rIns="320040" tIns="274320"/>
+          <a:bodyPr rtlCol="0" anchor="ctr" wrap="square" lIns="320040" tIns="228600"/>
           <a:lstStyle/>
           <a:p>
             <a:pPr algn="ctr">
               <a:spcAft>
-                <a:spcPts val="1200"/>
+                <a:spcPts val="1000"/>
               </a:spcAft>
-              <a:defRPr sz="1500" b="1">
-                <a:solidFill>
-                  <a:srgbClr val="DFBA8E"/>
-                </a:solidFill>
-              </a:defRPr>
-            </a:pPr>
-            <a:r>
-              <a:t>MESEJ INSPIRASI ABANG &amp; KAKAK UTM</a:t>
+              <a:defRPr sz="1400" b="1">
+                <a:solidFill>
+                  <a:srgbClr val="D4AF37"/>
+                </a:solidFill>
+              </a:defRPr>
+            </a:pPr>
+            <a:r>
+              <a:t>🌟 PESANAN ABANG &amp; KAKAK UTM:</a:t>
             </a:r>
           </a:p>
           <a:p>
             <a:pPr>
               <a:spcAft>
-                <a:spcPts val="800"/>
+                <a:spcPts val="1000"/>
               </a:spcAft>
-              <a:defRPr sz="1250">
-                <a:solidFill>
-                  <a:srgbClr val="F1F5F9"/>
-                </a:solidFill>
-              </a:defRPr>
-            </a:pPr>
-            <a:r>
-              <a:t>✔ “Anak-anak ASDAF adalah generasi peneraju masa hadapan negara.”</a:t>
+              <a:defRPr sz="1400" b="1">
+                <a:solidFill>
+                  <a:srgbClr val="FFFFFF"/>
+                </a:solidFill>
+              </a:defRPr>
+            </a:pPr>
+            <a:r>
+              <a:t>“Jangan biarkan keterbatasan semalam menghalang impian esok hari.”</a:t>
             </a:r>
           </a:p>
           <a:p>
             <a:pPr>
               <a:spcAft>
-                <a:spcPts val="800"/>
+                <a:spcPts val="1400"/>
               </a:spcAft>
-              <a:defRPr sz="1250">
-                <a:solidFill>
-                  <a:srgbClr val="F1F5F9"/>
-                </a:solidFill>
-              </a:defRPr>
-            </a:pPr>
-            <a:r>
-              <a:t>✔ “Jangan pernah biarkan keterbatasan hari ini menghalang cita-cita besar.”</a:t>
-            </a:r>
-          </a:p>
-          <a:p>
-            <a:pPr>
-              <a:spcAft>
-                <a:spcPts val="800"/>
-              </a:spcAft>
-              <a:defRPr sz="1250">
-                <a:solidFill>
-                  <a:srgbClr val="F1F5F9"/>
-                </a:solidFill>
-              </a:defRPr>
-            </a:pPr>
-            <a:r>
-              <a:t>✔ “Kuasai teknologi, pelihara adab, dan terus melangkah dengan yakin!”</a:t>
-            </a:r>
-          </a:p>
-          <a:p>
-            <a:pPr>
-              <a:spcAft>
-                <a:spcPts val="800"/>
-              </a:spcAft>
-              <a:defRPr sz="1250">
-                <a:solidFill>
-                  <a:srgbClr val="F1F5F9"/>
-                </a:solidFill>
-              </a:defRPr>
-            </a:pPr>
-            <a:r>
-              <a:t>✔ Jumpa lagi di menara gading Universiti Teknologi Malaysia!</a:t>
-            </a:r>
-          </a:p>
-        </p:txBody>
-      </p:sp>
-      <p:sp>
-        <p:nvSpPr>
-          <p:cNvPr id="9" name="TextBox 8"/>
+              <a:defRPr sz="1300" b="1">
+                <a:solidFill>
+                  <a:srgbClr val="EBCD78"/>
+                </a:solidFill>
+              </a:defRPr>
+            </a:pPr>
+            <a:r>
+              <a:t>“Kuasai teknologi, pelihara adab, dan buktikan anak-anak ASDAF mampu menggegarkan persada negara!”</a:t>
+            </a:r>
+          </a:p>
+          <a:p>
+            <a:pPr>
+              <a:defRPr sz="1100" i="1">
+                <a:solidFill>
+                  <a:srgbClr val="94A3B8"/>
+                </a:solidFill>
+              </a:defRPr>
+            </a:pPr>
+            <a:r>
+              <a:t>— Mahasiswa Fakulti Komputeran Universiti Teknologi Malaysia</a:t>
+            </a:r>
+          </a:p>
+        </p:txBody>
+      </p:sp>
+      <p:sp>
+        <p:nvSpPr>
+          <p:cNvPr id="9" name="Rounded Rectangle 8"/>
+          <p:cNvSpPr/>
+          <p:nvPr/>
+        </p:nvSpPr>
+        <p:spPr>
+          <a:xfrm>
+            <a:off x="822960" y="5486400"/>
+            <a:ext cx="10515600" cy="640080"/>
+          </a:xfrm>
+          <a:prstGeom prst="roundRect">
+            <a:avLst/>
+          </a:prstGeom>
+          <a:solidFill>
+            <a:srgbClr val="8A1C34"/>
+          </a:solidFill>
+          <a:ln>
+            <a:noFill/>
+          </a:ln>
+        </p:spPr>
+        <p:style>
+          <a:lnRef idx="1">
+            <a:schemeClr val="accent1"/>
+          </a:lnRef>
+          <a:fillRef idx="3">
+            <a:schemeClr val="accent1"/>
+          </a:fillRef>
+          <a:effectRef idx="2">
+            <a:schemeClr val="accent1"/>
+          </a:effectRef>
+          <a:fontRef idx="minor">
+            <a:schemeClr val="lt1"/>
+          </a:fontRef>
+        </p:style>
+        <p:txBody>
+          <a:bodyPr rtlCol="0" anchor="ctr" wrap="square"/>
+          <a:lstStyle/>
+          <a:p>
+            <a:pPr algn="ctr">
+              <a:defRPr sz="1200" b="1">
+                <a:solidFill>
+                  <a:srgbClr val="FFFFFF"/>
+                </a:solidFill>
+              </a:defRPr>
+            </a:pPr>
+            <a:r>
+              <a:t>🎓 JUMPA LAGI DI MENARA GADING UNIVERSITI TEKNOLOGI MALAYSIA! TERIMA KASIH ASDAF!</a:t>
+            </a:r>
+          </a:p>
+        </p:txBody>
+      </p:sp>
+      <p:sp>
+        <p:nvSpPr>
+          <p:cNvPr id="10" name="TextBox 9"/>
           <p:cNvSpPr txBox="1"/>
           <p:nvPr/>
         </p:nvSpPr>
         <p:spPr>
           <a:xfrm>
-            <a:off x="731520" y="6263640"/>
-            <a:ext cx="10698480" cy="411480"/>
+            <a:off x="731520" y="6309360"/>
+            <a:ext cx="10728655" cy="365760"/>
           </a:xfrm>
           <a:prstGeom prst="rect">
             <a:avLst/>
@@ -8753,7 +9913,7 @@
               </a:defRPr>
             </a:pPr>
             <a:r>
-              <a:t>NextGen Celik Digital 2026  •  UTM KL x ASDAF PERKIM  •  Sabtu, 12 September 2026                                                                    Slaid 16 / 16</a:t>
+              <a:t>Bengkel Santai NextGen Celik Digital 2026  |  UTM KL × ASDAF PERKIM                                             Slaid 16 / 16</a:t>
             </a:r>
           </a:p>
         </p:txBody>
@@ -8791,7 +9951,7 @@
             <a:avLst/>
           </a:prstGeom>
           <a:solidFill>
-            <a:srgbClr val="0F172A"/>
+            <a:srgbClr val="0A0F1D"/>
           </a:solidFill>
           <a:ln>
             <a:noFill/>
@@ -8828,13 +9988,13 @@
         <p:spPr>
           <a:xfrm>
             <a:off x="0" y="0"/>
-            <a:ext cx="12191695" cy="1188720"/>
+            <a:ext cx="12191695" cy="1097280"/>
           </a:xfrm>
           <a:prstGeom prst="rect">
             <a:avLst/>
           </a:prstGeom>
           <a:solidFill>
-            <a:srgbClr val="132238"/>
+            <a:srgbClr val="131E36"/>
           </a:solidFill>
           <a:ln>
             <a:noFill/>
@@ -8877,7 +10037,7 @@
             <a:avLst/>
           </a:prstGeom>
           <a:solidFill>
-            <a:srgbClr val="7A1C30"/>
+            <a:srgbClr val="8A1C34"/>
           </a:solidFill>
           <a:ln>
             <a:noFill/>
@@ -8913,14 +10073,14 @@
         </p:nvSpPr>
         <p:spPr>
           <a:xfrm>
-            <a:off x="0" y="1188720"/>
-            <a:ext cx="12191695" cy="45720"/>
+            <a:off x="0" y="1097280"/>
+            <a:ext cx="12191695" cy="36576"/>
           </a:xfrm>
           <a:prstGeom prst="rect">
             <a:avLst/>
           </a:prstGeom>
           <a:solidFill>
-            <a:srgbClr val="C5A880"/>
+            <a:srgbClr val="D4AF37"/>
           </a:solidFill>
           <a:ln>
             <a:noFill/>
@@ -8957,7 +10117,7 @@
         <p:spPr>
           <a:xfrm>
             <a:off x="731520" y="109728"/>
-            <a:ext cx="10698480" cy="1005840"/>
+            <a:ext cx="10728655" cy="914400"/>
           </a:xfrm>
           <a:prstGeom prst="rect">
             <a:avLst/>
@@ -8976,17 +10136,17 @@
               </a:spcAft>
               <a:defRPr sz="1100" b="1">
                 <a:solidFill>
-                  <a:srgbClr val="C5A880"/>
-                </a:solidFill>
-              </a:defRPr>
-            </a:pPr>
-            <a:r>
-              <a:t>SLAID 02  |  PENGENALAN PASUKAN UTM</a:t>
-            </a:r>
-          </a:p>
-          <a:p>
-            <a:pPr>
-              <a:defRPr sz="2100" b="1">
+                  <a:srgbClr val="D4AF37"/>
+                </a:solidFill>
+              </a:defRPr>
+            </a:pPr>
+            <a:r>
+              <a:t>SLAID 02 / 16  •  PENGENALAN PASUKAN</a:t>
+            </a:r>
+          </a:p>
+          <a:p>
+            <a:pPr>
+              <a:defRPr sz="2200" b="1">
                 <a:solidFill>
                   <a:srgbClr val="FFFFFF"/>
                 </a:solidFill>
@@ -9005,7 +10165,7 @@
               </a:defRPr>
             </a:pPr>
             <a:r>
-              <a:t>Mengenali Abang &amp; Kakak Mentor Sepanjang Program</a:t>
+              <a:t>Mahasiswa universiti yang datang untuk menjadi rakan mentor &amp; penyokong impian anda</a:t>
             </a:r>
           </a:p>
         </p:txBody>
@@ -9018,18 +10178,18 @@
         </p:nvSpPr>
         <p:spPr>
           <a:xfrm>
-            <a:off x="731520" y="1463040"/>
-            <a:ext cx="5212080" cy="4663440"/>
+            <a:off x="822960" y="1463040"/>
+            <a:ext cx="5120640" cy="1828800"/>
           </a:xfrm>
           <a:prstGeom prst="roundRect">
             <a:avLst/>
           </a:prstGeom>
           <a:solidFill>
-            <a:srgbClr val="1B263B"/>
+            <a:srgbClr val="131E36"/>
           </a:solidFill>
-          <a:ln w="19050">
+          <a:ln w="25400">
             <a:solidFill>
-              <a:srgbClr val="7A1C30"/>
+              <a:srgbClr val="8A1C34"/>
             </a:solidFill>
           </a:ln>
         </p:spPr>
@@ -9048,81 +10208,48 @@
           </a:fontRef>
         </p:style>
         <p:txBody>
-          <a:bodyPr rtlCol="0" anchor="ctr" wrap="square" lIns="320040" rIns="320040" tIns="274320"/>
+          <a:bodyPr rtlCol="0" anchor="ctr" wrap="square" lIns="274320" tIns="182880"/>
           <a:lstStyle/>
           <a:p>
             <a:pPr algn="ctr">
               <a:spcAft>
-                <a:spcPts val="1200"/>
+                <a:spcPts val="200"/>
               </a:spcAft>
-              <a:defRPr sz="1500" b="1">
-                <a:solidFill>
-                  <a:srgbClr val="C5A880"/>
-                </a:solidFill>
-              </a:defRPr>
-            </a:pPr>
-            <a:r>
-              <a:t>POIN &amp; KONSEP UTAMA</a:t>
+              <a:defRPr sz="1300" b="1">
+                <a:solidFill>
+                  <a:srgbClr val="8A1C34"/>
+                </a:solidFill>
+              </a:defRPr>
+            </a:pPr>
+            <a:r>
+              <a:t>1. PENCERAMAH &amp; LEAD TRAINER</a:t>
             </a:r>
           </a:p>
           <a:p>
             <a:pPr>
               <a:spcAft>
-                <a:spcPts val="800"/>
+                <a:spcPts val="400"/>
               </a:spcAft>
-              <a:defRPr sz="1300">
+              <a:defRPr sz="1100" b="1">
+                <a:solidFill>
+                  <a:srgbClr val="FFFFFF"/>
+                </a:solidFill>
+              </a:defRPr>
+            </a:pPr>
+            <a:r>
+              <a:t>Muhamad Arif bin Johar</a:t>
+            </a:r>
+          </a:p>
+          <a:p>
+            <a:pPr>
+              <a:defRPr sz="1050">
                 <a:solidFill>
                   <a:srgbClr val="F1F5F9"/>
                 </a:solidFill>
               </a:defRPr>
             </a:pPr>
             <a:r>
-              <a:t>• 13 Mahasiswa &amp; Fasilitator Fakulti Komputeran UTM Kuala Lumpur</a:t>
-            </a:r>
-          </a:p>
-          <a:p>
-            <a:pPr>
-              <a:spcAft>
-                <a:spcPts val="800"/>
-              </a:spcAft>
-              <a:defRPr sz="1300">
-                <a:solidFill>
-                  <a:srgbClr val="F1F5F9"/>
-                </a:solidFill>
-              </a:defRPr>
-            </a:pPr>
-            <a:r>
-              <a:t>• 7 Meja Kluster: Setiap meja dibimbing oleh Abang/Kakak Mentor khusus</a:t>
-            </a:r>
-          </a:p>
-          <a:p>
-            <a:pPr>
-              <a:spcAft>
-                <a:spcPts val="800"/>
-              </a:spcAft>
-              <a:defRPr sz="1300">
-                <a:solidFill>
-                  <a:srgbClr val="F1F5F9"/>
-                </a:solidFill>
-              </a:defRPr>
-            </a:pPr>
-            <a:r>
-              <a:t>• Pendekatan Mesra: Pembelajaran santai, tiada tekanan peperiksaan</a:t>
-            </a:r>
-          </a:p>
-          <a:p>
-            <a:pPr>
-              <a:spcAft>
-                <a:spcPts val="800"/>
-              </a:spcAft>
-              <a:defRPr sz="1300">
-                <a:solidFill>
-                  <a:srgbClr val="F1F5F9"/>
-                </a:solidFill>
-              </a:defRPr>
-            </a:pPr>
-            <a:r>
-              <a:t>• Sedia Membantu: Bimbingan amali, perbincangan idea &amp; sokongan PPKI</a:t>
+              <a:t>Membimbing konsep AI, demo langsung di skrin pentas, dan kuiz interaktif dewan.</a:t>
             </a:r>
           </a:p>
         </p:txBody>
@@ -9136,17 +10263,17 @@
         <p:spPr>
           <a:xfrm>
             <a:off x="6217920" y="1463040"/>
-            <a:ext cx="5212080" cy="4663440"/>
+            <a:ext cx="5120640" cy="1828800"/>
           </a:xfrm>
           <a:prstGeom prst="roundRect">
             <a:avLst/>
           </a:prstGeom>
           <a:solidFill>
-            <a:srgbClr val="C5A880"/>
+            <a:srgbClr val="131E36"/>
           </a:solidFill>
-          <a:ln w="19050">
+          <a:ln w="25400">
             <a:solidFill>
-              <a:srgbClr val="C5A880"/>
+              <a:srgbClr val="0EA5E9"/>
             </a:solidFill>
           </a:ln>
         </p:spPr>
@@ -9165,95 +10292,282 @@
           </a:fontRef>
         </p:style>
         <p:txBody>
-          <a:bodyPr rtlCol="0" anchor="ctr" wrap="square" lIns="320040" rIns="320040" tIns="274320"/>
+          <a:bodyPr rtlCol="0" anchor="ctr" wrap="square" lIns="274320" tIns="182880"/>
           <a:lstStyle/>
           <a:p>
             <a:pPr algn="ctr">
               <a:spcAft>
-                <a:spcPts val="1200"/>
+                <a:spcPts val="200"/>
               </a:spcAft>
-              <a:defRPr sz="1500" b="1">
-                <a:solidFill>
-                  <a:srgbClr val="DFBA8E"/>
-                </a:solidFill>
-              </a:defRPr>
-            </a:pPr>
-            <a:r>
-              <a:t>PERANAN ABANG &amp; KAKAK MENTOR</a:t>
+              <a:defRPr sz="1300" b="1">
+                <a:solidFill>
+                  <a:srgbClr val="0EA5E9"/>
+                </a:solidFill>
+              </a:defRPr>
+            </a:pPr>
+            <a:r>
+              <a:t>2. 7 MENTOR MEJA KLUSTER</a:t>
             </a:r>
           </a:p>
           <a:p>
             <a:pPr>
               <a:spcAft>
-                <a:spcPts val="800"/>
+                <a:spcPts val="400"/>
               </a:spcAft>
-              <a:defRPr sz="1250">
+              <a:defRPr sz="1100" b="1">
+                <a:solidFill>
+                  <a:srgbClr val="FFFFFF"/>
+                </a:solidFill>
+              </a:defRPr>
+            </a:pPr>
+            <a:r>
+              <a:t>Fasilitator Berdedikasi</a:t>
+            </a:r>
+          </a:p>
+          <a:p>
+            <a:pPr>
+              <a:defRPr sz="1050">
                 <a:solidFill>
                   <a:srgbClr val="F1F5F9"/>
                 </a:solidFill>
               </a:defRPr>
             </a:pPr>
             <a:r>
-              <a:t>✔ Fasilitator Meja: Memandu sesi ice-breaking dan perbincangan modul.</a:t>
-            </a:r>
-          </a:p>
-          <a:p>
-            <a:pPr>
+              <a:t>Duduk bersama adik-adik di setiap meja (Meja 1–7), memandu sesi amali dan perbincangan.</a:t>
+            </a:r>
+          </a:p>
+        </p:txBody>
+      </p:sp>
+      <p:sp>
+        <p:nvSpPr>
+          <p:cNvPr id="9" name="Rounded Rectangle 8"/>
+          <p:cNvSpPr/>
+          <p:nvPr/>
+        </p:nvSpPr>
+        <p:spPr>
+          <a:xfrm>
+            <a:off x="822960" y="3474720"/>
+            <a:ext cx="5120640" cy="1828800"/>
+          </a:xfrm>
+          <a:prstGeom prst="roundRect">
+            <a:avLst/>
+          </a:prstGeom>
+          <a:solidFill>
+            <a:srgbClr val="131E36"/>
+          </a:solidFill>
+          <a:ln w="25400">
+            <a:solidFill>
+              <a:srgbClr val="10B981"/>
+            </a:solidFill>
+          </a:ln>
+        </p:spPr>
+        <p:style>
+          <a:lnRef idx="1">
+            <a:schemeClr val="accent1"/>
+          </a:lnRef>
+          <a:fillRef idx="3">
+            <a:schemeClr val="accent1"/>
+          </a:fillRef>
+          <a:effectRef idx="2">
+            <a:schemeClr val="accent1"/>
+          </a:effectRef>
+          <a:fontRef idx="minor">
+            <a:schemeClr val="lt1"/>
+          </a:fontRef>
+        </p:style>
+        <p:txBody>
+          <a:bodyPr rtlCol="0" anchor="ctr" wrap="square" lIns="274320" tIns="182880"/>
+          <a:lstStyle/>
+          <a:p>
+            <a:pPr algn="ctr">
               <a:spcAft>
-                <a:spcPts val="800"/>
+                <a:spcPts val="200"/>
               </a:spcAft>
-              <a:defRPr sz="1250">
+              <a:defRPr sz="1300" b="1">
+                <a:solidFill>
+                  <a:srgbClr val="10B981"/>
+                </a:solidFill>
+              </a:defRPr>
+            </a:pPr>
+            <a:r>
+              <a:t>3. SOKONGAN KHAS PPKI</a:t>
+            </a:r>
+          </a:p>
+          <a:p>
+            <a:pPr>
+              <a:spcAft>
+                <a:spcPts val="400"/>
+              </a:spcAft>
+              <a:defRPr sz="1100" b="1">
+                <a:solidFill>
+                  <a:srgbClr val="FFFFFF"/>
+                </a:solidFill>
+              </a:defRPr>
+            </a:pPr>
+            <a:r>
+              <a:t>Bimbingan Inklusif</a:t>
+            </a:r>
+          </a:p>
+          <a:p>
+            <a:pPr>
+              <a:defRPr sz="1050">
                 <a:solidFill>
                   <a:srgbClr val="F1F5F9"/>
                 </a:solidFill>
               </a:defRPr>
             </a:pPr>
             <a:r>
-              <a:t>✔ Mentor Startup Sprint: Membantu lakaran poster 4 Kotak Emas.</a:t>
-            </a:r>
-          </a:p>
-          <a:p>
-            <a:pPr>
+              <a:t>Memberi perhatian mesra dan sokongan khas untuk rakan-rakan Pendidikan Khas.</a:t>
+            </a:r>
+          </a:p>
+        </p:txBody>
+      </p:sp>
+      <p:sp>
+        <p:nvSpPr>
+          <p:cNvPr id="10" name="Rounded Rectangle 9"/>
+          <p:cNvSpPr/>
+          <p:nvPr/>
+        </p:nvSpPr>
+        <p:spPr>
+          <a:xfrm>
+            <a:off x="6217920" y="3474720"/>
+            <a:ext cx="5120640" cy="1828800"/>
+          </a:xfrm>
+          <a:prstGeom prst="roundRect">
+            <a:avLst/>
+          </a:prstGeom>
+          <a:solidFill>
+            <a:srgbClr val="131E36"/>
+          </a:solidFill>
+          <a:ln w="25400">
+            <a:solidFill>
+              <a:srgbClr val="D4AF37"/>
+            </a:solidFill>
+          </a:ln>
+        </p:spPr>
+        <p:style>
+          <a:lnRef idx="1">
+            <a:schemeClr val="accent1"/>
+          </a:lnRef>
+          <a:fillRef idx="3">
+            <a:schemeClr val="accent1"/>
+          </a:fillRef>
+          <a:effectRef idx="2">
+            <a:schemeClr val="accent1"/>
+          </a:effectRef>
+          <a:fontRef idx="minor">
+            <a:schemeClr val="lt1"/>
+          </a:fontRef>
+        </p:style>
+        <p:txBody>
+          <a:bodyPr rtlCol="0" anchor="ctr" wrap="square" lIns="274320" tIns="182880"/>
+          <a:lstStyle/>
+          <a:p>
+            <a:pPr algn="ctr">
               <a:spcAft>
-                <a:spcPts val="800"/>
+                <a:spcPts val="200"/>
               </a:spcAft>
-              <a:defRPr sz="1250">
+              <a:defRPr sz="1300" b="1">
+                <a:solidFill>
+                  <a:srgbClr val="D4AF37"/>
+                </a:solidFill>
+              </a:defRPr>
+            </a:pPr>
+            <a:r>
+              <a:t>4. KRU LOGISTIK &amp; HADIAH</a:t>
+            </a:r>
+          </a:p>
+          <a:p>
+            <a:pPr>
+              <a:spcAft>
+                <a:spcPts val="400"/>
+              </a:spcAft>
+              <a:defRPr sz="1100" b="1">
+                <a:solidFill>
+                  <a:srgbClr val="FFFFFF"/>
+                </a:solidFill>
+              </a:defRPr>
+            </a:pPr>
+            <a:r>
+              <a:t>Pengurusan Acara</a:t>
+            </a:r>
+          </a:p>
+          <a:p>
+            <a:pPr>
+              <a:defRPr sz="1050">
                 <a:solidFill>
                   <a:srgbClr val="F1F5F9"/>
                 </a:solidFill>
               </a:defRPr>
             </a:pPr>
             <a:r>
-              <a:t>✔ Inklusiviti PPKI: Sokongan khusus untuk rakan Pendidikan Khas.</a:t>
-            </a:r>
-          </a:p>
-          <a:p>
-            <a:pPr>
-              <a:spcAft>
-                <a:spcPts val="800"/>
-              </a:spcAft>
-              <a:defRPr sz="1250">
-                <a:solidFill>
-                  <a:srgbClr val="F1F5F9"/>
-                </a:solidFill>
-              </a:defRPr>
-            </a:pPr>
-            <a:r>
-              <a:t>✔ Rakan Inspirasi: Berkongsi tip belajar dan peluang sambung belajar di IPT.</a:t>
-            </a:r>
-          </a:p>
-        </p:txBody>
-      </p:sp>
-      <p:sp>
-        <p:nvSpPr>
-          <p:cNvPr id="9" name="TextBox 8"/>
+              <a:t>Menjaga masa, menyalurkan kertas mahjong, marker pelbagai warna, dan menyediakan hadiah.</a:t>
+            </a:r>
+          </a:p>
+        </p:txBody>
+      </p:sp>
+      <p:sp>
+        <p:nvSpPr>
+          <p:cNvPr id="11" name="Rounded Rectangle 10"/>
+          <p:cNvSpPr/>
+          <p:nvPr/>
+        </p:nvSpPr>
+        <p:spPr>
+          <a:xfrm>
+            <a:off x="822960" y="5486400"/>
+            <a:ext cx="10515600" cy="640080"/>
+          </a:xfrm>
+          <a:prstGeom prst="roundRect">
+            <a:avLst/>
+          </a:prstGeom>
+          <a:solidFill>
+            <a:srgbClr val="8A1C34"/>
+          </a:solidFill>
+          <a:ln>
+            <a:noFill/>
+          </a:ln>
+        </p:spPr>
+        <p:style>
+          <a:lnRef idx="1">
+            <a:schemeClr val="accent1"/>
+          </a:lnRef>
+          <a:fillRef idx="3">
+            <a:schemeClr val="accent1"/>
+          </a:fillRef>
+          <a:effectRef idx="2">
+            <a:schemeClr val="accent1"/>
+          </a:effectRef>
+          <a:fontRef idx="minor">
+            <a:schemeClr val="lt1"/>
+          </a:fontRef>
+        </p:style>
+        <p:txBody>
+          <a:bodyPr rtlCol="0" anchor="ctr" wrap="square"/>
+          <a:lstStyle/>
+          <a:p>
+            <a:pPr algn="ctr">
+              <a:defRPr sz="1200" b="1">
+                <a:solidFill>
+                  <a:srgbClr val="FFFFFF"/>
+                </a:solidFill>
+              </a:defRPr>
+            </a:pPr>
+            <a:r>
+              <a:t>💬 PESANAN MESRA: Anggap abang &amp; kakak UTM sebagai kawan. Jangan takut bertanya, tiada soalan yang bodoh hari ini!</a:t>
+            </a:r>
+          </a:p>
+        </p:txBody>
+      </p:sp>
+      <p:sp>
+        <p:nvSpPr>
+          <p:cNvPr id="12" name="TextBox 11"/>
           <p:cNvSpPr txBox="1"/>
           <p:nvPr/>
         </p:nvSpPr>
         <p:spPr>
           <a:xfrm>
-            <a:off x="731520" y="6263640"/>
-            <a:ext cx="10698480" cy="411480"/>
+            <a:off x="731520" y="6309360"/>
+            <a:ext cx="10728655" cy="365760"/>
           </a:xfrm>
           <a:prstGeom prst="rect">
             <a:avLst/>
@@ -9274,7 +10588,7 @@
               </a:defRPr>
             </a:pPr>
             <a:r>
-              <a:t>NextGen Celik Digital 2026  •  UTM KL x ASDAF PERKIM  •  Sabtu, 12 September 2026                                                                    Slaid 2 / 16</a:t>
+              <a:t>Bengkel Santai NextGen Celik Digital 2026  |  UTM KL × ASDAF PERKIM                                             Slaid 2 / 16</a:t>
             </a:r>
           </a:p>
         </p:txBody>
@@ -9312,7 +10626,7 @@
             <a:avLst/>
           </a:prstGeom>
           <a:solidFill>
-            <a:srgbClr val="0F172A"/>
+            <a:srgbClr val="0A0F1D"/>
           </a:solidFill>
           <a:ln>
             <a:noFill/>
@@ -9349,13 +10663,13 @@
         <p:spPr>
           <a:xfrm>
             <a:off x="0" y="0"/>
-            <a:ext cx="12191695" cy="1188720"/>
+            <a:ext cx="12191695" cy="1097280"/>
           </a:xfrm>
           <a:prstGeom prst="rect">
             <a:avLst/>
           </a:prstGeom>
           <a:solidFill>
-            <a:srgbClr val="132238"/>
+            <a:srgbClr val="131E36"/>
           </a:solidFill>
           <a:ln>
             <a:noFill/>
@@ -9398,7 +10712,7 @@
             <a:avLst/>
           </a:prstGeom>
           <a:solidFill>
-            <a:srgbClr val="7A1C30"/>
+            <a:srgbClr val="8A1C34"/>
           </a:solidFill>
           <a:ln>
             <a:noFill/>
@@ -9434,14 +10748,14 @@
         </p:nvSpPr>
         <p:spPr>
           <a:xfrm>
-            <a:off x="0" y="1188720"/>
-            <a:ext cx="12191695" cy="45720"/>
+            <a:off x="0" y="1097280"/>
+            <a:ext cx="12191695" cy="36576"/>
           </a:xfrm>
           <a:prstGeom prst="rect">
             <a:avLst/>
           </a:prstGeom>
           <a:solidFill>
-            <a:srgbClr val="C5A880"/>
+            <a:srgbClr val="D4AF37"/>
           </a:solidFill>
           <a:ln>
             <a:noFill/>
@@ -9478,7 +10792,7 @@
         <p:spPr>
           <a:xfrm>
             <a:off x="731520" y="109728"/>
-            <a:ext cx="10698480" cy="1005840"/>
+            <a:ext cx="10728655" cy="914400"/>
           </a:xfrm>
           <a:prstGeom prst="rect">
             <a:avLst/>
@@ -9497,17 +10811,17 @@
               </a:spcAft>
               <a:defRPr sz="1100" b="1">
                 <a:solidFill>
-                  <a:srgbClr val="C5A880"/>
-                </a:solidFill>
-              </a:defRPr>
-            </a:pPr>
-            <a:r>
-              <a:t>SLAID 03  |  MODUL 1: ASAS AI</a:t>
-            </a:r>
-          </a:p>
-          <a:p>
-            <a:pPr>
-              <a:defRPr sz="2100" b="1">
+                  <a:srgbClr val="D4AF37"/>
+                </a:solidFill>
+              </a:defRPr>
+            </a:pPr>
+            <a:r>
+              <a:t>SLAID 03 / 16  •  MODUL 1: ASAS KECERDASAN BUATAN (AI)</a:t>
+            </a:r>
+          </a:p>
+          <a:p>
+            <a:pPr>
+              <a:defRPr sz="2200" b="1">
                 <a:solidFill>
                   <a:srgbClr val="FFFFFF"/>
                 </a:solidFill>
@@ -9526,7 +10840,7 @@
               </a:defRPr>
             </a:pPr>
             <a:r>
-              <a:t>Membezakan Fiksyen Filem vs Realiti Teknologi Sebenar</a:t>
+              <a:t>Membongkar mitos filem sains fiksyen vs aplikasi teknologi dalam kehidupan sebenar</a:t>
             </a:r>
           </a:p>
         </p:txBody>
@@ -9539,18 +10853,18 @@
         </p:nvSpPr>
         <p:spPr>
           <a:xfrm>
-            <a:off x="731520" y="1463040"/>
-            <a:ext cx="5212080" cy="4663440"/>
+            <a:off x="822960" y="1463040"/>
+            <a:ext cx="4754880" cy="3840480"/>
           </a:xfrm>
           <a:prstGeom prst="roundRect">
             <a:avLst/>
           </a:prstGeom>
           <a:solidFill>
-            <a:srgbClr val="1B263B"/>
+            <a:srgbClr val="131E36"/>
           </a:solidFill>
-          <a:ln w="19050">
+          <a:ln w="31750">
             <a:solidFill>
-              <a:srgbClr val="7A1C30"/>
+              <a:srgbClr val="EF4444"/>
             </a:solidFill>
           </a:ln>
         </p:spPr>
@@ -9569,21 +10883,21 @@
           </a:fontRef>
         </p:style>
         <p:txBody>
-          <a:bodyPr rtlCol="0" anchor="ctr" wrap="square" lIns="320040" rIns="320040" tIns="274320"/>
+          <a:bodyPr rtlCol="0" anchor="ctr" wrap="square" lIns="320040" tIns="228600"/>
           <a:lstStyle/>
           <a:p>
             <a:pPr algn="ctr">
               <a:spcAft>
-                <a:spcPts val="1200"/>
+                <a:spcPts val="1000"/>
               </a:spcAft>
-              <a:defRPr sz="1500" b="1">
-                <a:solidFill>
-                  <a:srgbClr val="C5A880"/>
-                </a:solidFill>
-              </a:defRPr>
-            </a:pPr>
-            <a:r>
-              <a:t>POIN &amp; KONSEP UTAMA</a:t>
+              <a:defRPr sz="1600" b="1">
+                <a:solidFill>
+                  <a:srgbClr val="EF4444"/>
+                </a:solidFill>
+              </a:defRPr>
+            </a:pPr>
+            <a:r>
+              <a:t>MITOS FILEM SAINS FIKSYEN</a:t>
             </a:r>
           </a:p>
           <a:p>
@@ -9591,14 +10905,14 @@
               <a:spcAft>
                 <a:spcPts val="800"/>
               </a:spcAft>
-              <a:defRPr sz="1300">
+              <a:defRPr sz="1200">
                 <a:solidFill>
                   <a:srgbClr val="F1F5F9"/>
                 </a:solidFill>
               </a:defRPr>
             </a:pPr>
             <a:r>
-              <a:t>• AI BUKAN robot pemusnah atau magik misteri!</a:t>
+              <a:t>❌ Robot Terminator bersenjata nak kuasai bumi.</a:t>
             </a:r>
           </a:p>
           <a:p>
@@ -9606,14 +10920,14 @@
               <a:spcAft>
                 <a:spcPts val="800"/>
               </a:spcAft>
-              <a:defRPr sz="1300">
+              <a:defRPr sz="1200">
                 <a:solidFill>
                   <a:srgbClr val="F1F5F9"/>
                 </a:solidFill>
               </a:defRPr>
             </a:pPr>
             <a:r>
-              <a:t>• AI ialah algoritma komputer yang belajar daripada ribuan data contoh.</a:t>
+              <a:t>❌ Komputer ada emosi jahat nak musnahkan manusia.</a:t>
             </a:r>
           </a:p>
           <a:p>
@@ -9621,14 +10935,14 @@
               <a:spcAft>
                 <a:spcPts val="800"/>
               </a:spcAft>
-              <a:defRPr sz="1300">
+              <a:defRPr sz="1200">
                 <a:solidFill>
                   <a:srgbClr val="F1F5F9"/>
                 </a:solidFill>
               </a:defRPr>
             </a:pPr>
             <a:r>
-              <a:t>• AI menganalisis corak (patterns) untuk menyelesaikan tugasan manusia.</a:t>
+              <a:t>❌ Teknologi misteri magik yang tiada siapa faham.</a:t>
             </a:r>
           </a:p>
           <a:p>
@@ -9636,38 +10950,38 @@
               <a:spcAft>
                 <a:spcPts val="800"/>
               </a:spcAft>
-              <a:defRPr sz="1300">
+              <a:defRPr sz="1200">
                 <a:solidFill>
                   <a:srgbClr val="F1F5F9"/>
                 </a:solidFill>
               </a:defRPr>
             </a:pPr>
             <a:r>
-              <a:t>• Ia berfungsi sebagai 'Pembantu Pintar' yang mempercepatkan kerja kita.</a:t>
-            </a:r>
-          </a:p>
-        </p:txBody>
-      </p:sp>
-      <p:sp>
-        <p:nvSpPr>
-          <p:cNvPr id="8" name="Rounded Rectangle 7"/>
+              <a:t>❌ Persepsi menakutkan yang sengaja dicipta di pawagam.</a:t>
+            </a:r>
+          </a:p>
+        </p:txBody>
+      </p:sp>
+      <p:sp>
+        <p:nvSpPr>
+          <p:cNvPr id="8" name="Oval 7"/>
           <p:cNvSpPr/>
           <p:nvPr/>
         </p:nvSpPr>
         <p:spPr>
           <a:xfrm>
-            <a:off x="6217920" y="1463040"/>
-            <a:ext cx="5212080" cy="4663440"/>
-          </a:xfrm>
-          <a:prstGeom prst="roundRect">
+            <a:off x="5760720" y="2926080"/>
+            <a:ext cx="731520" cy="731520"/>
+          </a:xfrm>
+          <a:prstGeom prst="ellipse">
             <a:avLst/>
           </a:prstGeom>
           <a:solidFill>
-            <a:srgbClr val="C5A880"/>
+            <a:srgbClr val="D4AF37"/>
           </a:solidFill>
-          <a:ln w="19050">
+          <a:ln w="25400">
             <a:solidFill>
-              <a:srgbClr val="C5A880"/>
+              <a:srgbClr val="FFFFFF"/>
             </a:solidFill>
           </a:ln>
         </p:spPr>
@@ -9686,21 +11000,75 @@
           </a:fontRef>
         </p:style>
         <p:txBody>
-          <a:bodyPr rtlCol="0" anchor="ctr" wrap="square" lIns="320040" rIns="320040" tIns="274320"/>
+          <a:bodyPr rtlCol="0" anchor="ctr"/>
+          <a:lstStyle/>
+          <a:p>
+            <a:pPr algn="ctr">
+              <a:defRPr sz="1800" b="1">
+                <a:solidFill>
+                  <a:srgbClr val="0A0F1D"/>
+                </a:solidFill>
+              </a:defRPr>
+            </a:pPr>
+            <a:r>
+              <a:t>VS</a:t>
+            </a:r>
+          </a:p>
+        </p:txBody>
+      </p:sp>
+      <p:sp>
+        <p:nvSpPr>
+          <p:cNvPr id="9" name="Rounded Rectangle 8"/>
+          <p:cNvSpPr/>
+          <p:nvPr/>
+        </p:nvSpPr>
+        <p:spPr>
+          <a:xfrm>
+            <a:off x="6675120" y="1463040"/>
+            <a:ext cx="4754880" cy="3840480"/>
+          </a:xfrm>
+          <a:prstGeom prst="roundRect">
+            <a:avLst/>
+          </a:prstGeom>
+          <a:solidFill>
+            <a:srgbClr val="131E36"/>
+          </a:solidFill>
+          <a:ln w="31750">
+            <a:solidFill>
+              <a:srgbClr val="10B981"/>
+            </a:solidFill>
+          </a:ln>
+        </p:spPr>
+        <p:style>
+          <a:lnRef idx="1">
+            <a:schemeClr val="accent1"/>
+          </a:lnRef>
+          <a:fillRef idx="3">
+            <a:schemeClr val="accent1"/>
+          </a:fillRef>
+          <a:effectRef idx="2">
+            <a:schemeClr val="accent1"/>
+          </a:effectRef>
+          <a:fontRef idx="minor">
+            <a:schemeClr val="lt1"/>
+          </a:fontRef>
+        </p:style>
+        <p:txBody>
+          <a:bodyPr rtlCol="0" anchor="ctr" wrap="square" lIns="320040" tIns="228600"/>
           <a:lstStyle/>
           <a:p>
             <a:pPr algn="ctr">
               <a:spcAft>
-                <a:spcPts val="1200"/>
+                <a:spcPts val="1000"/>
               </a:spcAft>
-              <a:defRPr sz="1500" b="1">
-                <a:solidFill>
-                  <a:srgbClr val="DFBA8E"/>
-                </a:solidFill>
-              </a:defRPr>
-            </a:pPr>
-            <a:r>
-              <a:t>CONTOH AI DI SEKELILING KITA</a:t>
+              <a:defRPr sz="1600" b="1">
+                <a:solidFill>
+                  <a:srgbClr val="10B981"/>
+                </a:solidFill>
+              </a:defRPr>
+            </a:pPr>
+            <a:r>
+              <a:t>REALITI SEBENAR AI HARI INI</a:t>
             </a:r>
           </a:p>
           <a:p>
@@ -9708,14 +11076,14 @@
               <a:spcAft>
                 <a:spcPts val="800"/>
               </a:spcAft>
-              <a:defRPr sz="1250">
+              <a:defRPr sz="1200">
                 <a:solidFill>
                   <a:srgbClr val="F1F5F9"/>
                 </a:solidFill>
               </a:defRPr>
             </a:pPr>
             <a:r>
-              <a:t>✔ Google Maps / Waze: Mengira laluan terpantas elak kesesakan jalan.</a:t>
+              <a:t>✔ Google Maps / Waze: Kira jalan terpantas elak jam.</a:t>
             </a:r>
           </a:p>
           <a:p>
@@ -9723,14 +11091,14 @@
               <a:spcAft>
                 <a:spcPts val="800"/>
               </a:spcAft>
-              <a:defRPr sz="1250">
+              <a:defRPr sz="1200">
                 <a:solidFill>
                   <a:srgbClr val="F1F5F9"/>
                 </a:solidFill>
               </a:defRPr>
             </a:pPr>
             <a:r>
-              <a:t>✔ YouTube / TikTok: Mencadangkan video mengikut minat tontonan anda.</a:t>
+              <a:t>✔ TikTok &amp; YouTube: Cadang video ikut minat korang.</a:t>
             </a:r>
           </a:p>
           <a:p>
@@ -9738,14 +11106,14 @@
               <a:spcAft>
                 <a:spcPts val="800"/>
               </a:spcAft>
-              <a:defRPr sz="1250">
+              <a:defRPr sz="1200">
                 <a:solidFill>
                   <a:srgbClr val="F1F5F9"/>
                 </a:solidFill>
               </a:defRPr>
             </a:pPr>
             <a:r>
-              <a:t>✔ Pengecaman Wajah (Face Unlock): Membuka kunci telefon dengan selamat.</a:t>
+              <a:t>✔ Pengecaman Wajah: Buka skrin telefon guna muka.</a:t>
             </a:r>
           </a:p>
           <a:p>
@@ -9753,28 +11121,80 @@
               <a:spcAft>
                 <a:spcPts val="800"/>
               </a:spcAft>
-              <a:defRPr sz="1250">
+              <a:defRPr sz="1200">
                 <a:solidFill>
                   <a:srgbClr val="F1F5F9"/>
                 </a:solidFill>
               </a:defRPr>
             </a:pPr>
             <a:r>
-              <a:t>✔ Carian Google: Memahami maksud soalan walaupun tersilap ejaan.</a:t>
-            </a:r>
-          </a:p>
-        </p:txBody>
-      </p:sp>
-      <p:sp>
-        <p:nvSpPr>
-          <p:cNvPr id="9" name="TextBox 8"/>
+              <a:t>✔ Program Matematik yang belajar mengecam corak data manusia untuk mudahkan kerja!</a:t>
+            </a:r>
+          </a:p>
+        </p:txBody>
+      </p:sp>
+      <p:sp>
+        <p:nvSpPr>
+          <p:cNvPr id="10" name="Rounded Rectangle 9"/>
+          <p:cNvSpPr/>
+          <p:nvPr/>
+        </p:nvSpPr>
+        <p:spPr>
+          <a:xfrm>
+            <a:off x="822960" y="5486400"/>
+            <a:ext cx="10607040" cy="640080"/>
+          </a:xfrm>
+          <a:prstGeom prst="roundRect">
+            <a:avLst/>
+          </a:prstGeom>
+          <a:solidFill>
+            <a:srgbClr val="1C2B4B"/>
+          </a:solidFill>
+          <a:ln>
+            <a:noFill/>
+          </a:ln>
+        </p:spPr>
+        <p:style>
+          <a:lnRef idx="1">
+            <a:schemeClr val="accent1"/>
+          </a:lnRef>
+          <a:fillRef idx="3">
+            <a:schemeClr val="accent1"/>
+          </a:fillRef>
+          <a:effectRef idx="2">
+            <a:schemeClr val="accent1"/>
+          </a:effectRef>
+          <a:fontRef idx="minor">
+            <a:schemeClr val="lt1"/>
+          </a:fontRef>
+        </p:style>
+        <p:txBody>
+          <a:bodyPr rtlCol="0" anchor="ctr" wrap="square"/>
+          <a:lstStyle/>
+          <a:p>
+            <a:pPr algn="ctr">
+              <a:defRPr sz="1150" b="1">
+                <a:solidFill>
+                  <a:srgbClr val="D4AF37"/>
+                </a:solidFill>
+              </a:defRPr>
+            </a:pPr>
+            <a:r>
+              <a:t>🗣️ SOALAN AUDIENS: 'Siapa pernah guna Waze atau tengok cadangan video YouTube? Itulah bukti korang dah guna AI setiap hari!'</a:t>
+            </a:r>
+          </a:p>
+        </p:txBody>
+      </p:sp>
+      <p:sp>
+        <p:nvSpPr>
+          <p:cNvPr id="11" name="TextBox 10"/>
           <p:cNvSpPr txBox="1"/>
           <p:nvPr/>
         </p:nvSpPr>
         <p:spPr>
           <a:xfrm>
-            <a:off x="731520" y="6263640"/>
-            <a:ext cx="10698480" cy="411480"/>
+            <a:off x="731520" y="6309360"/>
+            <a:ext cx="10728655" cy="365760"/>
           </a:xfrm>
           <a:prstGeom prst="rect">
             <a:avLst/>
@@ -9795,7 +11215,7 @@
               </a:defRPr>
             </a:pPr>
             <a:r>
-              <a:t>NextGen Celik Digital 2026  •  UTM KL x ASDAF PERKIM  •  Sabtu, 12 September 2026                                                                    Slaid 3 / 16</a:t>
+              <a:t>Bengkel Santai NextGen Celik Digital 2026  |  UTM KL × ASDAF PERKIM                                             Slaid 3 / 16</a:t>
             </a:r>
           </a:p>
         </p:txBody>
@@ -9833,7 +11253,7 @@
             <a:avLst/>
           </a:prstGeom>
           <a:solidFill>
-            <a:srgbClr val="0F172A"/>
+            <a:srgbClr val="0A0F1D"/>
           </a:solidFill>
           <a:ln>
             <a:noFill/>
@@ -9870,13 +11290,13 @@
         <p:spPr>
           <a:xfrm>
             <a:off x="0" y="0"/>
-            <a:ext cx="12191695" cy="1188720"/>
+            <a:ext cx="12191695" cy="1097280"/>
           </a:xfrm>
           <a:prstGeom prst="rect">
             <a:avLst/>
           </a:prstGeom>
           <a:solidFill>
-            <a:srgbClr val="132238"/>
+            <a:srgbClr val="131E36"/>
           </a:solidFill>
           <a:ln>
             <a:noFill/>
@@ -9919,7 +11339,7 @@
             <a:avLst/>
           </a:prstGeom>
           <a:solidFill>
-            <a:srgbClr val="7A1C30"/>
+            <a:srgbClr val="8A1C34"/>
           </a:solidFill>
           <a:ln>
             <a:noFill/>
@@ -9955,14 +11375,14 @@
         </p:nvSpPr>
         <p:spPr>
           <a:xfrm>
-            <a:off x="0" y="1188720"/>
-            <a:ext cx="12191695" cy="45720"/>
+            <a:off x="0" y="1097280"/>
+            <a:ext cx="12191695" cy="36576"/>
           </a:xfrm>
           <a:prstGeom prst="rect">
             <a:avLst/>
           </a:prstGeom>
           <a:solidFill>
-            <a:srgbClr val="C5A880"/>
+            <a:srgbClr val="D4AF37"/>
           </a:solidFill>
           <a:ln>
             <a:noFill/>
@@ -9999,7 +11419,7 @@
         <p:spPr>
           <a:xfrm>
             <a:off x="731520" y="109728"/>
-            <a:ext cx="10698480" cy="1005840"/>
+            <a:ext cx="10728655" cy="914400"/>
           </a:xfrm>
           <a:prstGeom prst="rect">
             <a:avLst/>
@@ -10018,24 +11438,24 @@
               </a:spcAft>
               <a:defRPr sz="1100" b="1">
                 <a:solidFill>
-                  <a:srgbClr val="C5A880"/>
-                </a:solidFill>
-              </a:defRPr>
-            </a:pPr>
-            <a:r>
-              <a:t>SLAID 04  |  MODUL 1: BAGAIMANA AI BERFIKIR</a:t>
-            </a:r>
-          </a:p>
-          <a:p>
-            <a:pPr>
-              <a:defRPr sz="2100" b="1">
+                  <a:srgbClr val="D4AF37"/>
+                </a:solidFill>
+              </a:defRPr>
+            </a:pPr>
+            <a:r>
+              <a:t>SLAID 04 / 16  •  MODUL 1: BAGAIMANA AI BERFIKIR</a:t>
+            </a:r>
+          </a:p>
+          <a:p>
+            <a:pPr>
+              <a:defRPr sz="2200" b="1">
                 <a:solidFill>
                   <a:srgbClr val="FFFFFF"/>
                 </a:solidFill>
               </a:defRPr>
             </a:pPr>
             <a:r>
-              <a:t>Bagaimana AI Berfikir? Ujian Mata AI: Kucing vs Anjing</a:t>
+              <a:t>Ujian Minda AI: Komputer vs Mata Manusia (Kucing vs Chihuahua Muffin)</a:t>
             </a:r>
           </a:p>
           <a:p>
@@ -10047,7 +11467,7 @@
               </a:defRPr>
             </a:pPr>
             <a:r>
-              <a:t>Kecerdasan Mesin: Pembelajaran Melalui Data &amp; Corak</a:t>
+              <a:t>Bagaimana algoritma mengenali objek dan kenapa komputer boleh tertipu?</a:t>
             </a:r>
           </a:p>
         </p:txBody>
@@ -10060,18 +11480,18 @@
         </p:nvSpPr>
         <p:spPr>
           <a:xfrm>
-            <a:off x="731520" y="1463040"/>
-            <a:ext cx="5212080" cy="4663440"/>
+            <a:off x="822960" y="1463040"/>
+            <a:ext cx="3291840" cy="3840480"/>
           </a:xfrm>
           <a:prstGeom prst="roundRect">
             <a:avLst/>
           </a:prstGeom>
           <a:solidFill>
-            <a:srgbClr val="1B263B"/>
+            <a:srgbClr val="131E36"/>
           </a:solidFill>
-          <a:ln w="19050">
+          <a:ln w="25400">
             <a:solidFill>
-              <a:srgbClr val="7A1C30"/>
+              <a:srgbClr val="0EA5E9"/>
             </a:solidFill>
           </a:ln>
         </p:spPr>
@@ -10090,96 +11510,66 @@
           </a:fontRef>
         </p:style>
         <p:txBody>
-          <a:bodyPr rtlCol="0" anchor="ctr" wrap="square" lIns="320040" rIns="320040" tIns="274320"/>
+          <a:bodyPr rtlCol="0" anchor="ctr" wrap="square" lIns="228600" tIns="228600"/>
           <a:lstStyle/>
           <a:p>
             <a:pPr algn="ctr">
-              <a:spcAft>
-                <a:spcPts val="1200"/>
-              </a:spcAft>
-              <a:defRPr sz="1500" b="1">
-                <a:solidFill>
-                  <a:srgbClr val="C5A880"/>
-                </a:solidFill>
-              </a:defRPr>
-            </a:pPr>
-            <a:r>
-              <a:t>POIN &amp; KONSEP UTAMA</a:t>
-            </a:r>
-          </a:p>
-          <a:p>
-            <a:pPr>
               <a:spcAft>
                 <a:spcPts val="800"/>
               </a:spcAft>
-              <a:defRPr sz="1300">
+              <a:defRPr sz="1300" b="1">
+                <a:solidFill>
+                  <a:srgbClr val="0EA5E9"/>
+                </a:solidFill>
+              </a:defRPr>
+            </a:pPr>
+            <a:r>
+              <a:t>LANGKAH 1: DATA MASUK</a:t>
+            </a:r>
+          </a:p>
+          <a:p>
+            <a:pPr>
+              <a:spcAft>
+                <a:spcPts val="600"/>
+              </a:spcAft>
+              <a:defRPr sz="1150">
                 <a:solidFill>
                   <a:srgbClr val="F1F5F9"/>
                 </a:solidFill>
               </a:defRPr>
             </a:pPr>
             <a:r>
-              <a:t>• Komputer tidak melihat gambar seperti mata manusia.</a:t>
+              <a:t>• Komputer tak ada mata biologi macam manusia.</a:t>
             </a:r>
           </a:p>
           <a:p>
             <a:pPr>
               <a:spcAft>
-                <a:spcPts val="800"/>
+                <a:spcPts val="600"/>
               </a:spcAft>
-              <a:defRPr sz="1300">
+              <a:defRPr sz="1150">
                 <a:solidFill>
                   <a:srgbClr val="F1F5F9"/>
                 </a:solidFill>
               </a:defRPr>
             </a:pPr>
             <a:r>
-              <a:t>• Komputer menukar gambar menjadi jutaan nombor piksel.</a:t>
+              <a:t>• Komputer cuma nampak nombor piksel (0 dan 1).</a:t>
             </a:r>
           </a:p>
           <a:p>
             <a:pPr>
               <a:spcAft>
-                <a:spcPts val="800"/>
+                <a:spcPts val="600"/>
               </a:spcAft>
-              <a:defRPr sz="1300">
+              <a:defRPr sz="1150">
                 <a:solidFill>
                   <a:srgbClr val="F1F5F9"/>
                 </a:solidFill>
               </a:defRPr>
             </a:pPr>
             <a:r>
-              <a:t>• Melalui 10,000+ contoh gambar kucing vs anjing, AI belajar:</a:t>
-            </a:r>
-          </a:p>
-          <a:p>
-            <a:pPr>
-              <a:spcAft>
-                <a:spcPts val="800"/>
-              </a:spcAft>
-              <a:defRPr sz="1300">
-                <a:solidFill>
-                  <a:srgbClr val="F1F5F9"/>
-                </a:solidFill>
-              </a:defRPr>
-            </a:pPr>
-            <a:r>
-              <a:t>•   - Bentuk telinga tajam vs telinga labuh</a:t>
-            </a:r>
-          </a:p>
-          <a:p>
-            <a:pPr>
-              <a:spcAft>
-                <a:spcPts val="800"/>
-              </a:spcAft>
-              <a:defRPr sz="1300">
-                <a:solidFill>
-                  <a:srgbClr val="F1F5F9"/>
-                </a:solidFill>
-              </a:defRPr>
-            </a:pPr>
-            <a:r>
-              <a:t>•   - Corak misai, hidung, dan tekstur bulu</a:t>
+              <a:t>• Ia disuap dengan 10,000+ contoh gambar kucing.</a:t>
             </a:r>
           </a:p>
         </p:txBody>
@@ -10192,18 +11582,18 @@
         </p:nvSpPr>
         <p:spPr>
           <a:xfrm>
-            <a:off x="6217920" y="1463040"/>
-            <a:ext cx="5212080" cy="4663440"/>
+            <a:off x="4389120" y="1463040"/>
+            <a:ext cx="3291840" cy="3840480"/>
           </a:xfrm>
           <a:prstGeom prst="roundRect">
             <a:avLst/>
           </a:prstGeom>
           <a:solidFill>
-            <a:srgbClr val="C5A880"/>
+            <a:srgbClr val="131E36"/>
           </a:solidFill>
-          <a:ln w="19050">
+          <a:ln w="25400">
             <a:solidFill>
-              <a:srgbClr val="C5A880"/>
+              <a:srgbClr val="D4AF37"/>
             </a:solidFill>
           </a:ln>
         </p:spPr>
@@ -10222,95 +11612,279 @@
           </a:fontRef>
         </p:style>
         <p:txBody>
-          <a:bodyPr rtlCol="0" anchor="ctr" wrap="square" lIns="320040" rIns="320040" tIns="274320"/>
+          <a:bodyPr rtlCol="0" anchor="ctr" wrap="square" lIns="228600" tIns="228600"/>
           <a:lstStyle/>
           <a:p>
             <a:pPr algn="ctr">
-              <a:spcAft>
-                <a:spcPts val="1200"/>
-              </a:spcAft>
-              <a:defRPr sz="1500" b="1">
-                <a:solidFill>
-                  <a:srgbClr val="DFBA8E"/>
-                </a:solidFill>
-              </a:defRPr>
-            </a:pPr>
-            <a:r>
-              <a:t>UJIAN MINDA DEWAN: KUCING VS ANJING MUFFIN</a:t>
-            </a:r>
-          </a:p>
-          <a:p>
-            <a:pPr>
               <a:spcAft>
                 <a:spcPts val="800"/>
               </a:spcAft>
-              <a:defRPr sz="1250">
+              <a:defRPr sz="1300" b="1">
+                <a:solidFill>
+                  <a:srgbClr val="D4AF37"/>
+                </a:solidFill>
+              </a:defRPr>
+            </a:pPr>
+            <a:r>
+              <a:t>LANGKAH 2: CARI CORAK</a:t>
+            </a:r>
+          </a:p>
+          <a:p>
+            <a:pPr>
+              <a:spcAft>
+                <a:spcPts val="600"/>
+              </a:spcAft>
+              <a:defRPr sz="1150">
                 <a:solidFill>
                   <a:srgbClr val="F1F5F9"/>
                 </a:solidFill>
               </a:defRPr>
             </a:pPr>
             <a:r>
-              <a:t>✔ Bolehkah komputer keliru antara muffin coklat dan muka anjing chihuahua?</a:t>
-            </a:r>
-          </a:p>
-          <a:p>
-            <a:pPr>
+              <a:t>• AI menganalisis corak:</a:t>
+            </a:r>
+          </a:p>
+          <a:p>
+            <a:pPr>
+              <a:spcAft>
+                <a:spcPts val="600"/>
+              </a:spcAft>
+              <a:defRPr sz="1150">
+                <a:solidFill>
+                  <a:srgbClr val="F1F5F9"/>
+                </a:solidFill>
+              </a:defRPr>
+            </a:pPr>
+            <a:r>
+              <a:t>•   - Bentuk telinga tiga segi</a:t>
+            </a:r>
+          </a:p>
+          <a:p>
+            <a:pPr>
+              <a:spcAft>
+                <a:spcPts val="600"/>
+              </a:spcAft>
+              <a:defRPr sz="1150">
+                <a:solidFill>
+                  <a:srgbClr val="F1F5F9"/>
+                </a:solidFill>
+              </a:defRPr>
+            </a:pPr>
+            <a:r>
+              <a:t>•   - Misai panjang kiri kanan</a:t>
+            </a:r>
+          </a:p>
+          <a:p>
+            <a:pPr>
+              <a:spcAft>
+                <a:spcPts val="600"/>
+              </a:spcAft>
+              <a:defRPr sz="1150">
+                <a:solidFill>
+                  <a:srgbClr val="F1F5F9"/>
+                </a:solidFill>
+              </a:defRPr>
+            </a:pPr>
+            <a:r>
+              <a:t>•   - Warna mata dan hidung</a:t>
+            </a:r>
+          </a:p>
+          <a:p>
+            <a:pPr>
+              <a:spcAft>
+                <a:spcPts val="600"/>
+              </a:spcAft>
+              <a:defRPr sz="1150">
+                <a:solidFill>
+                  <a:srgbClr val="F1F5F9"/>
+                </a:solidFill>
+              </a:defRPr>
+            </a:pPr>
+            <a:r>
+              <a:t>• Daripada corak itu, ia bina 'Formula Tekaan'.</a:t>
+            </a:r>
+          </a:p>
+        </p:txBody>
+      </p:sp>
+      <p:sp>
+        <p:nvSpPr>
+          <p:cNvPr id="9" name="Rounded Rectangle 8"/>
+          <p:cNvSpPr/>
+          <p:nvPr/>
+        </p:nvSpPr>
+        <p:spPr>
+          <a:xfrm>
+            <a:off x="7955279" y="1463040"/>
+            <a:ext cx="3383280" cy="3840480"/>
+          </a:xfrm>
+          <a:prstGeom prst="roundRect">
+            <a:avLst/>
+          </a:prstGeom>
+          <a:solidFill>
+            <a:srgbClr val="131E36"/>
+          </a:solidFill>
+          <a:ln w="25400">
+            <a:solidFill>
+              <a:srgbClr val="F59E0B"/>
+            </a:solidFill>
+          </a:ln>
+        </p:spPr>
+        <p:style>
+          <a:lnRef idx="1">
+            <a:schemeClr val="accent1"/>
+          </a:lnRef>
+          <a:fillRef idx="3">
+            <a:schemeClr val="accent1"/>
+          </a:fillRef>
+          <a:effectRef idx="2">
+            <a:schemeClr val="accent1"/>
+          </a:effectRef>
+          <a:fontRef idx="minor">
+            <a:schemeClr val="lt1"/>
+          </a:fontRef>
+        </p:style>
+        <p:txBody>
+          <a:bodyPr rtlCol="0" anchor="ctr" wrap="square" lIns="228600" tIns="228600"/>
+          <a:lstStyle/>
+          <a:p>
+            <a:pPr algn="ctr">
               <a:spcAft>
                 <a:spcPts val="800"/>
               </a:spcAft>
-              <a:defRPr sz="1250">
+              <a:defRPr sz="1300" b="1">
+                <a:solidFill>
+                  <a:srgbClr val="F59E0B"/>
+                </a:solidFill>
+              </a:defRPr>
+            </a:pPr>
+            <a:r>
+              <a:t>LANGKAH 3: AI BOLEH KELIRU!</a:t>
+            </a:r>
+          </a:p>
+          <a:p>
+            <a:pPr>
+              <a:spcAft>
+                <a:spcPts val="600"/>
+              </a:spcAft>
+              <a:defRPr sz="1150">
                 <a:solidFill>
                   <a:srgbClr val="F1F5F9"/>
                 </a:solidFill>
               </a:defRPr>
             </a:pPr>
             <a:r>
-              <a:t>✔ Ya! Komputer perlukan latihan data yang tepat dan banyak.</a:t>
+              <a:t>• Ujian Klasik Muffin vs Chihuahua:</a:t>
             </a:r>
           </a:p>
           <a:p>
             <a:pPr>
               <a:spcAft>
-                <a:spcPts val="800"/>
+                <a:spcPts val="600"/>
               </a:spcAft>
-              <a:defRPr sz="1250">
+              <a:defRPr sz="1150">
                 <a:solidFill>
                   <a:srgbClr val="F1F5F9"/>
                 </a:solidFill>
               </a:defRPr>
             </a:pPr>
             <a:r>
-              <a:t>✔ Kelebihan Manusia: Kita mempunyai akal, logik, dan empati semula jadi.</a:t>
+              <a:t>• Muffin ada 3 titik coklat (nampak macam 2 mata &amp; 1 hidung anjing!).</a:t>
             </a:r>
           </a:p>
           <a:p>
             <a:pPr>
               <a:spcAft>
-                <a:spcPts val="800"/>
+                <a:spcPts val="600"/>
               </a:spcAft>
-              <a:defRPr sz="1250">
+              <a:defRPr sz="1150">
                 <a:solidFill>
                   <a:srgbClr val="F1F5F9"/>
                 </a:solidFill>
               </a:defRPr>
             </a:pPr>
             <a:r>
-              <a:t>✔ AI hebat memproses nombor, tetapi manusia yang memberi arahan bijak!</a:t>
-            </a:r>
-          </a:p>
-        </p:txBody>
-      </p:sp>
-      <p:sp>
-        <p:nvSpPr>
-          <p:cNvPr id="9" name="TextBox 8"/>
+              <a:t>• Komputer boleh keliru 50%!</a:t>
+            </a:r>
+          </a:p>
+          <a:p>
+            <a:pPr>
+              <a:spcAft>
+                <a:spcPts val="600"/>
+              </a:spcAft>
+              <a:defRPr sz="1150">
+                <a:solidFill>
+                  <a:srgbClr val="F1F5F9"/>
+                </a:solidFill>
+              </a:defRPr>
+            </a:pPr>
+            <a:r>
+              <a:t>• Kelebihan Manusia: Kita ada akal fikiran dan konteks sebenar.</a:t>
+            </a:r>
+          </a:p>
+        </p:txBody>
+      </p:sp>
+      <p:sp>
+        <p:nvSpPr>
+          <p:cNvPr id="10" name="Rounded Rectangle 9"/>
+          <p:cNvSpPr/>
+          <p:nvPr/>
+        </p:nvSpPr>
+        <p:spPr>
+          <a:xfrm>
+            <a:off x="822960" y="5486400"/>
+            <a:ext cx="10515600" cy="640080"/>
+          </a:xfrm>
+          <a:prstGeom prst="roundRect">
+            <a:avLst/>
+          </a:prstGeom>
+          <a:solidFill>
+            <a:srgbClr val="8A1C34"/>
+          </a:solidFill>
+          <a:ln>
+            <a:noFill/>
+          </a:ln>
+        </p:spPr>
+        <p:style>
+          <a:lnRef idx="1">
+            <a:schemeClr val="accent1"/>
+          </a:lnRef>
+          <a:fillRef idx="3">
+            <a:schemeClr val="accent1"/>
+          </a:fillRef>
+          <a:effectRef idx="2">
+            <a:schemeClr val="accent1"/>
+          </a:effectRef>
+          <a:fontRef idx="minor">
+            <a:schemeClr val="lt1"/>
+          </a:fontRef>
+        </p:style>
+        <p:txBody>
+          <a:bodyPr rtlCol="0" anchor="ctr" wrap="square"/>
+          <a:lstStyle/>
+          <a:p>
+            <a:pPr algn="ctr">
+              <a:defRPr sz="1200" b="1">
+                <a:solidFill>
+                  <a:srgbClr val="FFFFFF"/>
+                </a:solidFill>
+              </a:defRPr>
+            </a:pPr>
+            <a:r>
+              <a:t>🎯 PUNCHLINE: AI sangat laju mengira nombor, tapi manusia jauh lebih hebat berfikir dan memahami dunia!</a:t>
+            </a:r>
+          </a:p>
+        </p:txBody>
+      </p:sp>
+      <p:sp>
+        <p:nvSpPr>
+          <p:cNvPr id="11" name="TextBox 10"/>
           <p:cNvSpPr txBox="1"/>
           <p:nvPr/>
         </p:nvSpPr>
         <p:spPr>
           <a:xfrm>
-            <a:off x="731520" y="6263640"/>
-            <a:ext cx="10698480" cy="411480"/>
+            <a:off x="731520" y="6309360"/>
+            <a:ext cx="10728655" cy="365760"/>
           </a:xfrm>
           <a:prstGeom prst="rect">
             <a:avLst/>
@@ -10331,7 +11905,7 @@
               </a:defRPr>
             </a:pPr>
             <a:r>
-              <a:t>NextGen Celik Digital 2026  •  UTM KL x ASDAF PERKIM  •  Sabtu, 12 September 2026                                                                    Slaid 4 / 16</a:t>
+              <a:t>Bengkel Santai NextGen Celik Digital 2026  |  UTM KL × ASDAF PERKIM                                             Slaid 4 / 16</a:t>
             </a:r>
           </a:p>
         </p:txBody>
@@ -10369,7 +11943,7 @@
             <a:avLst/>
           </a:prstGeom>
           <a:solidFill>
-            <a:srgbClr val="0F172A"/>
+            <a:srgbClr val="0A0F1D"/>
           </a:solidFill>
           <a:ln>
             <a:noFill/>
@@ -10406,13 +11980,13 @@
         <p:spPr>
           <a:xfrm>
             <a:off x="0" y="0"/>
-            <a:ext cx="12191695" cy="1188720"/>
+            <a:ext cx="12191695" cy="1097280"/>
           </a:xfrm>
           <a:prstGeom prst="rect">
             <a:avLst/>
           </a:prstGeom>
           <a:solidFill>
-            <a:srgbClr val="132238"/>
+            <a:srgbClr val="131E36"/>
           </a:solidFill>
           <a:ln>
             <a:noFill/>
@@ -10455,7 +12029,7 @@
             <a:avLst/>
           </a:prstGeom>
           <a:solidFill>
-            <a:srgbClr val="7A1C30"/>
+            <a:srgbClr val="8A1C34"/>
           </a:solidFill>
           <a:ln>
             <a:noFill/>
@@ -10491,14 +12065,14 @@
         </p:nvSpPr>
         <p:spPr>
           <a:xfrm>
-            <a:off x="0" y="1188720"/>
-            <a:ext cx="12191695" cy="45720"/>
+            <a:off x="0" y="1097280"/>
+            <a:ext cx="12191695" cy="36576"/>
           </a:xfrm>
           <a:prstGeom prst="rect">
             <a:avLst/>
           </a:prstGeom>
           <a:solidFill>
-            <a:srgbClr val="C5A880"/>
+            <a:srgbClr val="D4AF37"/>
           </a:solidFill>
           <a:ln>
             <a:noFill/>
@@ -10535,7 +12109,7 @@
         <p:spPr>
           <a:xfrm>
             <a:off x="731520" y="109728"/>
-            <a:ext cx="10698480" cy="1005840"/>
+            <a:ext cx="10728655" cy="914400"/>
           </a:xfrm>
           <a:prstGeom prst="rect">
             <a:avLst/>
@@ -10554,24 +12128,24 @@
               </a:spcAft>
               <a:defRPr sz="1100" b="1">
                 <a:solidFill>
-                  <a:srgbClr val="C5A880"/>
-                </a:solidFill>
-              </a:defRPr>
-            </a:pPr>
-            <a:r>
-              <a:t>SLAID 05  |  MODUL 1: DEMO LANGSUNG AI</a:t>
-            </a:r>
-          </a:p>
-          <a:p>
-            <a:pPr>
-              <a:defRPr sz="2100" b="1">
+                  <a:srgbClr val="D4AF37"/>
+                </a:solidFill>
+              </a:defRPr>
+            </a:pPr>
+            <a:r>
+              <a:t>SLAID 05 / 16  •  MODUL 1: DEMONSTRASI LANGSUNG AI</a:t>
+            </a:r>
+          </a:p>
+          <a:p>
+            <a:pPr>
+              <a:defRPr sz="2200" b="1">
                 <a:solidFill>
                   <a:srgbClr val="FFFFFF"/>
                 </a:solidFill>
               </a:defRPr>
             </a:pPr>
             <a:r>
-              <a:t>Demonstrasi Langsung 1: Mengarang Cerita &amp; Pantun Bersama AI</a:t>
+              <a:t>Eksperimen Dewan: Mengarang Pantun Bersama ChatGPT / Gemini</a:t>
             </a:r>
           </a:p>
           <a:p>
@@ -10583,7 +12157,7 @@
               </a:defRPr>
             </a:pPr>
             <a:r>
-              <a:t>Demonstrasi ChatGPT / Gemini Menjana Kreativiti Bahasa</a:t>
+              <a:t>Melihat bagaimana AI memahami arahan bahasa Melayu dalam masa nyata (Live Demo)</a:t>
             </a:r>
           </a:p>
         </p:txBody>
@@ -10596,18 +12170,18 @@
         </p:nvSpPr>
         <p:spPr>
           <a:xfrm>
-            <a:off x="731520" y="1463040"/>
-            <a:ext cx="5212080" cy="4663440"/>
+            <a:off x="822960" y="1463040"/>
+            <a:ext cx="10515600" cy="1188720"/>
           </a:xfrm>
           <a:prstGeom prst="roundRect">
             <a:avLst/>
           </a:prstGeom>
           <a:solidFill>
-            <a:srgbClr val="1B263B"/>
+            <a:srgbClr val="1C2B4B"/>
           </a:solidFill>
-          <a:ln w="19050">
+          <a:ln w="25400">
             <a:solidFill>
-              <a:srgbClr val="7A1C30"/>
+              <a:srgbClr val="10B981"/>
             </a:solidFill>
           </a:ln>
         </p:spPr>
@@ -10626,81 +12200,30 @@
           </a:fontRef>
         </p:style>
         <p:txBody>
-          <a:bodyPr rtlCol="0" anchor="ctr" wrap="square" lIns="320040" rIns="320040" tIns="274320"/>
+          <a:bodyPr rtlCol="0" anchor="ctr" wrap="square" lIns="274320" tIns="137160"/>
           <a:lstStyle/>
           <a:p>
             <a:pPr algn="ctr">
-              <a:spcAft>
-                <a:spcPts val="1200"/>
-              </a:spcAft>
-              <a:defRPr sz="1500" b="1">
-                <a:solidFill>
-                  <a:srgbClr val="C5A880"/>
-                </a:solidFill>
-              </a:defRPr>
-            </a:pPr>
-            <a:r>
-              <a:t>POIN &amp; KONSEP UTAMA</a:t>
-            </a:r>
-          </a:p>
-          <a:p>
-            <a:pPr>
-              <a:spcAft>
-                <a:spcPts val="800"/>
-              </a:spcAft>
-              <a:defRPr sz="1300">
-                <a:solidFill>
-                  <a:srgbClr val="F1F5F9"/>
-                </a:solidFill>
-              </a:defRPr>
-            </a:pPr>
-            <a:r>
-              <a:t>• AI Generatif Bahasa: Memahami ayat dan membina respon bermakna.</a:t>
-            </a:r>
-          </a:p>
-          <a:p>
-            <a:pPr>
-              <a:spcAft>
-                <a:spcPts val="800"/>
-              </a:spcAft>
-              <a:defRPr sz="1300">
-                <a:solidFill>
-                  <a:srgbClr val="F1F5F9"/>
-                </a:solidFill>
-              </a:defRPr>
-            </a:pPr>
-            <a:r>
-              <a:t>• Eksperimen Dewan: Menjana Pantun Empat Kerat spontan di layar!</a:t>
-            </a:r>
-          </a:p>
-          <a:p>
-            <a:pPr>
-              <a:spcAft>
-                <a:spcPts val="800"/>
-              </a:spcAft>
-              <a:defRPr sz="1300">
-                <a:solidFill>
-                  <a:srgbClr val="F1F5F9"/>
-                </a:solidFill>
-              </a:defRPr>
-            </a:pPr>
-            <a:r>
-              <a:t>• Prompt Interaktif: 'Tulis pantun semangat anak ASDAF Bukit Persekutuan'.</a:t>
-            </a:r>
-          </a:p>
-          <a:p>
-            <a:pPr>
-              <a:spcAft>
-                <a:spcPts val="800"/>
-              </a:spcAft>
-              <a:defRPr sz="1300">
-                <a:solidFill>
-                  <a:srgbClr val="F1F5F9"/>
-                </a:solidFill>
-              </a:defRPr>
-            </a:pPr>
-            <a:r>
-              <a:t>• Keajaiban Prompting: Ketepatan hasil bergantung kepada arahan kita.</a:t>
+              <a:defRPr sz="1100" b="1">
+                <a:solidFill>
+                  <a:srgbClr val="10B981"/>
+                </a:solidFill>
+              </a:defRPr>
+            </a:pPr>
+            <a:r>
+              <a:t>👤 PROMPT PELAJAR (ARAHAN KEPADA AI):</a:t>
+            </a:r>
+          </a:p>
+          <a:p>
+            <a:pPr>
+              <a:defRPr sz="1300" b="1">
+                <a:solidFill>
+                  <a:srgbClr val="FFFFFF"/>
+                </a:solidFill>
+              </a:defRPr>
+            </a:pPr>
+            <a:r>
+              <a:t>“Wahai AI, tolong tuliskan 2 rangkap pantun 4 kerat bertemakan semangat anak-anak asrama ASDAF Bukit Persekutuan menuntut ilmu dan celik teknologi!”</a:t>
             </a:r>
           </a:p>
         </p:txBody>
@@ -10713,18 +12236,18 @@
         </p:nvSpPr>
         <p:spPr>
           <a:xfrm>
-            <a:off x="6217920" y="1463040"/>
-            <a:ext cx="5212080" cy="4663440"/>
+            <a:off x="822960" y="2834640"/>
+            <a:ext cx="10515600" cy="2468880"/>
           </a:xfrm>
           <a:prstGeom prst="roundRect">
             <a:avLst/>
           </a:prstGeom>
           <a:solidFill>
-            <a:srgbClr val="C5A880"/>
+            <a:srgbClr val="131E36"/>
           </a:solidFill>
-          <a:ln w="19050">
+          <a:ln w="25400">
             <a:solidFill>
-              <a:srgbClr val="C5A880"/>
+              <a:srgbClr val="D4AF37"/>
             </a:solidFill>
           </a:ln>
         </p:spPr>
@@ -10743,95 +12266,144 @@
           </a:fontRef>
         </p:style>
         <p:txBody>
-          <a:bodyPr rtlCol="0" anchor="ctr" wrap="square" lIns="320040" rIns="320040" tIns="274320"/>
+          <a:bodyPr rtlCol="0" anchor="ctr" wrap="square" lIns="320040" tIns="182880"/>
           <a:lstStyle/>
           <a:p>
             <a:pPr algn="ctr">
               <a:spcAft>
-                <a:spcPts val="1200"/>
+                <a:spcPts val="600"/>
               </a:spcAft>
-              <a:defRPr sz="1500" b="1">
-                <a:solidFill>
-                  <a:srgbClr val="DFBA8E"/>
-                </a:solidFill>
-              </a:defRPr>
-            </a:pPr>
-            <a:r>
-              <a:t>FORMULA PROMPT PINTAR (A-T-G)</a:t>
-            </a:r>
-          </a:p>
-          <a:p>
-            <a:pPr>
-              <a:spcAft>
-                <a:spcPts val="800"/>
-              </a:spcAft>
-              <a:defRPr sz="1250">
+              <a:defRPr sz="1100" b="1">
+                <a:solidFill>
+                  <a:srgbClr val="D4AF37"/>
+                </a:solidFill>
+              </a:defRPr>
+            </a:pPr>
+            <a:r>
+              <a:t>🤖 JAWAPAN SPONTAN AI (DALAM MASA 3 SAAT):</a:t>
+            </a:r>
+          </a:p>
+          <a:p>
+            <a:pPr>
+              <a:defRPr sz="1250" b="1">
                 <a:solidFill>
                   <a:srgbClr val="F1F5F9"/>
                 </a:solidFill>
               </a:defRPr>
             </a:pPr>
             <a:r>
-              <a:t>✔ A - Andaian Peranan: 'Bertindak sebagai guru sastera kreatif...'</a:t>
-            </a:r>
-          </a:p>
-          <a:p>
-            <a:pPr>
-              <a:spcAft>
-                <a:spcPts val="800"/>
-              </a:spcAft>
-              <a:defRPr sz="1250">
+              <a:t>Pergi ke kedai membeli laksa,   Singgah sebentar di Bukit Persekutuan;</a:t>
+            </a:r>
+          </a:p>
+          <a:p>
+            <a:pPr>
+              <a:defRPr sz="1250" b="1">
                 <a:solidFill>
                   <a:srgbClr val="F1F5F9"/>
                 </a:solidFill>
               </a:defRPr>
             </a:pPr>
             <a:r>
-              <a:t>✔ T - Tugasan Jelas: 'Tulis 2 rangkap pantun nasihat belajar rajin...'</a:t>
-            </a:r>
-          </a:p>
-          <a:p>
-            <a:pPr>
-              <a:spcAft>
-                <a:spcPts val="800"/>
-              </a:spcAft>
-              <a:defRPr sz="1250">
+              <a:t>Anak ASDAF hebat perkasa,       Celik digital peneraju masa depan!</a:t>
+            </a:r>
+          </a:p>
+          <a:p>
+            <a:pPr>
+              <a:defRPr sz="1250" b="0">
+                <a:solidFill>
+                  <a:srgbClr val="94A3B8"/>
+                </a:solidFill>
+              </a:defRPr>
+            </a:pPr>
+          </a:p>
+          <a:p>
+            <a:pPr>
+              <a:defRPr sz="1250" b="1">
                 <a:solidFill>
                   <a:srgbClr val="F1F5F9"/>
                 </a:solidFill>
               </a:defRPr>
             </a:pPr>
             <a:r>
-              <a:t>✔ G - Gaya &amp; Nada: 'Gunakan bahasa Melayu yang indah dan penuh semangat.'</a:t>
-            </a:r>
-          </a:p>
-          <a:p>
-            <a:pPr>
-              <a:spcAft>
-                <a:spcPts val="800"/>
-              </a:spcAft>
-              <a:defRPr sz="1250">
+              <a:t>Kain songket cantik terbentang, Tenunan indah warisan bangsa;</a:t>
+            </a:r>
+          </a:p>
+          <a:p>
+            <a:pPr>
+              <a:defRPr sz="1250" b="1">
                 <a:solidFill>
                   <a:srgbClr val="F1F5F9"/>
                 </a:solidFill>
               </a:defRPr>
             </a:pPr>
             <a:r>
-              <a:t>✔ AI bertindak mengikut konteks yang kita tetapkan!</a:t>
-            </a:r>
-          </a:p>
-        </p:txBody>
-      </p:sp>
-      <p:sp>
-        <p:nvSpPr>
-          <p:cNvPr id="9" name="TextBox 8"/>
+              <a:t>Semangat belajar setinggi bintang,  Bakal jurutera membina nusa.</a:t>
+            </a:r>
+          </a:p>
+        </p:txBody>
+      </p:sp>
+      <p:sp>
+        <p:nvSpPr>
+          <p:cNvPr id="9" name="Rounded Rectangle 8"/>
+          <p:cNvSpPr/>
+          <p:nvPr/>
+        </p:nvSpPr>
+        <p:spPr>
+          <a:xfrm>
+            <a:off x="822960" y="5486400"/>
+            <a:ext cx="10515600" cy="640080"/>
+          </a:xfrm>
+          <a:prstGeom prst="roundRect">
+            <a:avLst/>
+          </a:prstGeom>
+          <a:solidFill>
+            <a:srgbClr val="8A1C34"/>
+          </a:solidFill>
+          <a:ln>
+            <a:noFill/>
+          </a:ln>
+        </p:spPr>
+        <p:style>
+          <a:lnRef idx="1">
+            <a:schemeClr val="accent1"/>
+          </a:lnRef>
+          <a:fillRef idx="3">
+            <a:schemeClr val="accent1"/>
+          </a:fillRef>
+          <a:effectRef idx="2">
+            <a:schemeClr val="accent1"/>
+          </a:effectRef>
+          <a:fontRef idx="minor">
+            <a:schemeClr val="lt1"/>
+          </a:fontRef>
+        </p:style>
+        <p:txBody>
+          <a:bodyPr rtlCol="0" anchor="ctr" wrap="square"/>
+          <a:lstStyle/>
+          <a:p>
+            <a:pPr algn="ctr">
+              <a:defRPr sz="1200" b="1">
+                <a:solidFill>
+                  <a:srgbClr val="FFFFFF"/>
+                </a:solidFill>
+              </a:defRPr>
+            </a:pPr>
+            <a:r>
+              <a:t>💡 FORMULA PROMPT: Semakin jelas dan terperinci arahan yang kita berikan, semakin hebat dan tepat jawapan AI!</a:t>
+            </a:r>
+          </a:p>
+        </p:txBody>
+      </p:sp>
+      <p:sp>
+        <p:nvSpPr>
+          <p:cNvPr id="10" name="TextBox 9"/>
           <p:cNvSpPr txBox="1"/>
           <p:nvPr/>
         </p:nvSpPr>
         <p:spPr>
           <a:xfrm>
-            <a:off x="731520" y="6263640"/>
-            <a:ext cx="10698480" cy="411480"/>
+            <a:off x="731520" y="6309360"/>
+            <a:ext cx="10728655" cy="365760"/>
           </a:xfrm>
           <a:prstGeom prst="rect">
             <a:avLst/>
@@ -10852,7 +12424,7 @@
               </a:defRPr>
             </a:pPr>
             <a:r>
-              <a:t>NextGen Celik Digital 2026  •  UTM KL x ASDAF PERKIM  •  Sabtu, 12 September 2026                                                                    Slaid 5 / 16</a:t>
+              <a:t>Bengkel Santai NextGen Celik Digital 2026  |  UTM KL × ASDAF PERKIM                                             Slaid 5 / 16</a:t>
             </a:r>
           </a:p>
         </p:txBody>
@@ -10890,7 +12462,7 @@
             <a:avLst/>
           </a:prstGeom>
           <a:solidFill>
-            <a:srgbClr val="0F172A"/>
+            <a:srgbClr val="0A0F1D"/>
           </a:solidFill>
           <a:ln>
             <a:noFill/>
@@ -10927,13 +12499,13 @@
         <p:spPr>
           <a:xfrm>
             <a:off x="0" y="0"/>
-            <a:ext cx="12191695" cy="1188720"/>
+            <a:ext cx="12191695" cy="1097280"/>
           </a:xfrm>
           <a:prstGeom prst="rect">
             <a:avLst/>
           </a:prstGeom>
           <a:solidFill>
-            <a:srgbClr val="132238"/>
+            <a:srgbClr val="131E36"/>
           </a:solidFill>
           <a:ln>
             <a:noFill/>
@@ -10976,7 +12548,7 @@
             <a:avLst/>
           </a:prstGeom>
           <a:solidFill>
-            <a:srgbClr val="7A1C30"/>
+            <a:srgbClr val="8A1C34"/>
           </a:solidFill>
           <a:ln>
             <a:noFill/>
@@ -11012,14 +12584,14 @@
         </p:nvSpPr>
         <p:spPr>
           <a:xfrm>
-            <a:off x="0" y="1188720"/>
-            <a:ext cx="12191695" cy="45720"/>
+            <a:off x="0" y="1097280"/>
+            <a:ext cx="12191695" cy="36576"/>
           </a:xfrm>
           <a:prstGeom prst="rect">
             <a:avLst/>
           </a:prstGeom>
           <a:solidFill>
-            <a:srgbClr val="C5A880"/>
+            <a:srgbClr val="D4AF37"/>
           </a:solidFill>
           <a:ln>
             <a:noFill/>
@@ -11056,7 +12628,7 @@
         <p:spPr>
           <a:xfrm>
             <a:off x="731520" y="109728"/>
-            <a:ext cx="10698480" cy="1005840"/>
+            <a:ext cx="10728655" cy="914400"/>
           </a:xfrm>
           <a:prstGeom prst="rect">
             <a:avLst/>
@@ -11075,24 +12647,24 @@
               </a:spcAft>
               <a:defRPr sz="1100" b="1">
                 <a:solidFill>
-                  <a:srgbClr val="C5A880"/>
-                </a:solidFill>
-              </a:defRPr>
-            </a:pPr>
-            <a:r>
-              <a:t>SLAID 06  |  MODUL 1: DEMO VISUAL AI</a:t>
-            </a:r>
-          </a:p>
-          <a:p>
-            <a:pPr>
-              <a:defRPr sz="2100" b="1">
+                  <a:srgbClr val="D4AF37"/>
+                </a:solidFill>
+              </a:defRPr>
+            </a:pPr>
+            <a:r>
+              <a:t>SLAID 06 / 16  •  MODUL 1: DEMONSTRASI SENI VISUAL AI</a:t>
+            </a:r>
+          </a:p>
+          <a:p>
+            <a:pPr>
+              <a:defRPr sz="2200" b="1">
                 <a:solidFill>
                   <a:srgbClr val="FFFFFF"/>
                 </a:solidFill>
               </a:defRPr>
             </a:pPr>
             <a:r>
-              <a:t>Demonstrasi Langsung 2: Imaginasi Visual Menjadi Gambar Digital</a:t>
+              <a:t>Dari Teks Menjadi Gambar 4K: Canva Magic Media &amp; DALL-E</a:t>
             </a:r>
           </a:p>
           <a:p>
@@ -11104,7 +12676,7 @@
               </a:defRPr>
             </a:pPr>
             <a:r>
-              <a:t>Dari Teks Menjadi Seni Digital (Text-to-Image Generation)</a:t>
+              <a:t>Menzahirkan imaginasi paling liar menjadi karya seni digital dalam 5 saat</a:t>
             </a:r>
           </a:p>
         </p:txBody>
@@ -11117,18 +12689,18 @@
         </p:nvSpPr>
         <p:spPr>
           <a:xfrm>
-            <a:off x="731520" y="1463040"/>
-            <a:ext cx="5212080" cy="4663440"/>
+            <a:off x="822960" y="1463040"/>
+            <a:ext cx="3383280" cy="3840480"/>
           </a:xfrm>
           <a:prstGeom prst="roundRect">
             <a:avLst/>
           </a:prstGeom>
           <a:solidFill>
-            <a:srgbClr val="1B263B"/>
+            <a:srgbClr val="131E36"/>
           </a:solidFill>
-          <a:ln w="19050">
+          <a:ln w="25400">
             <a:solidFill>
-              <a:srgbClr val="7A1C30"/>
+              <a:srgbClr val="0EA5E9"/>
             </a:solidFill>
           </a:ln>
         </p:spPr>
@@ -11147,21 +12719,21 @@
           </a:fontRef>
         </p:style>
         <p:txBody>
-          <a:bodyPr rtlCol="0" anchor="ctr" wrap="square" lIns="320040" rIns="320040" tIns="274320"/>
+          <a:bodyPr rtlCol="0" anchor="ctr" wrap="square" lIns="228600" tIns="228600"/>
           <a:lstStyle/>
           <a:p>
             <a:pPr algn="ctr">
               <a:spcAft>
-                <a:spcPts val="1200"/>
+                <a:spcPts val="600"/>
               </a:spcAft>
-              <a:defRPr sz="1500" b="1">
-                <a:solidFill>
-                  <a:srgbClr val="C5A880"/>
-                </a:solidFill>
-              </a:defRPr>
-            </a:pPr>
-            <a:r>
-              <a:t>POIN &amp; KONSEP UTAMA</a:t>
+              <a:defRPr sz="1300" b="1">
+                <a:solidFill>
+                  <a:srgbClr val="0EA5E9"/>
+                </a:solidFill>
+              </a:defRPr>
+            </a:pPr>
+            <a:r>
+              <a:t>LANGKAH 1: IMAGINASI LIAR</a:t>
             </a:r>
           </a:p>
           <a:p>
@@ -11169,59 +12741,26 @@
               <a:spcAft>
                 <a:spcPts val="800"/>
               </a:spcAft>
-              <a:defRPr sz="1300">
+              <a:defRPr sz="1100" b="1">
+                <a:solidFill>
+                  <a:srgbClr val="FFFFFF"/>
+                </a:solidFill>
+              </a:defRPr>
+            </a:pPr>
+            <a:r>
+              <a:t>Murid Meja 4 beri idea spontan:</a:t>
+            </a:r>
+          </a:p>
+          <a:p>
+            <a:pPr>
+              <a:defRPr sz="1150">
                 <a:solidFill>
                   <a:srgbClr val="F1F5F9"/>
                 </a:solidFill>
               </a:defRPr>
             </a:pPr>
             <a:r>
-              <a:t>• Canva Magic Media / DALL-E / Bing Image Creator.</a:t>
-            </a:r>
-          </a:p>
-          <a:p>
-            <a:pPr>
-              <a:spcAft>
-                <a:spcPts val="800"/>
-              </a:spcAft>
-              <a:defRPr sz="1300">
-                <a:solidFill>
-                  <a:srgbClr val="F1F5F9"/>
-                </a:solidFill>
-              </a:defRPr>
-            </a:pPr>
-            <a:r>
-              <a:t>• Komputer melukis piksel demi piksel berdasarkan huraian perkataan.</a:t>
-            </a:r>
-          </a:p>
-          <a:p>
-            <a:pPr>
-              <a:spcAft>
-                <a:spcPts val="800"/>
-              </a:spcAft>
-              <a:defRPr sz="1300">
-                <a:solidFill>
-                  <a:srgbClr val="F1F5F9"/>
-                </a:solidFill>
-              </a:defRPr>
-            </a:pPr>
-            <a:r>
-              <a:t>• Eksperimen Liar Meja: 'Harimau Malaya jersi UTM di stesen angkasa'.</a:t>
-            </a:r>
-          </a:p>
-          <a:p>
-            <a:pPr>
-              <a:spcAft>
-                <a:spcPts val="800"/>
-              </a:spcAft>
-              <a:defRPr sz="1300">
-                <a:solidFill>
-                  <a:srgbClr val="F1F5F9"/>
-                </a:solidFill>
-              </a:defRPr>
-            </a:pPr>
-            <a:r>
-              <a:t>• Hasil visual 4K dipaparkan dalam masa kurang 10 saat!</a:t>
+              <a:t>“Harimau Malaya memakai jersi sukan UTM bermain bola sepak di stesen angkasa lepas!”</a:t>
             </a:r>
           </a:p>
         </p:txBody>
@@ -11234,18 +12773,18 @@
         </p:nvSpPr>
         <p:spPr>
           <a:xfrm>
-            <a:off x="6217920" y="1463040"/>
-            <a:ext cx="5212080" cy="4663440"/>
+            <a:off x="4389120" y="1463040"/>
+            <a:ext cx="3383280" cy="3840480"/>
           </a:xfrm>
           <a:prstGeom prst="roundRect">
             <a:avLst/>
           </a:prstGeom>
           <a:solidFill>
-            <a:srgbClr val="C5A880"/>
+            <a:srgbClr val="131E36"/>
           </a:solidFill>
-          <a:ln w="19050">
+          <a:ln w="25400">
             <a:solidFill>
-              <a:srgbClr val="C5A880"/>
+              <a:srgbClr val="A855F7"/>
             </a:solidFill>
           </a:ln>
         </p:spPr>
@@ -11264,21 +12803,21 @@
           </a:fontRef>
         </p:style>
         <p:txBody>
-          <a:bodyPr rtlCol="0" anchor="ctr" wrap="square" lIns="320040" rIns="320040" tIns="274320"/>
+          <a:bodyPr rtlCol="0" anchor="ctr" wrap="square" lIns="228600" tIns="228600"/>
           <a:lstStyle/>
           <a:p>
             <a:pPr algn="ctr">
               <a:spcAft>
-                <a:spcPts val="1200"/>
+                <a:spcPts val="600"/>
               </a:spcAft>
-              <a:defRPr sz="1500" b="1">
-                <a:solidFill>
-                  <a:srgbClr val="DFBA8E"/>
-                </a:solidFill>
-              </a:defRPr>
-            </a:pPr>
-            <a:r>
-              <a:t>APLIKASI KREATIF SENI AI</a:t>
+              <a:defRPr sz="1300" b="1">
+                <a:solidFill>
+                  <a:srgbClr val="A855F7"/>
+                </a:solidFill>
+              </a:defRPr>
+            </a:pPr>
+            <a:r>
+              <a:t>LANGKAH 2: PROZES PIKSEL AI</a:t>
             </a:r>
           </a:p>
           <a:p>
@@ -11286,14 +12825,83 @@
               <a:spcAft>
                 <a:spcPts val="800"/>
               </a:spcAft>
-              <a:defRPr sz="1250">
+              <a:defRPr sz="1100" b="1">
+                <a:solidFill>
+                  <a:srgbClr val="FFFFFF"/>
+                </a:solidFill>
+              </a:defRPr>
+            </a:pPr>
+            <a:r>
+              <a:t>AI menterjemah teks ke visual:</a:t>
+            </a:r>
+          </a:p>
+          <a:p>
+            <a:pPr>
+              <a:defRPr sz="1150">
                 <a:solidFill>
                   <a:srgbClr val="F1F5F9"/>
                 </a:solidFill>
               </a:defRPr>
             </a:pPr>
             <a:r>
-              <a:t>✔ Membantu mereka bentuk poster acara dan logo kelab sekolah.</a:t>
+              <a:t>Algoritma menyusun corak bulu harimau, warna merah UTM, sfera bumi bercahaya &amp; stadium bintang.</a:t>
+            </a:r>
+          </a:p>
+        </p:txBody>
+      </p:sp>
+      <p:sp>
+        <p:nvSpPr>
+          <p:cNvPr id="9" name="Rounded Rectangle 8"/>
+          <p:cNvSpPr/>
+          <p:nvPr/>
+        </p:nvSpPr>
+        <p:spPr>
+          <a:xfrm>
+            <a:off x="7955279" y="1463040"/>
+            <a:ext cx="3383280" cy="3840480"/>
+          </a:xfrm>
+          <a:prstGeom prst="roundRect">
+            <a:avLst/>
+          </a:prstGeom>
+          <a:solidFill>
+            <a:srgbClr val="131E36"/>
+          </a:solidFill>
+          <a:ln w="25400">
+            <a:solidFill>
+              <a:srgbClr val="10B981"/>
+            </a:solidFill>
+          </a:ln>
+        </p:spPr>
+        <p:style>
+          <a:lnRef idx="1">
+            <a:schemeClr val="accent1"/>
+          </a:lnRef>
+          <a:fillRef idx="3">
+            <a:schemeClr val="accent1"/>
+          </a:fillRef>
+          <a:effectRef idx="2">
+            <a:schemeClr val="accent1"/>
+          </a:effectRef>
+          <a:fontRef idx="minor">
+            <a:schemeClr val="lt1"/>
+          </a:fontRef>
+        </p:style>
+        <p:txBody>
+          <a:bodyPr rtlCol="0" anchor="ctr" wrap="square" lIns="228600" tIns="228600"/>
+          <a:lstStyle/>
+          <a:p>
+            <a:pPr algn="ctr">
+              <a:spcAft>
+                <a:spcPts val="600"/>
+              </a:spcAft>
+              <a:defRPr sz="1300" b="1">
+                <a:solidFill>
+                  <a:srgbClr val="10B981"/>
+                </a:solidFill>
+              </a:defRPr>
+            </a:pPr>
+            <a:r>
+              <a:t>LANGKAH 3: HASIL KARYA 4K</a:t>
             </a:r>
           </a:p>
           <a:p>
@@ -11301,58 +12909,92 @@
               <a:spcAft>
                 <a:spcPts val="800"/>
               </a:spcAft>
-              <a:defRPr sz="1250">
+              <a:defRPr sz="1100" b="1">
+                <a:solidFill>
+                  <a:srgbClr val="FFFFFF"/>
+                </a:solidFill>
+              </a:defRPr>
+            </a:pPr>
+            <a:r>
+              <a:t>Terjana dalam 5 saat:</a:t>
+            </a:r>
+          </a:p>
+          <a:p>
+            <a:pPr>
+              <a:defRPr sz="1150">
                 <a:solidFill>
                   <a:srgbClr val="F1F5F9"/>
                 </a:solidFill>
               </a:defRPr>
             </a:pPr>
             <a:r>
-              <a:t>✔ Menghidupkan watak animasi dan komik ciptaan sendiri.</a:t>
-            </a:r>
-          </a:p>
-          <a:p>
-            <a:pPr>
-              <a:spcAft>
-                <a:spcPts val="800"/>
-              </a:spcAft>
-              <a:defRPr sz="1250">
-                <a:solidFill>
-                  <a:srgbClr val="F1F5F9"/>
-                </a:solidFill>
-              </a:defRPr>
-            </a:pPr>
-            <a:r>
-              <a:t>✔ Menzahirkan idea projek sebelum prototaip sebenar dibina.</a:t>
-            </a:r>
-          </a:p>
-          <a:p>
-            <a:pPr>
-              <a:spcAft>
-                <a:spcPts val="800"/>
-              </a:spcAft>
-              <a:defRPr sz="1250">
-                <a:solidFill>
-                  <a:srgbClr val="F1F5F9"/>
-                </a:solidFill>
-              </a:defRPr>
-            </a:pPr>
-            <a:r>
-              <a:t>✔ Peringatan: Gunakan imej AI secara beretika, jangan cipta bahan palsu.</a:t>
-            </a:r>
-          </a:p>
-        </p:txBody>
-      </p:sp>
-      <p:sp>
-        <p:nvSpPr>
-          <p:cNvPr id="9" name="TextBox 8"/>
+              <a:t>Poster definisi tinggi sedia digunakan untuk logo kelab, buku komik, atau animasi sekolah!</a:t>
+            </a:r>
+          </a:p>
+        </p:txBody>
+      </p:sp>
+      <p:sp>
+        <p:nvSpPr>
+          <p:cNvPr id="10" name="Rounded Rectangle 9"/>
+          <p:cNvSpPr/>
+          <p:nvPr/>
+        </p:nvSpPr>
+        <p:spPr>
+          <a:xfrm>
+            <a:off x="822960" y="5486400"/>
+            <a:ext cx="10515600" cy="640080"/>
+          </a:xfrm>
+          <a:prstGeom prst="roundRect">
+            <a:avLst/>
+          </a:prstGeom>
+          <a:solidFill>
+            <a:srgbClr val="F59E0B"/>
+          </a:solidFill>
+          <a:ln>
+            <a:noFill/>
+          </a:ln>
+        </p:spPr>
+        <p:style>
+          <a:lnRef idx="1">
+            <a:schemeClr val="accent1"/>
+          </a:lnRef>
+          <a:fillRef idx="3">
+            <a:schemeClr val="accent1"/>
+          </a:fillRef>
+          <a:effectRef idx="2">
+            <a:schemeClr val="accent1"/>
+          </a:effectRef>
+          <a:fontRef idx="minor">
+            <a:schemeClr val="lt1"/>
+          </a:fontRef>
+        </p:style>
+        <p:txBody>
+          <a:bodyPr rtlCol="0" anchor="ctr" wrap="square"/>
+          <a:lstStyle/>
+          <a:p>
+            <a:pPr algn="ctr">
+              <a:defRPr sz="1150" b="1">
+                <a:solidFill>
+                  <a:srgbClr val="0A0F1D"/>
+                </a:solidFill>
+              </a:defRPr>
+            </a:pPr>
+            <a:r>
+              <a:t>🎨 ETIKA VISUAL: AI adalah alatan meluahkan kreativiti — jangan sekali-kali cipta gambar palsu (deepfake) yang fitnah orang lain!</a:t>
+            </a:r>
+          </a:p>
+        </p:txBody>
+      </p:sp>
+      <p:sp>
+        <p:nvSpPr>
+          <p:cNvPr id="11" name="TextBox 10"/>
           <p:cNvSpPr txBox="1"/>
           <p:nvPr/>
         </p:nvSpPr>
         <p:spPr>
           <a:xfrm>
-            <a:off x="731520" y="6263640"/>
-            <a:ext cx="10698480" cy="411480"/>
+            <a:off x="731520" y="6309360"/>
+            <a:ext cx="10728655" cy="365760"/>
           </a:xfrm>
           <a:prstGeom prst="rect">
             <a:avLst/>
@@ -11373,7 +13015,7 @@
               </a:defRPr>
             </a:pPr>
             <a:r>
-              <a:t>NextGen Celik Digital 2026  •  UTM KL x ASDAF PERKIM  •  Sabtu, 12 September 2026                                                                    Slaid 6 / 16</a:t>
+              <a:t>Bengkel Santai NextGen Celik Digital 2026  |  UTM KL × ASDAF PERKIM                                             Slaid 6 / 16</a:t>
             </a:r>
           </a:p>
         </p:txBody>
@@ -11411,7 +13053,7 @@
             <a:avLst/>
           </a:prstGeom>
           <a:solidFill>
-            <a:srgbClr val="0F172A"/>
+            <a:srgbClr val="0A0F1D"/>
           </a:solidFill>
           <a:ln>
             <a:noFill/>
@@ -11448,13 +13090,13 @@
         <p:spPr>
           <a:xfrm>
             <a:off x="0" y="0"/>
-            <a:ext cx="12191695" cy="1188720"/>
+            <a:ext cx="12191695" cy="1097280"/>
           </a:xfrm>
           <a:prstGeom prst="rect">
             <a:avLst/>
           </a:prstGeom>
           <a:solidFill>
-            <a:srgbClr val="132238"/>
+            <a:srgbClr val="131E36"/>
           </a:solidFill>
           <a:ln>
             <a:noFill/>
@@ -11497,7 +13139,7 @@
             <a:avLst/>
           </a:prstGeom>
           <a:solidFill>
-            <a:srgbClr val="7A1C30"/>
+            <a:srgbClr val="8A1C34"/>
           </a:solidFill>
           <a:ln>
             <a:noFill/>
@@ -11533,14 +13175,14 @@
         </p:nvSpPr>
         <p:spPr>
           <a:xfrm>
-            <a:off x="0" y="1188720"/>
-            <a:ext cx="12191695" cy="45720"/>
+            <a:off x="0" y="1097280"/>
+            <a:ext cx="12191695" cy="36576"/>
           </a:xfrm>
           <a:prstGeom prst="rect">
             <a:avLst/>
           </a:prstGeom>
           <a:solidFill>
-            <a:srgbClr val="C5A880"/>
+            <a:srgbClr val="D4AF37"/>
           </a:solidFill>
           <a:ln>
             <a:noFill/>
@@ -11577,7 +13219,7 @@
         <p:spPr>
           <a:xfrm>
             <a:off x="731520" y="109728"/>
-            <a:ext cx="10698480" cy="1005840"/>
+            <a:ext cx="10728655" cy="914400"/>
           </a:xfrm>
           <a:prstGeom prst="rect">
             <a:avLst/>
@@ -11596,24 +13238,24 @@
               </a:spcAft>
               <a:defRPr sz="1100" b="1">
                 <a:solidFill>
-                  <a:srgbClr val="C5A880"/>
-                </a:solidFill>
-              </a:defRPr>
-            </a:pPr>
-            <a:r>
-              <a:t>SLAID 07  |  MODUL 1: APLIKASI HARIAN PELAJAR</a:t>
-            </a:r>
-          </a:p>
-          <a:p>
-            <a:pPr>
-              <a:defRPr sz="2100" b="1">
+                  <a:srgbClr val="D4AF37"/>
+                </a:solidFill>
+              </a:defRPr>
+            </a:pPr>
+            <a:r>
+              <a:t>SLAID 07 / 16  •  MODUL 1: RAKAN BELAJAR PELAJAR</a:t>
+            </a:r>
+          </a:p>
+          <a:p>
+            <a:pPr>
+              <a:defRPr sz="2200" b="1">
                 <a:solidFill>
                   <a:srgbClr val="FFFFFF"/>
                 </a:solidFill>
               </a:defRPr>
             </a:pPr>
             <a:r>
-              <a:t>AI Boleh Bantu Kerja Sekolah: Jadual Belajar &amp; Tutor Peribadi</a:t>
+              <a:t>AI Sebagai Guru Tuisyen Peribadi 24 Jam: Boleh vs Jangan!</a:t>
             </a:r>
           </a:p>
           <a:p>
@@ -11625,7 +13267,7 @@
               </a:defRPr>
             </a:pPr>
             <a:r>
-              <a:t>AI Sebagai Rakan Belajar &amp; Guru Tuisyen Peribadi</a:t>
+              <a:t>Cara bijak memanfaatkan AI untuk peperiksaan SPM/PT3 tanpa hilang kejujuran ilmu</a:t>
             </a:r>
           </a:p>
         </p:txBody>
@@ -11638,18 +13280,18 @@
         </p:nvSpPr>
         <p:spPr>
           <a:xfrm>
-            <a:off x="731520" y="1463040"/>
-            <a:ext cx="5212080" cy="4663440"/>
+            <a:off x="822960" y="1463040"/>
+            <a:ext cx="5120640" cy="3840480"/>
           </a:xfrm>
           <a:prstGeom prst="roundRect">
             <a:avLst/>
           </a:prstGeom>
           <a:solidFill>
-            <a:srgbClr val="1B263B"/>
+            <a:srgbClr val="131E36"/>
           </a:solidFill>
-          <a:ln w="19050">
+          <a:ln w="25400">
             <a:solidFill>
-              <a:srgbClr val="7A1C30"/>
+              <a:srgbClr val="10B981"/>
             </a:solidFill>
           </a:ln>
         </p:spPr>
@@ -11668,21 +13310,21 @@
           </a:fontRef>
         </p:style>
         <p:txBody>
-          <a:bodyPr rtlCol="0" anchor="ctr" wrap="square" lIns="320040" rIns="320040" tIns="274320"/>
+          <a:bodyPr rtlCol="0" anchor="ctr" wrap="square" lIns="320040" tIns="228600"/>
           <a:lstStyle/>
           <a:p>
             <a:pPr algn="ctr">
               <a:spcAft>
-                <a:spcPts val="1200"/>
+                <a:spcPts val="1000"/>
               </a:spcAft>
               <a:defRPr sz="1500" b="1">
                 <a:solidFill>
-                  <a:srgbClr val="C5A880"/>
-                </a:solidFill>
-              </a:defRPr>
-            </a:pPr>
-            <a:r>
-              <a:t>POIN &amp; KONSEP UTAMA</a:t>
+                  <a:srgbClr val="10B981"/>
+                </a:solidFill>
+              </a:defRPr>
+            </a:pPr>
+            <a:r>
+              <a:t>✔ CARA TERBAIK GUNA AI (BOLEH!)</a:t>
             </a:r>
           </a:p>
           <a:p>
@@ -11690,14 +13332,14 @@
               <a:spcAft>
                 <a:spcPts val="800"/>
               </a:spcAft>
-              <a:defRPr sz="1300">
+              <a:defRPr sz="1200">
                 <a:solidFill>
                   <a:srgbClr val="F1F5F9"/>
                 </a:solidFill>
               </a:defRPr>
             </a:pPr>
             <a:r>
-              <a:t>• Menerangkan formula Matematik &amp; Sains yang rumit langkah demi langkah.</a:t>
+              <a:t>✔ Terangkan soalan Matematik sukar langkah demi langkah.</a:t>
             </a:r>
           </a:p>
           <a:p>
@@ -11705,14 +13347,14 @@
               <a:spcAft>
                 <a:spcPts val="800"/>
               </a:spcAft>
-              <a:defRPr sz="1300">
+              <a:defRPr sz="1200">
                 <a:solidFill>
                   <a:srgbClr val="F1F5F9"/>
                 </a:solidFill>
               </a:defRPr>
             </a:pPr>
             <a:r>
-              <a:t>• Menyemak tatabahasa &amp; kosa kata Bahasa Inggeris / Bahasa Melayu.</a:t>
+              <a:t>✔ Semak ejaan, tatabahasa &amp; kosa kata Bahasa Inggeris.</a:t>
             </a:r>
           </a:p>
           <a:p>
@@ -11720,14 +13362,14 @@
               <a:spcAft>
                 <a:spcPts val="800"/>
               </a:spcAft>
-              <a:defRPr sz="1300">
+              <a:defRPr sz="1200">
                 <a:solidFill>
                   <a:srgbClr val="F1F5F9"/>
                 </a:solidFill>
               </a:defRPr>
             </a:pPr>
             <a:r>
-              <a:t>• Membantu menyusun jadual ulang kaji harian menjelang peperiksaan SPM/PT3.</a:t>
+              <a:t>✔ Bina jadual ulang kaji harian menjelang peperiksaan.</a:t>
             </a:r>
           </a:p>
           <a:p>
@@ -11735,14 +13377,14 @@
               <a:spcAft>
                 <a:spcPts val="800"/>
               </a:spcAft>
-              <a:defRPr sz="1300">
+              <a:defRPr sz="1200">
                 <a:solidFill>
                   <a:srgbClr val="F1F5F9"/>
                 </a:solidFill>
               </a:defRPr>
             </a:pPr>
             <a:r>
-              <a:t>• Menjawab soalan tanpa rasa segan atau takut dimarahi.</a:t>
+              <a:t>✔ Beri kuiz latihan dan tanya soalan tanpa rasa segan.</a:t>
             </a:r>
           </a:p>
         </p:txBody>
@@ -11756,17 +13398,17 @@
         <p:spPr>
           <a:xfrm>
             <a:off x="6217920" y="1463040"/>
-            <a:ext cx="5212080" cy="4663440"/>
+            <a:ext cx="5120640" cy="3840480"/>
           </a:xfrm>
           <a:prstGeom prst="roundRect">
             <a:avLst/>
           </a:prstGeom>
           <a:solidFill>
-            <a:srgbClr val="C5A880"/>
+            <a:srgbClr val="131E36"/>
           </a:solidFill>
-          <a:ln w="19050">
+          <a:ln w="25400">
             <a:solidFill>
-              <a:srgbClr val="C5A880"/>
+              <a:srgbClr val="EF4444"/>
             </a:solidFill>
           </a:ln>
         </p:spPr>
@@ -11785,21 +13427,21 @@
           </a:fontRef>
         </p:style>
         <p:txBody>
-          <a:bodyPr rtlCol="0" anchor="ctr" wrap="square" lIns="320040" rIns="320040" tIns="274320"/>
+          <a:bodyPr rtlCol="0" anchor="ctr" wrap="square" lIns="320040" tIns="228600"/>
           <a:lstStyle/>
           <a:p>
             <a:pPr algn="ctr">
               <a:spcAft>
-                <a:spcPts val="1200"/>
+                <a:spcPts val="1000"/>
               </a:spcAft>
               <a:defRPr sz="1500" b="1">
                 <a:solidFill>
-                  <a:srgbClr val="DFBA8E"/>
-                </a:solidFill>
-              </a:defRPr>
-            </a:pPr>
-            <a:r>
-              <a:t>INTEGRITI AKADEMIK: AI BUKAN ALAT MENIPU!</a:t>
+                  <a:srgbClr val="EF4444"/>
+                </a:solidFill>
+              </a:defRPr>
+            </a:pPr>
+            <a:r>
+              <a:t>❌ PANTANG LARANG KERAS (JANGAN!)</a:t>
             </a:r>
           </a:p>
           <a:p>
@@ -11807,14 +13449,14 @@
               <a:spcAft>
                 <a:spcPts val="800"/>
               </a:spcAft>
-              <a:defRPr sz="1250">
+              <a:defRPr sz="1200">
                 <a:solidFill>
                   <a:srgbClr val="F1F5F9"/>
                 </a:solidFill>
               </a:defRPr>
             </a:pPr>
             <a:r>
-              <a:t>✔ GUNAKAN AI UNTUK: Memahami konsep, mencari idea, latihan soalan.</a:t>
+              <a:t>❌ Copy-paste bulat-bulat karangan atau jawapan kerja sekolah.</a:t>
             </a:r>
           </a:p>
           <a:p>
@@ -11822,14 +13464,14 @@
               <a:spcAft>
                 <a:spcPts val="800"/>
               </a:spcAft>
-              <a:defRPr sz="1250">
+              <a:defRPr sz="1200">
                 <a:solidFill>
                   <a:srgbClr val="F1F5F9"/>
                 </a:solidFill>
               </a:defRPr>
             </a:pPr>
             <a:r>
-              <a:t>✔ JANGAN GUNA UNTUK: Salin bulat-bulat kerja sekolah tanpa berfikir.</a:t>
+              <a:t>❌ Malas berfikir dan harap AI buat semua kerja rumah.</a:t>
             </a:r>
           </a:p>
           <a:p>
@@ -11837,14 +13479,14 @@
               <a:spcAft>
                 <a:spcPts val="800"/>
               </a:spcAft>
-              <a:defRPr sz="1250">
+              <a:defRPr sz="1200">
                 <a:solidFill>
                   <a:srgbClr val="F1F5F9"/>
                 </a:solidFill>
               </a:defRPr>
             </a:pPr>
             <a:r>
-              <a:t>✔ Otak manusia adalah aset paling berharga — latih otak berfikir kritis.</a:t>
+              <a:t>❌ Percaya 100% tanpa semak buku teks (AI boleh berhalusinasi).</a:t>
             </a:r>
           </a:p>
           <a:p>
@@ -11852,28 +13494,80 @@
               <a:spcAft>
                 <a:spcPts val="800"/>
               </a:spcAft>
-              <a:defRPr sz="1250">
+              <a:defRPr sz="1200">
                 <a:solidFill>
                   <a:srgbClr val="F1F5F9"/>
                 </a:solidFill>
               </a:defRPr>
             </a:pPr>
             <a:r>
-              <a:t>✔ Kejujuran ilmu membawa keberkatan masa depan.</a:t>
-            </a:r>
-          </a:p>
-        </p:txBody>
-      </p:sp>
-      <p:sp>
-        <p:nvSpPr>
-          <p:cNvPr id="9" name="TextBox 8"/>
+              <a:t>❌ Menipu cikgu dan diri sendiri — otak manusia mesti dilatih!</a:t>
+            </a:r>
+          </a:p>
+        </p:txBody>
+      </p:sp>
+      <p:sp>
+        <p:nvSpPr>
+          <p:cNvPr id="9" name="Rounded Rectangle 8"/>
+          <p:cNvSpPr/>
+          <p:nvPr/>
+        </p:nvSpPr>
+        <p:spPr>
+          <a:xfrm>
+            <a:off x="822960" y="5486400"/>
+            <a:ext cx="10515600" cy="640080"/>
+          </a:xfrm>
+          <a:prstGeom prst="roundRect">
+            <a:avLst/>
+          </a:prstGeom>
+          <a:solidFill>
+            <a:srgbClr val="8A1C34"/>
+          </a:solidFill>
+          <a:ln>
+            <a:noFill/>
+          </a:ln>
+        </p:spPr>
+        <p:style>
+          <a:lnRef idx="1">
+            <a:schemeClr val="accent1"/>
+          </a:lnRef>
+          <a:fillRef idx="3">
+            <a:schemeClr val="accent1"/>
+          </a:fillRef>
+          <a:effectRef idx="2">
+            <a:schemeClr val="accent1"/>
+          </a:effectRef>
+          <a:fontRef idx="minor">
+            <a:schemeClr val="lt1"/>
+          </a:fontRef>
+        </p:style>
+        <p:txBody>
+          <a:bodyPr rtlCol="0" anchor="ctr" wrap="square"/>
+          <a:lstStyle/>
+          <a:p>
+            <a:pPr algn="ctr">
+              <a:defRPr sz="1200" b="1">
+                <a:solidFill>
+                  <a:srgbClr val="FFFFFF"/>
+                </a:solidFill>
+              </a:defRPr>
+            </a:pPr>
+            <a:r>
+              <a:t>🧠 PESANAN INTEGRITI: 'AI patut buat otak kita makin pintar, bukan buat kita jadi malas berfikir!'</a:t>
+            </a:r>
+          </a:p>
+        </p:txBody>
+      </p:sp>
+      <p:sp>
+        <p:nvSpPr>
+          <p:cNvPr id="10" name="TextBox 9"/>
           <p:cNvSpPr txBox="1"/>
           <p:nvPr/>
         </p:nvSpPr>
         <p:spPr>
           <a:xfrm>
-            <a:off x="731520" y="6263640"/>
-            <a:ext cx="10698480" cy="411480"/>
+            <a:off x="731520" y="6309360"/>
+            <a:ext cx="10728655" cy="365760"/>
           </a:xfrm>
           <a:prstGeom prst="rect">
             <a:avLst/>
@@ -11894,7 +13588,7 @@
               </a:defRPr>
             </a:pPr>
             <a:r>
-              <a:t>NextGen Celik Digital 2026  •  UTM KL x ASDAF PERKIM  •  Sabtu, 12 September 2026                                                                    Slaid 7 / 16</a:t>
+              <a:t>Bengkel Santai NextGen Celik Digital 2026  |  UTM KL × ASDAF PERKIM                                             Slaid 7 / 16</a:t>
             </a:r>
           </a:p>
         </p:txBody>
@@ -11932,7 +13626,7 @@
             <a:avLst/>
           </a:prstGeom>
           <a:solidFill>
-            <a:srgbClr val="0F172A"/>
+            <a:srgbClr val="0A0F1D"/>
           </a:solidFill>
           <a:ln>
             <a:noFill/>
@@ -11969,13 +13663,13 @@
         <p:spPr>
           <a:xfrm>
             <a:off x="0" y="0"/>
-            <a:ext cx="12191695" cy="1188720"/>
+            <a:ext cx="12191695" cy="1097280"/>
           </a:xfrm>
           <a:prstGeom prst="rect">
             <a:avLst/>
           </a:prstGeom>
           <a:solidFill>
-            <a:srgbClr val="132238"/>
+            <a:srgbClr val="131E36"/>
           </a:solidFill>
           <a:ln>
             <a:noFill/>
@@ -12018,7 +13712,7 @@
             <a:avLst/>
           </a:prstGeom>
           <a:solidFill>
-            <a:srgbClr val="7A1C30"/>
+            <a:srgbClr val="8A1C34"/>
           </a:solidFill>
           <a:ln>
             <a:noFill/>
@@ -12054,14 +13748,14 @@
         </p:nvSpPr>
         <p:spPr>
           <a:xfrm>
-            <a:off x="0" y="1188720"/>
-            <a:ext cx="12191695" cy="45720"/>
+            <a:off x="0" y="1097280"/>
+            <a:ext cx="12191695" cy="36576"/>
           </a:xfrm>
           <a:prstGeom prst="rect">
             <a:avLst/>
           </a:prstGeom>
           <a:solidFill>
-            <a:srgbClr val="C5A880"/>
+            <a:srgbClr val="D4AF37"/>
           </a:solidFill>
           <a:ln>
             <a:noFill/>
@@ -12098,7 +13792,7 @@
         <p:spPr>
           <a:xfrm>
             <a:off x="731520" y="109728"/>
-            <a:ext cx="10698480" cy="1005840"/>
+            <a:ext cx="10728655" cy="914400"/>
           </a:xfrm>
           <a:prstGeom prst="rect">
             <a:avLst/>
@@ -12117,24 +13811,24 @@
               </a:spcAft>
               <a:defRPr sz="1100" b="1">
                 <a:solidFill>
-                  <a:srgbClr val="C5A880"/>
-                </a:solidFill>
-              </a:defRPr>
-            </a:pPr>
-            <a:r>
-              <a:t>SLAID 08  |  MODUL 1: KERJAYA &amp; MASA DEPAN</a:t>
-            </a:r>
-          </a:p>
-          <a:p>
-            <a:pPr>
-              <a:defRPr sz="2100" b="1">
+                  <a:srgbClr val="D4AF37"/>
+                </a:solidFill>
+              </a:defRPr>
+            </a:pPr>
+            <a:r>
+              <a:t>SLAID 08 / 16  •  MODUL 1: IMPIAN &amp; MASA DEPAN</a:t>
+            </a:r>
+          </a:p>
+          <a:p>
+            <a:pPr>
+              <a:defRPr sz="2200" b="1">
                 <a:solidFill>
                   <a:srgbClr val="FFFFFF"/>
                 </a:solidFill>
               </a:defRPr>
             </a:pPr>
             <a:r>
-              <a:t>Kerjaya Hebat Masa Depan: Di Mana Tempat Anak ASDAF?</a:t>
+              <a:t>Peluang Hebat Bidang Digital: Di Mana Tempat Anak ASDAF?</a:t>
             </a:r>
           </a:p>
           <a:p>
@@ -12146,7 +13840,7 @@
               </a:defRPr>
             </a:pPr>
             <a:r>
-              <a:t>Peluang Hebat Bidang Digital Menanti Anak ASDAF</a:t>
+              <a:t>5 Bidang Kerjaya Gaji Lumayan yang Tidak Memandang Latar Belakang Keturunan</a:t>
             </a:r>
           </a:p>
         </p:txBody>
@@ -12159,18 +13853,18 @@
         </p:nvSpPr>
         <p:spPr>
           <a:xfrm>
-            <a:off x="731520" y="1463040"/>
-            <a:ext cx="5212080" cy="4663440"/>
+            <a:off x="822960" y="1463040"/>
+            <a:ext cx="3383280" cy="1828800"/>
           </a:xfrm>
           <a:prstGeom prst="roundRect">
             <a:avLst/>
           </a:prstGeom>
           <a:solidFill>
-            <a:srgbClr val="1B263B"/>
+            <a:srgbClr val="131E36"/>
           </a:solidFill>
-          <a:ln w="19050">
+          <a:ln w="25400">
             <a:solidFill>
-              <a:srgbClr val="7A1C30"/>
+              <a:srgbClr val="A855F7"/>
             </a:solidFill>
           </a:ln>
         </p:spPr>
@@ -12189,81 +13883,42 @@
           </a:fontRef>
         </p:style>
         <p:txBody>
-          <a:bodyPr rtlCol="0" anchor="ctr" wrap="square" lIns="320040" rIns="320040" tIns="274320"/>
+          <a:bodyPr rtlCol="0" anchor="ctr" wrap="square" lIns="228600" tIns="137160"/>
           <a:lstStyle/>
           <a:p>
             <a:pPr algn="ctr">
-              <a:spcAft>
-                <a:spcPts val="1200"/>
-              </a:spcAft>
-              <a:defRPr sz="1500" b="1">
-                <a:solidFill>
-                  <a:srgbClr val="C5A880"/>
-                </a:solidFill>
-              </a:defRPr>
-            </a:pPr>
-            <a:r>
-              <a:t>POIN &amp; KONSEP UTAMA</a:t>
-            </a:r>
-          </a:p>
-          <a:p>
-            <a:pPr>
-              <a:spcAft>
-                <a:spcPts val="800"/>
-              </a:spcAft>
-              <a:defRPr sz="1300">
+              <a:defRPr sz="1150" b="1">
+                <a:solidFill>
+                  <a:srgbClr val="A855F7"/>
+                </a:solidFill>
+              </a:defRPr>
+            </a:pPr>
+            <a:r>
+              <a:t>1. PEREKA GAME &amp; ANIMASI</a:t>
+            </a:r>
+          </a:p>
+          <a:p>
+            <a:pPr>
+              <a:defRPr sz="950" b="1">
+                <a:solidFill>
+                  <a:srgbClr val="FFFFFF"/>
+                </a:solidFill>
+              </a:defRPr>
+            </a:pPr>
+            <a:r>
+              <a:t>Gaji Permulaan: RM4,000 - RM8,000</a:t>
+            </a:r>
+          </a:p>
+          <a:p>
+            <a:pPr>
+              <a:defRPr sz="1000">
                 <a:solidFill>
                   <a:srgbClr val="F1F5F9"/>
                 </a:solidFill>
               </a:defRPr>
             </a:pPr>
             <a:r>
-              <a:t>• Bakat teknologi tidak mengenal latar belakang atau tempat tinggal!</a:t>
-            </a:r>
-          </a:p>
-          <a:p>
-            <a:pPr>
-              <a:spcAft>
-                <a:spcPts val="800"/>
-              </a:spcAft>
-              <a:defRPr sz="1300">
-                <a:solidFill>
-                  <a:srgbClr val="F1F5F9"/>
-                </a:solidFill>
-              </a:defRPr>
-            </a:pPr>
-            <a:r>
-              <a:t>• Sesiapa yang mempunyai rasa ingin tahu tinggi boleh berjaya.</a:t>
-            </a:r>
-          </a:p>
-          <a:p>
-            <a:pPr>
-              <a:spcAft>
-                <a:spcPts val="800"/>
-              </a:spcAft>
-              <a:defRPr sz="1300">
-                <a:solidFill>
-                  <a:srgbClr val="F1F5F9"/>
-                </a:solidFill>
-              </a:defRPr>
-            </a:pPr>
-            <a:r>
-              <a:t>• Permintaan pasaran kerja terhadap pakar digital semakin melonjak.</a:t>
-            </a:r>
-          </a:p>
-          <a:p>
-            <a:pPr>
-              <a:spcAft>
-                <a:spcPts val="800"/>
-              </a:spcAft>
-              <a:defRPr sz="1300">
-                <a:solidFill>
-                  <a:srgbClr val="F1F5F9"/>
-                </a:solidFill>
-              </a:defRPr>
-            </a:pPr>
-            <a:r>
-              <a:t>• Gaji lumayan, fleksibiliti kerja, dan peluang membanggakan keluarga.</a:t>
+              <a:t>Mencipta dunia permainan Roblox, Mobile Legends, dan animasi 3D kegemaran ramai.</a:t>
             </a:r>
           </a:p>
         </p:txBody>
@@ -12276,18 +13931,18 @@
         </p:nvSpPr>
         <p:spPr>
           <a:xfrm>
-            <a:off x="6217920" y="1463040"/>
-            <a:ext cx="5212080" cy="4663440"/>
+            <a:off x="4389120" y="1463040"/>
+            <a:ext cx="3383280" cy="1828800"/>
           </a:xfrm>
           <a:prstGeom prst="roundRect">
             <a:avLst/>
           </a:prstGeom>
           <a:solidFill>
-            <a:srgbClr val="C5A880"/>
+            <a:srgbClr val="131E36"/>
           </a:solidFill>
-          <a:ln w="19050">
+          <a:ln w="25400">
             <a:solidFill>
-              <a:srgbClr val="C5A880"/>
+              <a:srgbClr val="0EA5E9"/>
             </a:solidFill>
           </a:ln>
         </p:spPr>
@@ -12306,110 +13961,342 @@
           </a:fontRef>
         </p:style>
         <p:txBody>
-          <a:bodyPr rtlCol="0" anchor="ctr" wrap="square" lIns="320040" rIns="320040" tIns="274320"/>
+          <a:bodyPr rtlCol="0" anchor="ctr" wrap="square" lIns="228600" tIns="137160"/>
           <a:lstStyle/>
           <a:p>
             <a:pPr algn="ctr">
-              <a:spcAft>
-                <a:spcPts val="1200"/>
-              </a:spcAft>
-              <a:defRPr sz="1500" b="1">
-                <a:solidFill>
-                  <a:srgbClr val="DFBA8E"/>
-                </a:solidFill>
-              </a:defRPr>
-            </a:pPr>
-            <a:r>
-              <a:t>5 IKON KERJAYA DIGITAL MASA DEPAN</a:t>
-            </a:r>
-          </a:p>
-          <a:p>
-            <a:pPr>
-              <a:spcAft>
-                <a:spcPts val="800"/>
-              </a:spcAft>
-              <a:defRPr sz="1250">
+              <a:defRPr sz="1150" b="1">
+                <a:solidFill>
+                  <a:srgbClr val="0EA5E9"/>
+                </a:solidFill>
+              </a:defRPr>
+            </a:pPr>
+            <a:r>
+              <a:t>2. JURUTERA AI &amp; DATA</a:t>
+            </a:r>
+          </a:p>
+          <a:p>
+            <a:pPr>
+              <a:defRPr sz="950" b="1">
+                <a:solidFill>
+                  <a:srgbClr val="FFFFFF"/>
+                </a:solidFill>
+              </a:defRPr>
+            </a:pPr>
+            <a:r>
+              <a:t>Gaji Permulaan: RM5,000 - RM10,000</a:t>
+            </a:r>
+          </a:p>
+          <a:p>
+            <a:pPr>
+              <a:defRPr sz="1000">
                 <a:solidFill>
                   <a:srgbClr val="F1F5F9"/>
                 </a:solidFill>
               </a:defRPr>
             </a:pPr>
             <a:r>
-              <a:t>✔ 1. Pereka Permainan Digital (Game Developer &amp; Animator)</a:t>
-            </a:r>
-          </a:p>
-          <a:p>
-            <a:pPr>
-              <a:spcAft>
-                <a:spcPts val="800"/>
-              </a:spcAft>
-              <a:defRPr sz="1250">
+              <a:t>Membina model kecerdasan buatan untuk meramal cuaca, kewangan, dan sistem kesihatan.</a:t>
+            </a:r>
+          </a:p>
+        </p:txBody>
+      </p:sp>
+      <p:sp>
+        <p:nvSpPr>
+          <p:cNvPr id="9" name="Rounded Rectangle 8"/>
+          <p:cNvSpPr/>
+          <p:nvPr/>
+        </p:nvSpPr>
+        <p:spPr>
+          <a:xfrm>
+            <a:off x="7955279" y="1463040"/>
+            <a:ext cx="3383280" cy="1828800"/>
+          </a:xfrm>
+          <a:prstGeom prst="roundRect">
+            <a:avLst/>
+          </a:prstGeom>
+          <a:solidFill>
+            <a:srgbClr val="131E36"/>
+          </a:solidFill>
+          <a:ln w="25400">
+            <a:solidFill>
+              <a:srgbClr val="EF4444"/>
+            </a:solidFill>
+          </a:ln>
+        </p:spPr>
+        <p:style>
+          <a:lnRef idx="1">
+            <a:schemeClr val="accent1"/>
+          </a:lnRef>
+          <a:fillRef idx="3">
+            <a:schemeClr val="accent1"/>
+          </a:fillRef>
+          <a:effectRef idx="2">
+            <a:schemeClr val="accent1"/>
+          </a:effectRef>
+          <a:fontRef idx="minor">
+            <a:schemeClr val="lt1"/>
+          </a:fontRef>
+        </p:style>
+        <p:txBody>
+          <a:bodyPr rtlCol="0" anchor="ctr" wrap="square" lIns="228600" tIns="137160"/>
+          <a:lstStyle/>
+          <a:p>
+            <a:pPr algn="ctr">
+              <a:defRPr sz="1150" b="1">
+                <a:solidFill>
+                  <a:srgbClr val="EF4444"/>
+                </a:solidFill>
+              </a:defRPr>
+            </a:pPr>
+            <a:r>
+              <a:t>3. PEJUANG SIBER (ETHICAL HACKER)</a:t>
+            </a:r>
+          </a:p>
+          <a:p>
+            <a:pPr>
+              <a:defRPr sz="950" b="1">
+                <a:solidFill>
+                  <a:srgbClr val="FFFFFF"/>
+                </a:solidFill>
+              </a:defRPr>
+            </a:pPr>
+            <a:r>
+              <a:t>Gaji Permulaan: RM4,500 - RM9,000</a:t>
+            </a:r>
+          </a:p>
+          <a:p>
+            <a:pPr>
+              <a:defRPr sz="1000">
                 <a:solidFill>
                   <a:srgbClr val="F1F5F9"/>
                 </a:solidFill>
               </a:defRPr>
             </a:pPr>
             <a:r>
-              <a:t>✔ 2. Jurutera Kecerdasan Buatan (AI &amp; Machine Learning Engineer)</a:t>
-            </a:r>
-          </a:p>
-          <a:p>
-            <a:pPr>
-              <a:spcAft>
-                <a:spcPts val="800"/>
-              </a:spcAft>
-              <a:defRPr sz="1250">
+              <a:t>Mempertahankan sistem perbankan negara dan laman web kerajaan daripada penjenayah siber.</a:t>
+            </a:r>
+          </a:p>
+        </p:txBody>
+      </p:sp>
+      <p:sp>
+        <p:nvSpPr>
+          <p:cNvPr id="10" name="Rounded Rectangle 9"/>
+          <p:cNvSpPr/>
+          <p:nvPr/>
+        </p:nvSpPr>
+        <p:spPr>
+          <a:xfrm>
+            <a:off x="822960" y="3474720"/>
+            <a:ext cx="5166360" cy="1828800"/>
+          </a:xfrm>
+          <a:prstGeom prst="roundRect">
+            <a:avLst/>
+          </a:prstGeom>
+          <a:solidFill>
+            <a:srgbClr val="131E36"/>
+          </a:solidFill>
+          <a:ln w="25400">
+            <a:solidFill>
+              <a:srgbClr val="10B981"/>
+            </a:solidFill>
+          </a:ln>
+        </p:spPr>
+        <p:style>
+          <a:lnRef idx="1">
+            <a:schemeClr val="accent1"/>
+          </a:lnRef>
+          <a:fillRef idx="3">
+            <a:schemeClr val="accent1"/>
+          </a:fillRef>
+          <a:effectRef idx="2">
+            <a:schemeClr val="accent1"/>
+          </a:effectRef>
+          <a:fontRef idx="minor">
+            <a:schemeClr val="lt1"/>
+          </a:fontRef>
+        </p:style>
+        <p:txBody>
+          <a:bodyPr rtlCol="0" anchor="ctr" wrap="square" lIns="274320" tIns="137160"/>
+          <a:lstStyle/>
+          <a:p>
+            <a:pPr algn="ctr">
+              <a:defRPr sz="1200" b="1">
+                <a:solidFill>
+                  <a:srgbClr val="10B981"/>
+                </a:solidFill>
+              </a:defRPr>
+            </a:pPr>
+            <a:r>
+              <a:t>4. JURUTERA DRON &amp; PERTANIAN</a:t>
+            </a:r>
+          </a:p>
+          <a:p>
+            <a:pPr>
+              <a:defRPr sz="1000" b="1">
+                <a:solidFill>
+                  <a:srgbClr val="FFFFFF"/>
+                </a:solidFill>
+              </a:defRPr>
+            </a:pPr>
+            <a:r>
+              <a:t>Gaji Permulaan: RM4,000 - RM7,500</a:t>
+            </a:r>
+          </a:p>
+          <a:p>
+            <a:pPr>
+              <a:defRPr sz="1050">
                 <a:solidFill>
                   <a:srgbClr val="F1F5F9"/>
                 </a:solidFill>
               </a:defRPr>
             </a:pPr>
             <a:r>
-              <a:t>✔ 3. Penganalisis Keselamatan Siber (Cyber Security Defender)</a:t>
-            </a:r>
-          </a:p>
-          <a:p>
-            <a:pPr>
-              <a:spcAft>
-                <a:spcPts val="800"/>
-              </a:spcAft>
-              <a:defRPr sz="1250">
+              <a:t>Mengemudi dron pintar untuk menyembur baja dan memantau ladang sawit secara automatik.</a:t>
+            </a:r>
+          </a:p>
+        </p:txBody>
+      </p:sp>
+      <p:sp>
+        <p:nvSpPr>
+          <p:cNvPr id="11" name="Rounded Rectangle 10"/>
+          <p:cNvSpPr/>
+          <p:nvPr/>
+        </p:nvSpPr>
+        <p:spPr>
+          <a:xfrm>
+            <a:off x="6172200" y="3474720"/>
+            <a:ext cx="5166360" cy="1828800"/>
+          </a:xfrm>
+          <a:prstGeom prst="roundRect">
+            <a:avLst/>
+          </a:prstGeom>
+          <a:solidFill>
+            <a:srgbClr val="131E36"/>
+          </a:solidFill>
+          <a:ln w="25400">
+            <a:solidFill>
+              <a:srgbClr val="D4AF37"/>
+            </a:solidFill>
+          </a:ln>
+        </p:spPr>
+        <p:style>
+          <a:lnRef idx="1">
+            <a:schemeClr val="accent1"/>
+          </a:lnRef>
+          <a:fillRef idx="3">
+            <a:schemeClr val="accent1"/>
+          </a:fillRef>
+          <a:effectRef idx="2">
+            <a:schemeClr val="accent1"/>
+          </a:effectRef>
+          <a:fontRef idx="minor">
+            <a:schemeClr val="lt1"/>
+          </a:fontRef>
+        </p:style>
+        <p:txBody>
+          <a:bodyPr rtlCol="0" anchor="ctr" wrap="square" lIns="274320" tIns="137160"/>
+          <a:lstStyle/>
+          <a:p>
+            <a:pPr algn="ctr">
+              <a:defRPr sz="1200" b="1">
+                <a:solidFill>
+                  <a:srgbClr val="D4AF37"/>
+                </a:solidFill>
+              </a:defRPr>
+            </a:pPr>
+            <a:r>
+              <a:t>5. CLOUD &amp; DEVOPS ENGINEER</a:t>
+            </a:r>
+          </a:p>
+          <a:p>
+            <a:pPr>
+              <a:defRPr sz="1000" b="1">
+                <a:solidFill>
+                  <a:srgbClr val="FFFFFF"/>
+                </a:solidFill>
+              </a:defRPr>
+            </a:pPr>
+            <a:r>
+              <a:t>Gaji Permulaan: RM5,000 - RM11,000</a:t>
+            </a:r>
+          </a:p>
+          <a:p>
+            <a:pPr>
+              <a:defRPr sz="1050">
                 <a:solidFill>
                   <a:srgbClr val="F1F5F9"/>
                 </a:solidFill>
               </a:defRPr>
             </a:pPr>
             <a:r>
-              <a:t>✔ 4. Jurutera Dron &amp; Robotik Pertanian Pintar</a:t>
-            </a:r>
-          </a:p>
-          <a:p>
-            <a:pPr>
-              <a:spcAft>
-                <a:spcPts val="800"/>
-              </a:spcAft>
-              <a:defRPr sz="1250">
-                <a:solidFill>
-                  <a:srgbClr val="F1F5F9"/>
-                </a:solidFill>
-              </a:defRPr>
-            </a:pPr>
-            <a:r>
-              <a:t>✔ 5. Pembangun Aplikasi Web &amp; Cloud DevOps Engineer</a:t>
-            </a:r>
-          </a:p>
-        </p:txBody>
-      </p:sp>
-      <p:sp>
-        <p:nvSpPr>
-          <p:cNvPr id="9" name="TextBox 8"/>
+              <a:t>Menjaga pelayan internet gergasi supaya Instagram, WhatsApp &amp; Shopee berjalan 24 jam.</a:t>
+            </a:r>
+          </a:p>
+        </p:txBody>
+      </p:sp>
+      <p:sp>
+        <p:nvSpPr>
+          <p:cNvPr id="12" name="Rounded Rectangle 11"/>
+          <p:cNvSpPr/>
+          <p:nvPr/>
+        </p:nvSpPr>
+        <p:spPr>
+          <a:xfrm>
+            <a:off x="822960" y="5486400"/>
+            <a:ext cx="10515600" cy="640080"/>
+          </a:xfrm>
+          <a:prstGeom prst="roundRect">
+            <a:avLst/>
+          </a:prstGeom>
+          <a:solidFill>
+            <a:srgbClr val="8A1C34"/>
+          </a:solidFill>
+          <a:ln>
+            <a:noFill/>
+          </a:ln>
+        </p:spPr>
+        <p:style>
+          <a:lnRef idx="1">
+            <a:schemeClr val="accent1"/>
+          </a:lnRef>
+          <a:fillRef idx="3">
+            <a:schemeClr val="accent1"/>
+          </a:fillRef>
+          <a:effectRef idx="2">
+            <a:schemeClr val="accent1"/>
+          </a:effectRef>
+          <a:fontRef idx="minor">
+            <a:schemeClr val="lt1"/>
+          </a:fontRef>
+        </p:style>
+        <p:txBody>
+          <a:bodyPr rtlCol="0" anchor="ctr" wrap="square"/>
+          <a:lstStyle/>
+          <a:p>
+            <a:pPr algn="ctr">
+              <a:defRPr sz="1200" b="1">
+                <a:solidFill>
+                  <a:srgbClr val="FFFFFF"/>
+                </a:solidFill>
+              </a:defRPr>
+            </a:pPr>
+            <a:r>
+              <a:t>🌟 MOTIVASI: 'Dunia IT tidak tanya kita anak siapa atau dari mana asal kita. Ia tanya kemahiran dan minat kita!'</a:t>
+            </a:r>
+          </a:p>
+        </p:txBody>
+      </p:sp>
+      <p:sp>
+        <p:nvSpPr>
+          <p:cNvPr id="13" name="TextBox 12"/>
           <p:cNvSpPr txBox="1"/>
           <p:nvPr/>
         </p:nvSpPr>
         <p:spPr>
           <a:xfrm>
-            <a:off x="731520" y="6263640"/>
-            <a:ext cx="10698480" cy="411480"/>
+            <a:off x="731520" y="6309360"/>
+            <a:ext cx="10728655" cy="365760"/>
           </a:xfrm>
           <a:prstGeom prst="rect">
             <a:avLst/>
@@ -12430,7 +14317,7 @@
               </a:defRPr>
             </a:pPr>
             <a:r>
-              <a:t>NextGen Celik Digital 2026  •  UTM KL x ASDAF PERKIM  •  Sabtu, 12 September 2026                                                                    Slaid 8 / 16</a:t>
+              <a:t>Bengkel Santai NextGen Celik Digital 2026  |  UTM KL × ASDAF PERKIM                                             Slaid 8 / 16</a:t>
             </a:r>
           </a:p>
         </p:txBody>
@@ -12468,7 +14355,7 @@
             <a:avLst/>
           </a:prstGeom>
           <a:solidFill>
-            <a:srgbClr val="0F172A"/>
+            <a:srgbClr val="0A0F1D"/>
           </a:solidFill>
           <a:ln>
             <a:noFill/>
@@ -12505,13 +14392,13 @@
         <p:spPr>
           <a:xfrm>
             <a:off x="0" y="0"/>
-            <a:ext cx="12191695" cy="1188720"/>
+            <a:ext cx="12191695" cy="1097280"/>
           </a:xfrm>
           <a:prstGeom prst="rect">
             <a:avLst/>
           </a:prstGeom>
           <a:solidFill>
-            <a:srgbClr val="132238"/>
+            <a:srgbClr val="131E36"/>
           </a:solidFill>
           <a:ln>
             <a:noFill/>
@@ -12554,7 +14441,7 @@
             <a:avLst/>
           </a:prstGeom>
           <a:solidFill>
-            <a:srgbClr val="7A1C30"/>
+            <a:srgbClr val="8A1C34"/>
           </a:solidFill>
           <a:ln>
             <a:noFill/>
@@ -12590,14 +14477,14 @@
         </p:nvSpPr>
         <p:spPr>
           <a:xfrm>
-            <a:off x="0" y="1188720"/>
-            <a:ext cx="12191695" cy="45720"/>
+            <a:off x="0" y="1097280"/>
+            <a:ext cx="12191695" cy="36576"/>
           </a:xfrm>
           <a:prstGeom prst="rect">
             <a:avLst/>
           </a:prstGeom>
           <a:solidFill>
-            <a:srgbClr val="C5A880"/>
+            <a:srgbClr val="D4AF37"/>
           </a:solidFill>
           <a:ln>
             <a:noFill/>
@@ -12634,7 +14521,7 @@
         <p:spPr>
           <a:xfrm>
             <a:off x="731520" y="109728"/>
-            <a:ext cx="10698480" cy="1005840"/>
+            <a:ext cx="10728655" cy="914400"/>
           </a:xfrm>
           <a:prstGeom prst="rect">
             <a:avLst/>
@@ -12653,24 +14540,24 @@
               </a:spcAft>
               <a:defRPr sz="1100" b="1">
                 <a:solidFill>
-                  <a:srgbClr val="C5A880"/>
-                </a:solidFill>
-              </a:defRPr>
-            </a:pPr>
-            <a:r>
-              <a:t>SLAID 09  |  MODUL 2: KESELAMATAN SIBER</a:t>
-            </a:r>
-          </a:p>
-          <a:p>
-            <a:pPr>
-              <a:defRPr sz="2100" b="1">
+                  <a:srgbClr val="D4AF37"/>
+                </a:solidFill>
+              </a:defRPr>
+            </a:pPr>
+            <a:r>
+              <a:t>SLAID 09 / 16  •  MODUL 2: KESELAMATAN SIBER</a:t>
+            </a:r>
+          </a:p>
+          <a:p>
+            <a:pPr>
+              <a:defRPr sz="2200" b="1">
                 <a:solidFill>
                   <a:srgbClr val="FFFFFF"/>
                 </a:solidFill>
               </a:defRPr>
             </a:pPr>
             <a:r>
-              <a:t>Dunia Gelap Internet: Scam, Phishing &amp; Jerat Media Sosial</a:t>
+              <a:t>Dunia Gelap Internet: Jerat Scam, Phishing &amp; Hadiah Palsu</a:t>
             </a:r>
           </a:p>
           <a:p>
@@ -12682,7 +14569,7 @@
               </a:defRPr>
             </a:pPr>
             <a:r>
-              <a:t>Bahaya Scam, Pancingan Data (Phishing) &amp; Perangkap Maya</a:t>
+              <a:t>Bagaimana penjenayah siber memancing data peribadi dan duit keluarga kita?</a:t>
             </a:r>
           </a:p>
         </p:txBody>
@@ -12695,18 +14582,18 @@
         </p:nvSpPr>
         <p:spPr>
           <a:xfrm>
-            <a:off x="731520" y="1463040"/>
-            <a:ext cx="5212080" cy="4663440"/>
+            <a:off x="822960" y="1463040"/>
+            <a:ext cx="5120640" cy="3840480"/>
           </a:xfrm>
           <a:prstGeom prst="roundRect">
             <a:avLst/>
           </a:prstGeom>
           <a:solidFill>
-            <a:srgbClr val="1B263B"/>
+            <a:srgbClr val="230F14"/>
           </a:solidFill>
-          <a:ln w="19050">
+          <a:ln w="31750">
             <a:solidFill>
-              <a:srgbClr val="7A1C30"/>
+              <a:srgbClr val="EF4444"/>
             </a:solidFill>
           </a:ln>
         </p:spPr>
@@ -12725,81 +14612,48 @@
           </a:fontRef>
         </p:style>
         <p:txBody>
-          <a:bodyPr rtlCol="0" anchor="ctr" wrap="square" lIns="320040" rIns="320040" tIns="274320"/>
+          <a:bodyPr rtlCol="0" anchor="ctr" wrap="square" lIns="320040" tIns="228600"/>
           <a:lstStyle/>
           <a:p>
             <a:pPr algn="ctr">
-              <a:spcAft>
-                <a:spcPts val="1200"/>
-              </a:spcAft>
-              <a:defRPr sz="1500" b="1">
-                <a:solidFill>
-                  <a:srgbClr val="C5A880"/>
-                </a:solidFill>
-              </a:defRPr>
-            </a:pPr>
-            <a:r>
-              <a:t>POIN &amp; KONSEP UTAMA</a:t>
-            </a:r>
-          </a:p>
-          <a:p>
-            <a:pPr>
               <a:spcAft>
                 <a:spcPts val="800"/>
               </a:spcAft>
-              <a:defRPr sz="1300">
+              <a:defRPr sz="1300" b="1">
+                <a:solidFill>
+                  <a:srgbClr val="EF4444"/>
+                </a:solidFill>
+              </a:defRPr>
+            </a:pPr>
+            <a:r>
+              <a:t>⚠️ CONTOH MESEJ WHATSAPP JERAT SCAM:</a:t>
+            </a:r>
+          </a:p>
+          <a:p>
+            <a:pPr>
+              <a:spcAft>
+                <a:spcPts val="1000"/>
+              </a:spcAft>
+              <a:defRPr sz="1200" b="1">
+                <a:solidFill>
+                  <a:srgbClr val="FECACA"/>
+                </a:solidFill>
+              </a:defRPr>
+            </a:pPr>
+            <a:r>
+              <a:t>“Tahniah! Nombor telefon anda telah dicabut bertuah memenangi RM10,000 TUNAI dari Shopee Sempena Hari Kemerdekaan! Sila klik pautan bit.ly/claim-wang-sekarang dan masukkan kata laluan untuk sahkan akaun dalam masa 10 MINIT sebelum hadiah dibatalkan!”</a:t>
+            </a:r>
+          </a:p>
+          <a:p>
+            <a:pPr>
+              <a:defRPr sz="1100">
                 <a:solidFill>
                   <a:srgbClr val="F1F5F9"/>
                 </a:solidFill>
               </a:defRPr>
             </a:pPr>
             <a:r>
-              <a:t>• Internet menawarkan ilmu, tetapi ada pemangsa mengintai mangsa.</a:t>
-            </a:r>
-          </a:p>
-          <a:p>
-            <a:pPr>
-              <a:spcAft>
-                <a:spcPts val="800"/>
-              </a:spcAft>
-              <a:defRPr sz="1300">
-                <a:solidFill>
-                  <a:srgbClr val="F1F5F9"/>
-                </a:solidFill>
-              </a:defRPr>
-            </a:pPr>
-            <a:r>
-              <a:t>• Scam Kejutan Hadiah: 'Tahniah! Anda menang RM10,000 dari Shopee'.</a:t>
-            </a:r>
-          </a:p>
-          <a:p>
-            <a:pPr>
-              <a:spcAft>
-                <a:spcPts val="800"/>
-              </a:spcAft>
-              <a:defRPr sz="1300">
-                <a:solidFill>
-                  <a:srgbClr val="F1F5F9"/>
-                </a:solidFill>
-              </a:defRPr>
-            </a:pPr>
-            <a:r>
-              <a:t>• Phishing Pautan Palsu: Web tiruan menyerupai bank atau media sosial.</a:t>
-            </a:r>
-          </a:p>
-          <a:p>
-            <a:pPr>
-              <a:spcAft>
-                <a:spcPts val="800"/>
-              </a:spcAft>
-              <a:defRPr sz="1300">
-                <a:solidFill>
-                  <a:srgbClr val="F1F5F9"/>
-                </a:solidFill>
-              </a:defRPr>
-            </a:pPr>
-            <a:r>
-              <a:t>• Umpan Tawaran Percuma: Topup percuma, diamond game percuma.</a:t>
+              <a:t>Akibat Jika Klik: Penggodam curi akaun media sosial, curi duit simpanan ibu bapa, dan sebar gambar peribadi!</a:t>
             </a:r>
           </a:p>
         </p:txBody>
@@ -12813,17 +14667,17 @@
         <p:spPr>
           <a:xfrm>
             <a:off x="6217920" y="1463040"/>
-            <a:ext cx="5212080" cy="4663440"/>
+            <a:ext cx="5120640" cy="3840480"/>
           </a:xfrm>
           <a:prstGeom prst="roundRect">
             <a:avLst/>
           </a:prstGeom>
           <a:solidFill>
-            <a:srgbClr val="C5A880"/>
+            <a:srgbClr val="131E36"/>
           </a:solidFill>
-          <a:ln w="19050">
+          <a:ln w="25400">
             <a:solidFill>
-              <a:srgbClr val="C5A880"/>
+              <a:srgbClr val="F59E0B"/>
             </a:solidFill>
           </a:ln>
         </p:spPr>
@@ -12842,95 +14696,132 @@
           </a:fontRef>
         </p:style>
         <p:txBody>
-          <a:bodyPr rtlCol="0" anchor="ctr" wrap="square" lIns="320040" rIns="320040" tIns="274320"/>
+          <a:bodyPr rtlCol="0" anchor="ctr" wrap="square" lIns="320040" tIns="228600"/>
           <a:lstStyle/>
           <a:p>
             <a:pPr algn="ctr">
               <a:spcAft>
-                <a:spcPts val="1200"/>
+                <a:spcPts val="1000"/>
               </a:spcAft>
               <a:defRPr sz="1500" b="1">
                 <a:solidFill>
-                  <a:srgbClr val="DFBA8E"/>
-                </a:solidFill>
-              </a:defRPr>
-            </a:pPr>
-            <a:r>
-              <a:t>TAKTIK LICIK PENJENAYAH SIBER</a:t>
+                  <a:srgbClr val="F59E0B"/>
+                </a:solidFill>
+              </a:defRPr>
+            </a:pPr>
+            <a:r>
+              <a:t>🚩 3 TANDA-TANDA JERAT SCAMMER</a:t>
             </a:r>
           </a:p>
           <a:p>
             <a:pPr>
               <a:spcAft>
-                <a:spcPts val="800"/>
+                <a:spcPts val="1000"/>
               </a:spcAft>
-              <a:defRPr sz="1250">
+              <a:defRPr sz="1200">
                 <a:solidFill>
                   <a:srgbClr val="F1F5F9"/>
                 </a:solidFill>
               </a:defRPr>
             </a:pPr>
             <a:r>
-              <a:t>✔ Mewujudkan rasa cemas: 'Akaun anda akan disekat dalam 5 minit!'.</a:t>
+              <a:t>1. Janji Wang Percuma / Hadiah Gila: Mana ada orang bagi RM10,000 suka-suka tanpa usaha!</a:t>
             </a:r>
           </a:p>
           <a:p>
             <a:pPr>
               <a:spcAft>
-                <a:spcPts val="800"/>
+                <a:spcPts val="1000"/>
               </a:spcAft>
-              <a:defRPr sz="1250">
+              <a:defRPr sz="1200">
                 <a:solidFill>
                   <a:srgbClr val="F1F5F9"/>
                 </a:solidFill>
               </a:defRPr>
             </a:pPr>
             <a:r>
-              <a:t>✔ Mewujudkan sifat tamak: Menjanjikan pulangan wang berganda tanpa usaha.</a:t>
+              <a:t>2. Cipta Suasana Panik: 'Cepat! 10 minit lagi akaun disekat!' — Scammer nak mangsa bertindak tanpa fikir.</a:t>
             </a:r>
           </a:p>
           <a:p>
             <a:pPr>
               <a:spcAft>
-                <a:spcPts val="800"/>
+                <a:spcPts val="1000"/>
               </a:spcAft>
-              <a:defRPr sz="1250">
+              <a:defRPr sz="1200">
                 <a:solidFill>
                   <a:srgbClr val="F1F5F9"/>
                 </a:solidFill>
               </a:defRPr>
             </a:pPr>
             <a:r>
-              <a:t>✔ Menyamar sebagai pihak berkuasa: Polis, mahkamah, LHDN, atau cikgu.</a:t>
-            </a:r>
-          </a:p>
-          <a:p>
-            <a:pPr>
-              <a:spcAft>
-                <a:spcPts val="800"/>
-              </a:spcAft>
-              <a:defRPr sz="1250">
-                <a:solidFill>
-                  <a:srgbClr val="F1F5F9"/>
-                </a:solidFill>
-              </a:defRPr>
-            </a:pPr>
-            <a:r>
-              <a:t>✔ Matlamat mereka: Mencuri nombor OTP, kata laluan, dan data peribadi.</a:t>
-            </a:r>
-          </a:p>
-        </p:txBody>
-      </p:sp>
-      <p:sp>
-        <p:nvSpPr>
-          <p:cNvPr id="9" name="TextBox 8"/>
+              <a:t>3. Minta Kata Laluan / OTP: Pihak bank dan guru takkan pernah minta OTP atau password anda!</a:t>
+            </a:r>
+          </a:p>
+        </p:txBody>
+      </p:sp>
+      <p:sp>
+        <p:nvSpPr>
+          <p:cNvPr id="9" name="Rounded Rectangle 8"/>
+          <p:cNvSpPr/>
+          <p:nvPr/>
+        </p:nvSpPr>
+        <p:spPr>
+          <a:xfrm>
+            <a:off x="822960" y="5486400"/>
+            <a:ext cx="10515600" cy="640080"/>
+          </a:xfrm>
+          <a:prstGeom prst="roundRect">
+            <a:avLst/>
+          </a:prstGeom>
+          <a:solidFill>
+            <a:srgbClr val="EF4444"/>
+          </a:solidFill>
+          <a:ln>
+            <a:noFill/>
+          </a:ln>
+        </p:spPr>
+        <p:style>
+          <a:lnRef idx="1">
+            <a:schemeClr val="accent1"/>
+          </a:lnRef>
+          <a:fillRef idx="3">
+            <a:schemeClr val="accent1"/>
+          </a:fillRef>
+          <a:effectRef idx="2">
+            <a:schemeClr val="accent1"/>
+          </a:effectRef>
+          <a:fontRef idx="minor">
+            <a:schemeClr val="lt1"/>
+          </a:fontRef>
+        </p:style>
+        <p:txBody>
+          <a:bodyPr rtlCol="0" anchor="ctr" wrap="square"/>
+          <a:lstStyle/>
+          <a:p>
+            <a:pPr algn="ctr">
+              <a:defRPr sz="1200" b="1">
+                <a:solidFill>
+                  <a:srgbClr val="FFFFFF"/>
+                </a:solidFill>
+              </a:defRPr>
+            </a:pPr>
+            <a:r>
+              <a:t>🚨 INGAT: Bila nampak tawaran terlalu manis untuk dipercayai, 99.9% adalah PENIPUAN SIBER!</a:t>
+            </a:r>
+          </a:p>
+        </p:txBody>
+      </p:sp>
+      <p:sp>
+        <p:nvSpPr>
+          <p:cNvPr id="10" name="TextBox 9"/>
           <p:cNvSpPr txBox="1"/>
           <p:nvPr/>
         </p:nvSpPr>
         <p:spPr>
           <a:xfrm>
-            <a:off x="731520" y="6263640"/>
-            <a:ext cx="10698480" cy="411480"/>
+            <a:off x="731520" y="6309360"/>
+            <a:ext cx="10728655" cy="365760"/>
           </a:xfrm>
           <a:prstGeom prst="rect">
             <a:avLst/>
@@ -12951,7 +14842,7 @@
               </a:defRPr>
             </a:pPr>
             <a:r>
-              <a:t>NextGen Celik Digital 2026  •  UTM KL x ASDAF PERKIM  •  Sabtu, 12 September 2026                                                                    Slaid 9 / 16</a:t>
+              <a:t>Bengkel Santai NextGen Celik Digital 2026  |  UTM KL × ASDAF PERKIM                                             Slaid 9 / 16</a:t>
             </a:r>
           </a:p>
         </p:txBody>
